--- a/exports/pptx/lessons/middle-module-13-indic-ecology/day-08-climate-change.pptx
+++ b/exports/pptx/lessons/middle-module-13-indic-ecology/day-08-climate-change.pptx
@@ -16,9 +16,22 @@
     <p:sldId id="264" r:id="rId10"/>
     <p:sldId id="265" r:id="rId11"/>
     <p:sldId id="266" r:id="rId12"/>
+    <p:sldId id="267" r:id="rId13"/>
+    <p:sldId id="268" r:id="rId14"/>
+    <p:sldId id="269" r:id="rId15"/>
+    <p:sldId id="270" r:id="rId16"/>
+    <p:sldId id="271" r:id="rId17"/>
+    <p:sldId id="272" r:id="rId18"/>
+    <p:sldId id="273" r:id="rId19"/>
+    <p:sldId id="274" r:id="rId20"/>
+    <p:sldId id="275" r:id="rId21"/>
+    <p:sldId id="276" r:id="rId22"/>
+    <p:sldId id="277" r:id="rId23"/>
+    <p:sldId id="278" r:id="rId24"/>
+    <p:sldId id="279" r:id="rId25"/>
   </p:sldIdLst>
   <p:notesMasterIdLst>
-    <p:notesMasterId r:id="rId13"/>
+    <p:notesMasterId r:id="rId26"/>
   </p:notesMasterIdLst>
   <p:sldSz cx="9144000" cy="5143500"/>
   <p:notesSz cx="5143500" cy="9144000"/>
@@ -730,6 +743,710 @@
 </p:notes>
 </file>
 
+<file path=ppt/notesSlides/notesSlide12.xml><?xml version="1.0" encoding="utf-8"?>
+<p:notes xmlns:a="http://schemas.openxmlformats.org/drawingml/2006/main" xmlns:r="http://schemas.openxmlformats.org/officeDocument/2006/relationships" xmlns:p="http://schemas.openxmlformats.org/presentationml/2006/main">
+  <p:cSld>
+    <p:spTree>
+      <p:nvGrpSpPr>
+        <p:cNvPr id="1" name=""/>
+        <p:cNvGrpSpPr/>
+        <p:nvPr/>
+      </p:nvGrpSpPr>
+      <p:grpSpPr>
+        <a:xfrm>
+          <a:off x="0" y="0"/>
+          <a:ext cx="0" cy="0"/>
+          <a:chOff x="0" y="0"/>
+          <a:chExt cx="0" cy="0"/>
+        </a:xfrm>
+      </p:grpSpPr>
+      <p:sp>
+        <p:nvSpPr>
+          <p:cNvPr id="2" name="Slide Image Placeholder 1"/>
+          <p:cNvSpPr>
+            <a:spLocks noGrp="1" noRot="1" noChangeAspect="1"/>
+          </p:cNvSpPr>
+          <p:nvPr>
+            <p:ph type="sldImg"/>
+          </p:nvPr>
+        </p:nvSpPr>
+        <p:spPr/>
+      </p:sp>
+      <p:sp>
+        <p:nvSpPr>
+          <p:cNvPr id="3" name="Notes Placeholder 2"/>
+          <p:cNvSpPr>
+            <a:spLocks noGrp="1"/>
+          </p:cNvSpPr>
+          <p:nvPr>
+            <p:ph type="body" idx="1"/>
+          </p:nvPr>
+        </p:nvSpPr>
+        <p:spPr/>
+        <p:txBody>
+          <a:bodyPr/>
+          <a:lstStyle/>
+          <a:p>
+            <a:r>
+              <a:rPr lang="en-US" dirty="0"/>
+              <a:t/>
+            </a:r>
+            <a:endParaRPr lang="en-US" dirty="0"/>
+          </a:p>
+        </p:txBody>
+      </p:sp>
+      <p:sp>
+        <p:nvSpPr>
+          <p:cNvPr id="4" name="Slide Number Placeholder 3"/>
+          <p:cNvSpPr>
+            <a:spLocks noGrp="1"/>
+          </p:cNvSpPr>
+          <p:nvPr>
+            <p:ph type="sldNum" sz="quarter" idx="10"/>
+          </p:nvPr>
+        </p:nvSpPr>
+        <p:spPr/>
+        <p:txBody>
+          <a:bodyPr/>
+          <a:lstStyle/>
+          <a:p>
+            <a:fld id="{F7021451-1387-4CA6-816F-3879F97B5CBC}" type="slidenum">
+              <a:rPr lang="en-US"/>
+              <a:t>12</a:t>
+            </a:fld>
+            <a:endParaRPr lang="en-US"/>
+          </a:p>
+        </p:txBody>
+      </p:sp>
+    </p:spTree>
+    <p:extLst>
+      <p:ext uri="{BB962C8B-B14F-4D97-AF65-F5344CB8AC3E}">
+        <p14:creationId xmlns:p14="http://schemas.microsoft.com/office/powerpoint/2010/main" val="1024086991"/>
+      </p:ext>
+    </p:extLst>
+  </p:cSld>
+  <p:clrMapOvr>
+    <a:masterClrMapping/>
+  </p:clrMapOvr>
+</p:notes>
+</file>
+
+<file path=ppt/notesSlides/notesSlide13.xml><?xml version="1.0" encoding="utf-8"?>
+<p:notes xmlns:a="http://schemas.openxmlformats.org/drawingml/2006/main" xmlns:r="http://schemas.openxmlformats.org/officeDocument/2006/relationships" xmlns:p="http://schemas.openxmlformats.org/presentationml/2006/main">
+  <p:cSld>
+    <p:spTree>
+      <p:nvGrpSpPr>
+        <p:cNvPr id="1" name=""/>
+        <p:cNvGrpSpPr/>
+        <p:nvPr/>
+      </p:nvGrpSpPr>
+      <p:grpSpPr>
+        <a:xfrm>
+          <a:off x="0" y="0"/>
+          <a:ext cx="0" cy="0"/>
+          <a:chOff x="0" y="0"/>
+          <a:chExt cx="0" cy="0"/>
+        </a:xfrm>
+      </p:grpSpPr>
+      <p:sp>
+        <p:nvSpPr>
+          <p:cNvPr id="2" name="Slide Image Placeholder 1"/>
+          <p:cNvSpPr>
+            <a:spLocks noGrp="1" noRot="1" noChangeAspect="1"/>
+          </p:cNvSpPr>
+          <p:nvPr>
+            <p:ph type="sldImg"/>
+          </p:nvPr>
+        </p:nvSpPr>
+        <p:spPr/>
+      </p:sp>
+      <p:sp>
+        <p:nvSpPr>
+          <p:cNvPr id="3" name="Notes Placeholder 2"/>
+          <p:cNvSpPr>
+            <a:spLocks noGrp="1"/>
+          </p:cNvSpPr>
+          <p:nvPr>
+            <p:ph type="body" idx="1"/>
+          </p:nvPr>
+        </p:nvSpPr>
+        <p:spPr/>
+        <p:txBody>
+          <a:bodyPr/>
+          <a:lstStyle/>
+          <a:p>
+            <a:r>
+              <a:rPr lang="en-US" dirty="0"/>
+              <a:t/>
+            </a:r>
+            <a:endParaRPr lang="en-US" dirty="0"/>
+          </a:p>
+        </p:txBody>
+      </p:sp>
+      <p:sp>
+        <p:nvSpPr>
+          <p:cNvPr id="4" name="Slide Number Placeholder 3"/>
+          <p:cNvSpPr>
+            <a:spLocks noGrp="1"/>
+          </p:cNvSpPr>
+          <p:nvPr>
+            <p:ph type="sldNum" sz="quarter" idx="10"/>
+          </p:nvPr>
+        </p:nvSpPr>
+        <p:spPr/>
+        <p:txBody>
+          <a:bodyPr/>
+          <a:lstStyle/>
+          <a:p>
+            <a:fld id="{F7021451-1387-4CA6-816F-3879F97B5CBC}" type="slidenum">
+              <a:rPr lang="en-US"/>
+              <a:t>13</a:t>
+            </a:fld>
+            <a:endParaRPr lang="en-US"/>
+          </a:p>
+        </p:txBody>
+      </p:sp>
+    </p:spTree>
+    <p:extLst>
+      <p:ext uri="{BB962C8B-B14F-4D97-AF65-F5344CB8AC3E}">
+        <p14:creationId xmlns:p14="http://schemas.microsoft.com/office/powerpoint/2010/main" val="1024086991"/>
+      </p:ext>
+    </p:extLst>
+  </p:cSld>
+  <p:clrMapOvr>
+    <a:masterClrMapping/>
+  </p:clrMapOvr>
+</p:notes>
+</file>
+
+<file path=ppt/notesSlides/notesSlide14.xml><?xml version="1.0" encoding="utf-8"?>
+<p:notes xmlns:a="http://schemas.openxmlformats.org/drawingml/2006/main" xmlns:r="http://schemas.openxmlformats.org/officeDocument/2006/relationships" xmlns:p="http://schemas.openxmlformats.org/presentationml/2006/main">
+  <p:cSld>
+    <p:spTree>
+      <p:nvGrpSpPr>
+        <p:cNvPr id="1" name=""/>
+        <p:cNvGrpSpPr/>
+        <p:nvPr/>
+      </p:nvGrpSpPr>
+      <p:grpSpPr>
+        <a:xfrm>
+          <a:off x="0" y="0"/>
+          <a:ext cx="0" cy="0"/>
+          <a:chOff x="0" y="0"/>
+          <a:chExt cx="0" cy="0"/>
+        </a:xfrm>
+      </p:grpSpPr>
+      <p:sp>
+        <p:nvSpPr>
+          <p:cNvPr id="2" name="Slide Image Placeholder 1"/>
+          <p:cNvSpPr>
+            <a:spLocks noGrp="1" noRot="1" noChangeAspect="1"/>
+          </p:cNvSpPr>
+          <p:nvPr>
+            <p:ph type="sldImg"/>
+          </p:nvPr>
+        </p:nvSpPr>
+        <p:spPr/>
+      </p:sp>
+      <p:sp>
+        <p:nvSpPr>
+          <p:cNvPr id="3" name="Notes Placeholder 2"/>
+          <p:cNvSpPr>
+            <a:spLocks noGrp="1"/>
+          </p:cNvSpPr>
+          <p:nvPr>
+            <p:ph type="body" idx="1"/>
+          </p:nvPr>
+        </p:nvSpPr>
+        <p:spPr/>
+        <p:txBody>
+          <a:bodyPr/>
+          <a:lstStyle/>
+          <a:p>
+            <a:r>
+              <a:rPr lang="en-US" dirty="0"/>
+              <a:t/>
+            </a:r>
+            <a:endParaRPr lang="en-US" dirty="0"/>
+          </a:p>
+        </p:txBody>
+      </p:sp>
+      <p:sp>
+        <p:nvSpPr>
+          <p:cNvPr id="4" name="Slide Number Placeholder 3"/>
+          <p:cNvSpPr>
+            <a:spLocks noGrp="1"/>
+          </p:cNvSpPr>
+          <p:nvPr>
+            <p:ph type="sldNum" sz="quarter" idx="10"/>
+          </p:nvPr>
+        </p:nvSpPr>
+        <p:spPr/>
+        <p:txBody>
+          <a:bodyPr/>
+          <a:lstStyle/>
+          <a:p>
+            <a:fld id="{F7021451-1387-4CA6-816F-3879F97B5CBC}" type="slidenum">
+              <a:rPr lang="en-US"/>
+              <a:t>14</a:t>
+            </a:fld>
+            <a:endParaRPr lang="en-US"/>
+          </a:p>
+        </p:txBody>
+      </p:sp>
+    </p:spTree>
+    <p:extLst>
+      <p:ext uri="{BB962C8B-B14F-4D97-AF65-F5344CB8AC3E}">
+        <p14:creationId xmlns:p14="http://schemas.microsoft.com/office/powerpoint/2010/main" val="1024086991"/>
+      </p:ext>
+    </p:extLst>
+  </p:cSld>
+  <p:clrMapOvr>
+    <a:masterClrMapping/>
+  </p:clrMapOvr>
+</p:notes>
+</file>
+
+<file path=ppt/notesSlides/notesSlide15.xml><?xml version="1.0" encoding="utf-8"?>
+<p:notes xmlns:a="http://schemas.openxmlformats.org/drawingml/2006/main" xmlns:r="http://schemas.openxmlformats.org/officeDocument/2006/relationships" xmlns:p="http://schemas.openxmlformats.org/presentationml/2006/main">
+  <p:cSld>
+    <p:spTree>
+      <p:nvGrpSpPr>
+        <p:cNvPr id="1" name=""/>
+        <p:cNvGrpSpPr/>
+        <p:nvPr/>
+      </p:nvGrpSpPr>
+      <p:grpSpPr>
+        <a:xfrm>
+          <a:off x="0" y="0"/>
+          <a:ext cx="0" cy="0"/>
+          <a:chOff x="0" y="0"/>
+          <a:chExt cx="0" cy="0"/>
+        </a:xfrm>
+      </p:grpSpPr>
+      <p:sp>
+        <p:nvSpPr>
+          <p:cNvPr id="2" name="Slide Image Placeholder 1"/>
+          <p:cNvSpPr>
+            <a:spLocks noGrp="1" noRot="1" noChangeAspect="1"/>
+          </p:cNvSpPr>
+          <p:nvPr>
+            <p:ph type="sldImg"/>
+          </p:nvPr>
+        </p:nvSpPr>
+        <p:spPr/>
+      </p:sp>
+      <p:sp>
+        <p:nvSpPr>
+          <p:cNvPr id="3" name="Notes Placeholder 2"/>
+          <p:cNvSpPr>
+            <a:spLocks noGrp="1"/>
+          </p:cNvSpPr>
+          <p:nvPr>
+            <p:ph type="body" idx="1"/>
+          </p:nvPr>
+        </p:nvSpPr>
+        <p:spPr/>
+        <p:txBody>
+          <a:bodyPr/>
+          <a:lstStyle/>
+          <a:p>
+            <a:r>
+              <a:rPr lang="en-US" dirty="0"/>
+              <a:t/>
+            </a:r>
+            <a:endParaRPr lang="en-US" dirty="0"/>
+          </a:p>
+        </p:txBody>
+      </p:sp>
+      <p:sp>
+        <p:nvSpPr>
+          <p:cNvPr id="4" name="Slide Number Placeholder 3"/>
+          <p:cNvSpPr>
+            <a:spLocks noGrp="1"/>
+          </p:cNvSpPr>
+          <p:nvPr>
+            <p:ph type="sldNum" sz="quarter" idx="10"/>
+          </p:nvPr>
+        </p:nvSpPr>
+        <p:spPr/>
+        <p:txBody>
+          <a:bodyPr/>
+          <a:lstStyle/>
+          <a:p>
+            <a:fld id="{F7021451-1387-4CA6-816F-3879F97B5CBC}" type="slidenum">
+              <a:rPr lang="en-US"/>
+              <a:t>15</a:t>
+            </a:fld>
+            <a:endParaRPr lang="en-US"/>
+          </a:p>
+        </p:txBody>
+      </p:sp>
+    </p:spTree>
+    <p:extLst>
+      <p:ext uri="{BB962C8B-B14F-4D97-AF65-F5344CB8AC3E}">
+        <p14:creationId xmlns:p14="http://schemas.microsoft.com/office/powerpoint/2010/main" val="1024086991"/>
+      </p:ext>
+    </p:extLst>
+  </p:cSld>
+  <p:clrMapOvr>
+    <a:masterClrMapping/>
+  </p:clrMapOvr>
+</p:notes>
+</file>
+
+<file path=ppt/notesSlides/notesSlide16.xml><?xml version="1.0" encoding="utf-8"?>
+<p:notes xmlns:a="http://schemas.openxmlformats.org/drawingml/2006/main" xmlns:r="http://schemas.openxmlformats.org/officeDocument/2006/relationships" xmlns:p="http://schemas.openxmlformats.org/presentationml/2006/main">
+  <p:cSld>
+    <p:spTree>
+      <p:nvGrpSpPr>
+        <p:cNvPr id="1" name=""/>
+        <p:cNvGrpSpPr/>
+        <p:nvPr/>
+      </p:nvGrpSpPr>
+      <p:grpSpPr>
+        <a:xfrm>
+          <a:off x="0" y="0"/>
+          <a:ext cx="0" cy="0"/>
+          <a:chOff x="0" y="0"/>
+          <a:chExt cx="0" cy="0"/>
+        </a:xfrm>
+      </p:grpSpPr>
+      <p:sp>
+        <p:nvSpPr>
+          <p:cNvPr id="2" name="Slide Image Placeholder 1"/>
+          <p:cNvSpPr>
+            <a:spLocks noGrp="1" noRot="1" noChangeAspect="1"/>
+          </p:cNvSpPr>
+          <p:nvPr>
+            <p:ph type="sldImg"/>
+          </p:nvPr>
+        </p:nvSpPr>
+        <p:spPr/>
+      </p:sp>
+      <p:sp>
+        <p:nvSpPr>
+          <p:cNvPr id="3" name="Notes Placeholder 2"/>
+          <p:cNvSpPr>
+            <a:spLocks noGrp="1"/>
+          </p:cNvSpPr>
+          <p:nvPr>
+            <p:ph type="body" idx="1"/>
+          </p:nvPr>
+        </p:nvSpPr>
+        <p:spPr/>
+        <p:txBody>
+          <a:bodyPr/>
+          <a:lstStyle/>
+          <a:p>
+            <a:r>
+              <a:rPr lang="en-US" dirty="0"/>
+              <a:t/>
+            </a:r>
+            <a:endParaRPr lang="en-US" dirty="0"/>
+          </a:p>
+        </p:txBody>
+      </p:sp>
+      <p:sp>
+        <p:nvSpPr>
+          <p:cNvPr id="4" name="Slide Number Placeholder 3"/>
+          <p:cNvSpPr>
+            <a:spLocks noGrp="1"/>
+          </p:cNvSpPr>
+          <p:nvPr>
+            <p:ph type="sldNum" sz="quarter" idx="10"/>
+          </p:nvPr>
+        </p:nvSpPr>
+        <p:spPr/>
+        <p:txBody>
+          <a:bodyPr/>
+          <a:lstStyle/>
+          <a:p>
+            <a:fld id="{F7021451-1387-4CA6-816F-3879F97B5CBC}" type="slidenum">
+              <a:rPr lang="en-US"/>
+              <a:t>16</a:t>
+            </a:fld>
+            <a:endParaRPr lang="en-US"/>
+          </a:p>
+        </p:txBody>
+      </p:sp>
+    </p:spTree>
+    <p:extLst>
+      <p:ext uri="{BB962C8B-B14F-4D97-AF65-F5344CB8AC3E}">
+        <p14:creationId xmlns:p14="http://schemas.microsoft.com/office/powerpoint/2010/main" val="1024086991"/>
+      </p:ext>
+    </p:extLst>
+  </p:cSld>
+  <p:clrMapOvr>
+    <a:masterClrMapping/>
+  </p:clrMapOvr>
+</p:notes>
+</file>
+
+<file path=ppt/notesSlides/notesSlide17.xml><?xml version="1.0" encoding="utf-8"?>
+<p:notes xmlns:a="http://schemas.openxmlformats.org/drawingml/2006/main" xmlns:r="http://schemas.openxmlformats.org/officeDocument/2006/relationships" xmlns:p="http://schemas.openxmlformats.org/presentationml/2006/main">
+  <p:cSld>
+    <p:spTree>
+      <p:nvGrpSpPr>
+        <p:cNvPr id="1" name=""/>
+        <p:cNvGrpSpPr/>
+        <p:nvPr/>
+      </p:nvGrpSpPr>
+      <p:grpSpPr>
+        <a:xfrm>
+          <a:off x="0" y="0"/>
+          <a:ext cx="0" cy="0"/>
+          <a:chOff x="0" y="0"/>
+          <a:chExt cx="0" cy="0"/>
+        </a:xfrm>
+      </p:grpSpPr>
+      <p:sp>
+        <p:nvSpPr>
+          <p:cNvPr id="2" name="Slide Image Placeholder 1"/>
+          <p:cNvSpPr>
+            <a:spLocks noGrp="1" noRot="1" noChangeAspect="1"/>
+          </p:cNvSpPr>
+          <p:nvPr>
+            <p:ph type="sldImg"/>
+          </p:nvPr>
+        </p:nvSpPr>
+        <p:spPr/>
+      </p:sp>
+      <p:sp>
+        <p:nvSpPr>
+          <p:cNvPr id="3" name="Notes Placeholder 2"/>
+          <p:cNvSpPr>
+            <a:spLocks noGrp="1"/>
+          </p:cNvSpPr>
+          <p:nvPr>
+            <p:ph type="body" idx="1"/>
+          </p:nvPr>
+        </p:nvSpPr>
+        <p:spPr/>
+        <p:txBody>
+          <a:bodyPr/>
+          <a:lstStyle/>
+          <a:p>
+            <a:r>
+              <a:rPr lang="en-US" dirty="0"/>
+              <a:t/>
+            </a:r>
+            <a:endParaRPr lang="en-US" dirty="0"/>
+          </a:p>
+        </p:txBody>
+      </p:sp>
+      <p:sp>
+        <p:nvSpPr>
+          <p:cNvPr id="4" name="Slide Number Placeholder 3"/>
+          <p:cNvSpPr>
+            <a:spLocks noGrp="1"/>
+          </p:cNvSpPr>
+          <p:nvPr>
+            <p:ph type="sldNum" sz="quarter" idx="10"/>
+          </p:nvPr>
+        </p:nvSpPr>
+        <p:spPr/>
+        <p:txBody>
+          <a:bodyPr/>
+          <a:lstStyle/>
+          <a:p>
+            <a:fld id="{F7021451-1387-4CA6-816F-3879F97B5CBC}" type="slidenum">
+              <a:rPr lang="en-US"/>
+              <a:t>17</a:t>
+            </a:fld>
+            <a:endParaRPr lang="en-US"/>
+          </a:p>
+        </p:txBody>
+      </p:sp>
+    </p:spTree>
+    <p:extLst>
+      <p:ext uri="{BB962C8B-B14F-4D97-AF65-F5344CB8AC3E}">
+        <p14:creationId xmlns:p14="http://schemas.microsoft.com/office/powerpoint/2010/main" val="1024086991"/>
+      </p:ext>
+    </p:extLst>
+  </p:cSld>
+  <p:clrMapOvr>
+    <a:masterClrMapping/>
+  </p:clrMapOvr>
+</p:notes>
+</file>
+
+<file path=ppt/notesSlides/notesSlide18.xml><?xml version="1.0" encoding="utf-8"?>
+<p:notes xmlns:a="http://schemas.openxmlformats.org/drawingml/2006/main" xmlns:r="http://schemas.openxmlformats.org/officeDocument/2006/relationships" xmlns:p="http://schemas.openxmlformats.org/presentationml/2006/main">
+  <p:cSld>
+    <p:spTree>
+      <p:nvGrpSpPr>
+        <p:cNvPr id="1" name=""/>
+        <p:cNvGrpSpPr/>
+        <p:nvPr/>
+      </p:nvGrpSpPr>
+      <p:grpSpPr>
+        <a:xfrm>
+          <a:off x="0" y="0"/>
+          <a:ext cx="0" cy="0"/>
+          <a:chOff x="0" y="0"/>
+          <a:chExt cx="0" cy="0"/>
+        </a:xfrm>
+      </p:grpSpPr>
+      <p:sp>
+        <p:nvSpPr>
+          <p:cNvPr id="2" name="Slide Image Placeholder 1"/>
+          <p:cNvSpPr>
+            <a:spLocks noGrp="1" noRot="1" noChangeAspect="1"/>
+          </p:cNvSpPr>
+          <p:nvPr>
+            <p:ph type="sldImg"/>
+          </p:nvPr>
+        </p:nvSpPr>
+        <p:spPr/>
+      </p:sp>
+      <p:sp>
+        <p:nvSpPr>
+          <p:cNvPr id="3" name="Notes Placeholder 2"/>
+          <p:cNvSpPr>
+            <a:spLocks noGrp="1"/>
+          </p:cNvSpPr>
+          <p:nvPr>
+            <p:ph type="body" idx="1"/>
+          </p:nvPr>
+        </p:nvSpPr>
+        <p:spPr/>
+        <p:txBody>
+          <a:bodyPr/>
+          <a:lstStyle/>
+          <a:p>
+            <a:r>
+              <a:rPr lang="en-US" dirty="0"/>
+              <a:t/>
+            </a:r>
+            <a:endParaRPr lang="en-US" dirty="0"/>
+          </a:p>
+        </p:txBody>
+      </p:sp>
+      <p:sp>
+        <p:nvSpPr>
+          <p:cNvPr id="4" name="Slide Number Placeholder 3"/>
+          <p:cNvSpPr>
+            <a:spLocks noGrp="1"/>
+          </p:cNvSpPr>
+          <p:nvPr>
+            <p:ph type="sldNum" sz="quarter" idx="10"/>
+          </p:nvPr>
+        </p:nvSpPr>
+        <p:spPr/>
+        <p:txBody>
+          <a:bodyPr/>
+          <a:lstStyle/>
+          <a:p>
+            <a:fld id="{F7021451-1387-4CA6-816F-3879F97B5CBC}" type="slidenum">
+              <a:rPr lang="en-US"/>
+              <a:t>18</a:t>
+            </a:fld>
+            <a:endParaRPr lang="en-US"/>
+          </a:p>
+        </p:txBody>
+      </p:sp>
+    </p:spTree>
+    <p:extLst>
+      <p:ext uri="{BB962C8B-B14F-4D97-AF65-F5344CB8AC3E}">
+        <p14:creationId xmlns:p14="http://schemas.microsoft.com/office/powerpoint/2010/main" val="1024086991"/>
+      </p:ext>
+    </p:extLst>
+  </p:cSld>
+  <p:clrMapOvr>
+    <a:masterClrMapping/>
+  </p:clrMapOvr>
+</p:notes>
+</file>
+
+<file path=ppt/notesSlides/notesSlide19.xml><?xml version="1.0" encoding="utf-8"?>
+<p:notes xmlns:a="http://schemas.openxmlformats.org/drawingml/2006/main" xmlns:r="http://schemas.openxmlformats.org/officeDocument/2006/relationships" xmlns:p="http://schemas.openxmlformats.org/presentationml/2006/main">
+  <p:cSld>
+    <p:spTree>
+      <p:nvGrpSpPr>
+        <p:cNvPr id="1" name=""/>
+        <p:cNvGrpSpPr/>
+        <p:nvPr/>
+      </p:nvGrpSpPr>
+      <p:grpSpPr>
+        <a:xfrm>
+          <a:off x="0" y="0"/>
+          <a:ext cx="0" cy="0"/>
+          <a:chOff x="0" y="0"/>
+          <a:chExt cx="0" cy="0"/>
+        </a:xfrm>
+      </p:grpSpPr>
+      <p:sp>
+        <p:nvSpPr>
+          <p:cNvPr id="2" name="Slide Image Placeholder 1"/>
+          <p:cNvSpPr>
+            <a:spLocks noGrp="1" noRot="1" noChangeAspect="1"/>
+          </p:cNvSpPr>
+          <p:nvPr>
+            <p:ph type="sldImg"/>
+          </p:nvPr>
+        </p:nvSpPr>
+        <p:spPr/>
+      </p:sp>
+      <p:sp>
+        <p:nvSpPr>
+          <p:cNvPr id="3" name="Notes Placeholder 2"/>
+          <p:cNvSpPr>
+            <a:spLocks noGrp="1"/>
+          </p:cNvSpPr>
+          <p:nvPr>
+            <p:ph type="body" idx="1"/>
+          </p:nvPr>
+        </p:nvSpPr>
+        <p:spPr/>
+        <p:txBody>
+          <a:bodyPr/>
+          <a:lstStyle/>
+          <a:p>
+            <a:r>
+              <a:rPr lang="en-US" dirty="0"/>
+              <a:t/>
+            </a:r>
+            <a:endParaRPr lang="en-US" dirty="0"/>
+          </a:p>
+        </p:txBody>
+      </p:sp>
+      <p:sp>
+        <p:nvSpPr>
+          <p:cNvPr id="4" name="Slide Number Placeholder 3"/>
+          <p:cNvSpPr>
+            <a:spLocks noGrp="1"/>
+          </p:cNvSpPr>
+          <p:nvPr>
+            <p:ph type="sldNum" sz="quarter" idx="10"/>
+          </p:nvPr>
+        </p:nvSpPr>
+        <p:spPr/>
+        <p:txBody>
+          <a:bodyPr/>
+          <a:lstStyle/>
+          <a:p>
+            <a:fld id="{F7021451-1387-4CA6-816F-3879F97B5CBC}" type="slidenum">
+              <a:rPr lang="en-US"/>
+              <a:t>19</a:t>
+            </a:fld>
+            <a:endParaRPr lang="en-US"/>
+          </a:p>
+        </p:txBody>
+      </p:sp>
+    </p:spTree>
+    <p:extLst>
+      <p:ext uri="{BB962C8B-B14F-4D97-AF65-F5344CB8AC3E}">
+        <p14:creationId xmlns:p14="http://schemas.microsoft.com/office/powerpoint/2010/main" val="1024086991"/>
+      </p:ext>
+    </p:extLst>
+  </p:cSld>
+  <p:clrMapOvr>
+    <a:masterClrMapping/>
+  </p:clrMapOvr>
+</p:notes>
+</file>
+
 <file path=ppt/notesSlides/notesSlide2.xml><?xml version="1.0" encoding="utf-8"?>
 <p:notes xmlns:a="http://schemas.openxmlformats.org/drawingml/2006/main" xmlns:r="http://schemas.openxmlformats.org/officeDocument/2006/relationships" xmlns:p="http://schemas.openxmlformats.org/presentationml/2006/main">
   <p:cSld>
@@ -800,6 +1517,446 @@
             <a:fld id="{F7021451-1387-4CA6-816F-3879F97B5CBC}" type="slidenum">
               <a:rPr lang="en-US"/>
               <a:t>2</a:t>
+            </a:fld>
+            <a:endParaRPr lang="en-US"/>
+          </a:p>
+        </p:txBody>
+      </p:sp>
+    </p:spTree>
+    <p:extLst>
+      <p:ext uri="{BB962C8B-B14F-4D97-AF65-F5344CB8AC3E}">
+        <p14:creationId xmlns:p14="http://schemas.microsoft.com/office/powerpoint/2010/main" val="1024086991"/>
+      </p:ext>
+    </p:extLst>
+  </p:cSld>
+  <p:clrMapOvr>
+    <a:masterClrMapping/>
+  </p:clrMapOvr>
+</p:notes>
+</file>
+
+<file path=ppt/notesSlides/notesSlide20.xml><?xml version="1.0" encoding="utf-8"?>
+<p:notes xmlns:a="http://schemas.openxmlformats.org/drawingml/2006/main" xmlns:r="http://schemas.openxmlformats.org/officeDocument/2006/relationships" xmlns:p="http://schemas.openxmlformats.org/presentationml/2006/main">
+  <p:cSld>
+    <p:spTree>
+      <p:nvGrpSpPr>
+        <p:cNvPr id="1" name=""/>
+        <p:cNvGrpSpPr/>
+        <p:nvPr/>
+      </p:nvGrpSpPr>
+      <p:grpSpPr>
+        <a:xfrm>
+          <a:off x="0" y="0"/>
+          <a:ext cx="0" cy="0"/>
+          <a:chOff x="0" y="0"/>
+          <a:chExt cx="0" cy="0"/>
+        </a:xfrm>
+      </p:grpSpPr>
+      <p:sp>
+        <p:nvSpPr>
+          <p:cNvPr id="2" name="Slide Image Placeholder 1"/>
+          <p:cNvSpPr>
+            <a:spLocks noGrp="1" noRot="1" noChangeAspect="1"/>
+          </p:cNvSpPr>
+          <p:nvPr>
+            <p:ph type="sldImg"/>
+          </p:nvPr>
+        </p:nvSpPr>
+        <p:spPr/>
+      </p:sp>
+      <p:sp>
+        <p:nvSpPr>
+          <p:cNvPr id="3" name="Notes Placeholder 2"/>
+          <p:cNvSpPr>
+            <a:spLocks noGrp="1"/>
+          </p:cNvSpPr>
+          <p:nvPr>
+            <p:ph type="body" idx="1"/>
+          </p:nvPr>
+        </p:nvSpPr>
+        <p:spPr/>
+        <p:txBody>
+          <a:bodyPr/>
+          <a:lstStyle/>
+          <a:p>
+            <a:r>
+              <a:rPr lang="en-US" dirty="0"/>
+              <a:t/>
+            </a:r>
+            <a:endParaRPr lang="en-US" dirty="0"/>
+          </a:p>
+        </p:txBody>
+      </p:sp>
+      <p:sp>
+        <p:nvSpPr>
+          <p:cNvPr id="4" name="Slide Number Placeholder 3"/>
+          <p:cNvSpPr>
+            <a:spLocks noGrp="1"/>
+          </p:cNvSpPr>
+          <p:nvPr>
+            <p:ph type="sldNum" sz="quarter" idx="10"/>
+          </p:nvPr>
+        </p:nvSpPr>
+        <p:spPr/>
+        <p:txBody>
+          <a:bodyPr/>
+          <a:lstStyle/>
+          <a:p>
+            <a:fld id="{F7021451-1387-4CA6-816F-3879F97B5CBC}" type="slidenum">
+              <a:rPr lang="en-US"/>
+              <a:t>20</a:t>
+            </a:fld>
+            <a:endParaRPr lang="en-US"/>
+          </a:p>
+        </p:txBody>
+      </p:sp>
+    </p:spTree>
+    <p:extLst>
+      <p:ext uri="{BB962C8B-B14F-4D97-AF65-F5344CB8AC3E}">
+        <p14:creationId xmlns:p14="http://schemas.microsoft.com/office/powerpoint/2010/main" val="1024086991"/>
+      </p:ext>
+    </p:extLst>
+  </p:cSld>
+  <p:clrMapOvr>
+    <a:masterClrMapping/>
+  </p:clrMapOvr>
+</p:notes>
+</file>
+
+<file path=ppt/notesSlides/notesSlide21.xml><?xml version="1.0" encoding="utf-8"?>
+<p:notes xmlns:a="http://schemas.openxmlformats.org/drawingml/2006/main" xmlns:r="http://schemas.openxmlformats.org/officeDocument/2006/relationships" xmlns:p="http://schemas.openxmlformats.org/presentationml/2006/main">
+  <p:cSld>
+    <p:spTree>
+      <p:nvGrpSpPr>
+        <p:cNvPr id="1" name=""/>
+        <p:cNvGrpSpPr/>
+        <p:nvPr/>
+      </p:nvGrpSpPr>
+      <p:grpSpPr>
+        <a:xfrm>
+          <a:off x="0" y="0"/>
+          <a:ext cx="0" cy="0"/>
+          <a:chOff x="0" y="0"/>
+          <a:chExt cx="0" cy="0"/>
+        </a:xfrm>
+      </p:grpSpPr>
+      <p:sp>
+        <p:nvSpPr>
+          <p:cNvPr id="2" name="Slide Image Placeholder 1"/>
+          <p:cNvSpPr>
+            <a:spLocks noGrp="1" noRot="1" noChangeAspect="1"/>
+          </p:cNvSpPr>
+          <p:nvPr>
+            <p:ph type="sldImg"/>
+          </p:nvPr>
+        </p:nvSpPr>
+        <p:spPr/>
+      </p:sp>
+      <p:sp>
+        <p:nvSpPr>
+          <p:cNvPr id="3" name="Notes Placeholder 2"/>
+          <p:cNvSpPr>
+            <a:spLocks noGrp="1"/>
+          </p:cNvSpPr>
+          <p:nvPr>
+            <p:ph type="body" idx="1"/>
+          </p:nvPr>
+        </p:nvSpPr>
+        <p:spPr/>
+        <p:txBody>
+          <a:bodyPr/>
+          <a:lstStyle/>
+          <a:p>
+            <a:r>
+              <a:rPr lang="en-US" dirty="0"/>
+              <a:t/>
+            </a:r>
+            <a:endParaRPr lang="en-US" dirty="0"/>
+          </a:p>
+        </p:txBody>
+      </p:sp>
+      <p:sp>
+        <p:nvSpPr>
+          <p:cNvPr id="4" name="Slide Number Placeholder 3"/>
+          <p:cNvSpPr>
+            <a:spLocks noGrp="1"/>
+          </p:cNvSpPr>
+          <p:nvPr>
+            <p:ph type="sldNum" sz="quarter" idx="10"/>
+          </p:nvPr>
+        </p:nvSpPr>
+        <p:spPr/>
+        <p:txBody>
+          <a:bodyPr/>
+          <a:lstStyle/>
+          <a:p>
+            <a:fld id="{F7021451-1387-4CA6-816F-3879F97B5CBC}" type="slidenum">
+              <a:rPr lang="en-US"/>
+              <a:t>21</a:t>
+            </a:fld>
+            <a:endParaRPr lang="en-US"/>
+          </a:p>
+        </p:txBody>
+      </p:sp>
+    </p:spTree>
+    <p:extLst>
+      <p:ext uri="{BB962C8B-B14F-4D97-AF65-F5344CB8AC3E}">
+        <p14:creationId xmlns:p14="http://schemas.microsoft.com/office/powerpoint/2010/main" val="1024086991"/>
+      </p:ext>
+    </p:extLst>
+  </p:cSld>
+  <p:clrMapOvr>
+    <a:masterClrMapping/>
+  </p:clrMapOvr>
+</p:notes>
+</file>
+
+<file path=ppt/notesSlides/notesSlide22.xml><?xml version="1.0" encoding="utf-8"?>
+<p:notes xmlns:a="http://schemas.openxmlformats.org/drawingml/2006/main" xmlns:r="http://schemas.openxmlformats.org/officeDocument/2006/relationships" xmlns:p="http://schemas.openxmlformats.org/presentationml/2006/main">
+  <p:cSld>
+    <p:spTree>
+      <p:nvGrpSpPr>
+        <p:cNvPr id="1" name=""/>
+        <p:cNvGrpSpPr/>
+        <p:nvPr/>
+      </p:nvGrpSpPr>
+      <p:grpSpPr>
+        <a:xfrm>
+          <a:off x="0" y="0"/>
+          <a:ext cx="0" cy="0"/>
+          <a:chOff x="0" y="0"/>
+          <a:chExt cx="0" cy="0"/>
+        </a:xfrm>
+      </p:grpSpPr>
+      <p:sp>
+        <p:nvSpPr>
+          <p:cNvPr id="2" name="Slide Image Placeholder 1"/>
+          <p:cNvSpPr>
+            <a:spLocks noGrp="1" noRot="1" noChangeAspect="1"/>
+          </p:cNvSpPr>
+          <p:nvPr>
+            <p:ph type="sldImg"/>
+          </p:nvPr>
+        </p:nvSpPr>
+        <p:spPr/>
+      </p:sp>
+      <p:sp>
+        <p:nvSpPr>
+          <p:cNvPr id="3" name="Notes Placeholder 2"/>
+          <p:cNvSpPr>
+            <a:spLocks noGrp="1"/>
+          </p:cNvSpPr>
+          <p:nvPr>
+            <p:ph type="body" idx="1"/>
+          </p:nvPr>
+        </p:nvSpPr>
+        <p:spPr/>
+        <p:txBody>
+          <a:bodyPr/>
+          <a:lstStyle/>
+          <a:p>
+            <a:r>
+              <a:rPr lang="en-US" dirty="0"/>
+              <a:t/>
+            </a:r>
+            <a:endParaRPr lang="en-US" dirty="0"/>
+          </a:p>
+        </p:txBody>
+      </p:sp>
+      <p:sp>
+        <p:nvSpPr>
+          <p:cNvPr id="4" name="Slide Number Placeholder 3"/>
+          <p:cNvSpPr>
+            <a:spLocks noGrp="1"/>
+          </p:cNvSpPr>
+          <p:nvPr>
+            <p:ph type="sldNum" sz="quarter" idx="10"/>
+          </p:nvPr>
+        </p:nvSpPr>
+        <p:spPr/>
+        <p:txBody>
+          <a:bodyPr/>
+          <a:lstStyle/>
+          <a:p>
+            <a:fld id="{F7021451-1387-4CA6-816F-3879F97B5CBC}" type="slidenum">
+              <a:rPr lang="en-US"/>
+              <a:t>22</a:t>
+            </a:fld>
+            <a:endParaRPr lang="en-US"/>
+          </a:p>
+        </p:txBody>
+      </p:sp>
+    </p:spTree>
+    <p:extLst>
+      <p:ext uri="{BB962C8B-B14F-4D97-AF65-F5344CB8AC3E}">
+        <p14:creationId xmlns:p14="http://schemas.microsoft.com/office/powerpoint/2010/main" val="1024086991"/>
+      </p:ext>
+    </p:extLst>
+  </p:cSld>
+  <p:clrMapOvr>
+    <a:masterClrMapping/>
+  </p:clrMapOvr>
+</p:notes>
+</file>
+
+<file path=ppt/notesSlides/notesSlide23.xml><?xml version="1.0" encoding="utf-8"?>
+<p:notes xmlns:a="http://schemas.openxmlformats.org/drawingml/2006/main" xmlns:r="http://schemas.openxmlformats.org/officeDocument/2006/relationships" xmlns:p="http://schemas.openxmlformats.org/presentationml/2006/main">
+  <p:cSld>
+    <p:spTree>
+      <p:nvGrpSpPr>
+        <p:cNvPr id="1" name=""/>
+        <p:cNvGrpSpPr/>
+        <p:nvPr/>
+      </p:nvGrpSpPr>
+      <p:grpSpPr>
+        <a:xfrm>
+          <a:off x="0" y="0"/>
+          <a:ext cx="0" cy="0"/>
+          <a:chOff x="0" y="0"/>
+          <a:chExt cx="0" cy="0"/>
+        </a:xfrm>
+      </p:grpSpPr>
+      <p:sp>
+        <p:nvSpPr>
+          <p:cNvPr id="2" name="Slide Image Placeholder 1"/>
+          <p:cNvSpPr>
+            <a:spLocks noGrp="1" noRot="1" noChangeAspect="1"/>
+          </p:cNvSpPr>
+          <p:nvPr>
+            <p:ph type="sldImg"/>
+          </p:nvPr>
+        </p:nvSpPr>
+        <p:spPr/>
+      </p:sp>
+      <p:sp>
+        <p:nvSpPr>
+          <p:cNvPr id="3" name="Notes Placeholder 2"/>
+          <p:cNvSpPr>
+            <a:spLocks noGrp="1"/>
+          </p:cNvSpPr>
+          <p:nvPr>
+            <p:ph type="body" idx="1"/>
+          </p:nvPr>
+        </p:nvSpPr>
+        <p:spPr/>
+        <p:txBody>
+          <a:bodyPr/>
+          <a:lstStyle/>
+          <a:p>
+            <a:r>
+              <a:rPr lang="en-US" dirty="0"/>
+              <a:t/>
+            </a:r>
+            <a:endParaRPr lang="en-US" dirty="0"/>
+          </a:p>
+        </p:txBody>
+      </p:sp>
+      <p:sp>
+        <p:nvSpPr>
+          <p:cNvPr id="4" name="Slide Number Placeholder 3"/>
+          <p:cNvSpPr>
+            <a:spLocks noGrp="1"/>
+          </p:cNvSpPr>
+          <p:nvPr>
+            <p:ph type="sldNum" sz="quarter" idx="10"/>
+          </p:nvPr>
+        </p:nvSpPr>
+        <p:spPr/>
+        <p:txBody>
+          <a:bodyPr/>
+          <a:lstStyle/>
+          <a:p>
+            <a:fld id="{F7021451-1387-4CA6-816F-3879F97B5CBC}" type="slidenum">
+              <a:rPr lang="en-US"/>
+              <a:t>23</a:t>
+            </a:fld>
+            <a:endParaRPr lang="en-US"/>
+          </a:p>
+        </p:txBody>
+      </p:sp>
+    </p:spTree>
+    <p:extLst>
+      <p:ext uri="{BB962C8B-B14F-4D97-AF65-F5344CB8AC3E}">
+        <p14:creationId xmlns:p14="http://schemas.microsoft.com/office/powerpoint/2010/main" val="1024086991"/>
+      </p:ext>
+    </p:extLst>
+  </p:cSld>
+  <p:clrMapOvr>
+    <a:masterClrMapping/>
+  </p:clrMapOvr>
+</p:notes>
+</file>
+
+<file path=ppt/notesSlides/notesSlide24.xml><?xml version="1.0" encoding="utf-8"?>
+<p:notes xmlns:a="http://schemas.openxmlformats.org/drawingml/2006/main" xmlns:r="http://schemas.openxmlformats.org/officeDocument/2006/relationships" xmlns:p="http://schemas.openxmlformats.org/presentationml/2006/main">
+  <p:cSld>
+    <p:spTree>
+      <p:nvGrpSpPr>
+        <p:cNvPr id="1" name=""/>
+        <p:cNvGrpSpPr/>
+        <p:nvPr/>
+      </p:nvGrpSpPr>
+      <p:grpSpPr>
+        <a:xfrm>
+          <a:off x="0" y="0"/>
+          <a:ext cx="0" cy="0"/>
+          <a:chOff x="0" y="0"/>
+          <a:chExt cx="0" cy="0"/>
+        </a:xfrm>
+      </p:grpSpPr>
+      <p:sp>
+        <p:nvSpPr>
+          <p:cNvPr id="2" name="Slide Image Placeholder 1"/>
+          <p:cNvSpPr>
+            <a:spLocks noGrp="1" noRot="1" noChangeAspect="1"/>
+          </p:cNvSpPr>
+          <p:nvPr>
+            <p:ph type="sldImg"/>
+          </p:nvPr>
+        </p:nvSpPr>
+        <p:spPr/>
+      </p:sp>
+      <p:sp>
+        <p:nvSpPr>
+          <p:cNvPr id="3" name="Notes Placeholder 2"/>
+          <p:cNvSpPr>
+            <a:spLocks noGrp="1"/>
+          </p:cNvSpPr>
+          <p:nvPr>
+            <p:ph type="body" idx="1"/>
+          </p:nvPr>
+        </p:nvSpPr>
+        <p:spPr/>
+        <p:txBody>
+          <a:bodyPr/>
+          <a:lstStyle/>
+          <a:p>
+            <a:r>
+              <a:rPr lang="en-US" dirty="0"/>
+              <a:t/>
+            </a:r>
+            <a:endParaRPr lang="en-US" dirty="0"/>
+          </a:p>
+        </p:txBody>
+      </p:sp>
+      <p:sp>
+        <p:nvSpPr>
+          <p:cNvPr id="4" name="Slide Number Placeholder 3"/>
+          <p:cNvSpPr>
+            <a:spLocks noGrp="1"/>
+          </p:cNvSpPr>
+          <p:nvPr>
+            <p:ph type="sldNum" sz="quarter" idx="10"/>
+          </p:nvPr>
+        </p:nvSpPr>
+        <p:spPr/>
+        <p:txBody>
+          <a:bodyPr/>
+          <a:lstStyle/>
+          <a:p>
+            <a:fld id="{F7021451-1387-4CA6-816F-3879F97B5CBC}" type="slidenum">
+              <a:rPr lang="en-US"/>
+              <a:t>24</a:t>
             </a:fld>
             <a:endParaRPr lang="en-US"/>
           </a:p>
@@ -2011,194 +3168,6 @@
         </p:nvSpPr>
         <p:spPr>
           <a:xfrm>
-            <a:off x="406301" y="1574453"/>
-            <a:ext cx="8498026" cy="274290"/>
-          </a:xfrm>
-          <a:prstGeom prst="rect">
-            <a:avLst/>
-          </a:prstGeom>
-          <a:noFill/>
-          <a:ln/>
-        </p:spPr>
-        <p:txBody>
-          <a:bodyPr wrap="square" lIns="0" tIns="0" rIns="0" bIns="0" rtlCol="0" anchor="t"/>
-          <a:lstStyle/>
-          <a:p>
-            <a:pPr algn="l" indent="0" marL="0">
-              <a:lnSpc>
-                <a:spcPts val="2160"/>
-              </a:lnSpc>
-              <a:spcBef>
-                <a:spcPts val="600"/>
-              </a:spcBef>
-              <a:spcAft>
-                <a:spcPts val="800"/>
-              </a:spcAft>
-              <a:buNone/>
-            </a:pPr>
-            <a:r>
-              <a:rPr lang="en-US" sz="1800" b="1" dirty="0">
-                <a:solidFill>
-                  <a:srgbClr val="FE4447"/>
-                </a:solidFill>
-                <a:latin typeface="Georgia" pitchFamily="34" charset="0"/>
-                <a:ea typeface="Georgia" pitchFamily="34" charset="-122"/>
-                <a:cs typeface="Georgia" pitchFamily="34" charset="-120"/>
-              </a:rPr>
-              <a:t>Learning objective</a:t>
-            </a:r>
-            <a:endParaRPr lang="en-US" sz="1800" dirty="0"/>
-          </a:p>
-        </p:txBody>
-      </p:sp>
-      <p:sp>
-        <p:nvSpPr>
-          <p:cNvPr id="6" name="Text 4"/>
-          <p:cNvSpPr/>
-          <p:nvPr/>
-        </p:nvSpPr>
-        <p:spPr>
-          <a:xfrm>
-            <a:off x="406301" y="1988344"/>
-            <a:ext cx="8498026" cy="426541"/>
-          </a:xfrm>
-          <a:prstGeom prst="rect">
-            <a:avLst/>
-          </a:prstGeom>
-          <a:noFill/>
-          <a:ln/>
-        </p:spPr>
-        <p:txBody>
-          <a:bodyPr wrap="square" lIns="0" tIns="0" rIns="0" bIns="0" rtlCol="0" anchor="t"/>
-          <a:lstStyle/>
-          <a:p>
-            <a:pPr algn="l" indent="0" marL="0">
-              <a:lnSpc>
-                <a:spcPts val="1680"/>
-              </a:lnSpc>
-              <a:spcBef>
-                <a:spcPts val="300"/>
-              </a:spcBef>
-              <a:spcAft>
-                <a:spcPts val="300"/>
-              </a:spcAft>
-              <a:buNone/>
-            </a:pPr>
-            <a:r>
-              <a:rPr lang="en-US" sz="1200" dirty="0">
-                <a:solidFill>
-                  <a:srgbClr val="1C2833"/>
-                </a:solidFill>
-                <a:latin typeface="Arial" pitchFamily="34" charset="0"/>
-                <a:ea typeface="Arial" pitchFamily="34" charset="-122"/>
-                <a:cs typeface="Arial" pitchFamily="34" charset="-120"/>
-              </a:rPr>
-              <a:t>Students explain — in their own words — what climate change is, name three observable effects, distinguish </a:t>
-            </a:r>
-            <a:pPr algn="l" indent="0" marL="0">
-              <a:lnSpc>
-                <a:spcPts val="1680"/>
-              </a:lnSpc>
-              <a:spcBef>
-                <a:spcPts val="300"/>
-              </a:spcBef>
-              <a:spcAft>
-                <a:spcPts val="300"/>
-              </a:spcAft>
-              <a:buNone/>
-            </a:pPr>
-            <a:r>
-              <a:rPr lang="en-US" sz="1200" i="1" dirty="0">
-                <a:solidFill>
-                  <a:srgbClr val="1C2833"/>
-                </a:solidFill>
-                <a:latin typeface="Arial" pitchFamily="34" charset="0"/>
-                <a:ea typeface="Arial" pitchFamily="34" charset="-122"/>
-                <a:cs typeface="Arial" pitchFamily="34" charset="-120"/>
-              </a:rPr>
-              <a:t>climate</a:t>
-            </a:r>
-            <a:pPr algn="l" indent="0" marL="0">
-              <a:lnSpc>
-                <a:spcPts val="1680"/>
-              </a:lnSpc>
-              <a:spcBef>
-                <a:spcPts val="300"/>
-              </a:spcBef>
-              <a:spcAft>
-                <a:spcPts val="300"/>
-              </a:spcAft>
-              <a:buNone/>
-            </a:pPr>
-            <a:r>
-              <a:rPr lang="en-US" sz="1200" dirty="0">
-                <a:solidFill>
-                  <a:srgbClr val="1C2833"/>
-                </a:solidFill>
-                <a:latin typeface="Arial" pitchFamily="34" charset="0"/>
-                <a:ea typeface="Arial" pitchFamily="34" charset="-122"/>
-                <a:cs typeface="Arial" pitchFamily="34" charset="-120"/>
-              </a:rPr>
-              <a:t> from </a:t>
-            </a:r>
-            <a:pPr algn="l" indent="0" marL="0">
-              <a:lnSpc>
-                <a:spcPts val="1680"/>
-              </a:lnSpc>
-              <a:spcBef>
-                <a:spcPts val="300"/>
-              </a:spcBef>
-              <a:spcAft>
-                <a:spcPts val="300"/>
-              </a:spcAft>
-              <a:buNone/>
-            </a:pPr>
-            <a:r>
-              <a:rPr lang="en-US" sz="1200" i="1" dirty="0">
-                <a:solidFill>
-                  <a:srgbClr val="1C2833"/>
-                </a:solidFill>
-                <a:latin typeface="Arial" pitchFamily="34" charset="0"/>
-                <a:ea typeface="Arial" pitchFamily="34" charset="-122"/>
-                <a:cs typeface="Arial" pitchFamily="34" charset="-120"/>
-              </a:rPr>
-              <a:t>weather</a:t>
-            </a:r>
-            <a:pPr algn="l" indent="0" marL="0">
-              <a:lnSpc>
-                <a:spcPts val="1680"/>
-              </a:lnSpc>
-              <a:spcBef>
-                <a:spcPts val="300"/>
-              </a:spcBef>
-              <a:spcAft>
-                <a:spcPts val="300"/>
-              </a:spcAft>
-              <a:buNone/>
-            </a:pPr>
-            <a:r>
-              <a:rPr lang="en-US" sz="1200" dirty="0">
-                <a:solidFill>
-                  <a:srgbClr val="1C2833"/>
-                </a:solidFill>
-                <a:latin typeface="Arial" pitchFamily="34" charset="0"/>
-                <a:ea typeface="Arial" pitchFamily="34" charset="-122"/>
-                <a:cs typeface="Arial" pitchFamily="34" charset="-120"/>
-              </a:rPr>
-              <a:t>, and articulate what the Indic frameworks they've studied can (and cannot) add to a modern response.</a:t>
-            </a:r>
-            <a:endParaRPr lang="en-US" sz="1200" dirty="0"/>
-          </a:p>
-        </p:txBody>
-      </p:sp>
-      <p:sp>
-        <p:nvSpPr>
-          <p:cNvPr id="7" name="Text 5"/>
-          <p:cNvSpPr/>
-          <p:nvPr/>
-        </p:nvSpPr>
-        <p:spPr>
-          <a:xfrm>
             <a:off x="406301" y="4434929"/>
             <a:ext cx="8498026" cy="213271"/>
           </a:xfrm>
@@ -2343,7 +3312,7 @@
                 <a:ea typeface="Georgia" pitchFamily="34" charset="-122"/>
                 <a:cs typeface="Georgia" pitchFamily="34" charset="-120"/>
               </a:rPr>
-              <a:t>Teacher notes</a:t>
+              <a:t>Core (25 min) (cont.)</a:t>
             </a:r>
             <a:endParaRPr lang="en-US" sz="1800" dirty="0"/>
           </a:p>
@@ -2358,7 +3327,7 @@
         <p:spPr>
           <a:xfrm>
             <a:off x="406301" y="870942"/>
-            <a:ext cx="8498026" cy="1706166"/>
+            <a:ext cx="8498026" cy="426541"/>
           </a:xfrm>
           <a:prstGeom prst="rect">
             <a:avLst/>
@@ -2383,16 +3352,87 @@
               <a:buNone/>
             </a:pPr>
             <a:r>
-              <a:rPr lang="en-US" sz="1200" dirty="0">
-                <a:solidFill>
-                  <a:srgbClr val="1C2833"/>
-                </a:solidFill>
-                <a:latin typeface="Arial" pitchFamily="34" charset="0"/>
-                <a:ea typeface="Arial" pitchFamily="34" charset="-122"/>
-                <a:cs typeface="Arial" pitchFamily="34" charset="-120"/>
-              </a:rPr>
-              <a:t>– Climate change is a politically loaded topic in some classrooms. Stick to the IPCC numbers; they are the consensus scientific source. Avoid the activist framing on either side. – Some students or parents may dispute the science. The classroom position is: "the IPCC is what we are teaching. If you disagree, the place to argue with the science is with peer-reviewed responses to the IPCC, not in this classroom." – Avoid catastrophising. Students at this age can become genuinely anxious about climate news. Frame it as: </a:t>
-            </a:r>
+              <a:rPr lang="en-US" sz="1200" i="1" dirty="0">
+                <a:solidFill>
+                  <a:srgbClr val="1C2833"/>
+                </a:solidFill>
+                <a:latin typeface="Arial" pitchFamily="34" charset="0"/>
+                <a:ea typeface="Arial" pitchFamily="34" charset="-122"/>
+                <a:cs typeface="Arial" pitchFamily="34" charset="-120"/>
+              </a:rPr>
+              <a:t>We are not claiming this is the only cause; we are claiming this is the cause that science has identified as dominant since ~1950. The IPCC reports are the authoritative source.</a:t>
+            </a:r>
+            <a:endParaRPr lang="en-US" sz="1200" dirty="0"/>
+          </a:p>
+        </p:txBody>
+      </p:sp>
+      <p:sp>
+        <p:nvSpPr>
+          <p:cNvPr id="5" name="Text 3"/>
+          <p:cNvSpPr/>
+          <p:nvPr/>
+        </p:nvSpPr>
+        <p:spPr>
+          <a:xfrm>
+            <a:off x="634901" y="1386334"/>
+            <a:ext cx="8102798" cy="281880"/>
+          </a:xfrm>
+          <a:prstGeom prst="rect">
+            <a:avLst/>
+          </a:prstGeom>
+          <a:noFill/>
+          <a:ln/>
+        </p:spPr>
+        <p:txBody>
+          <a:bodyPr wrap="square" lIns="0" tIns="0" rIns="0" bIns="0" rtlCol="0" anchor="t"/>
+          <a:lstStyle/>
+          <a:p>
+            <a:pPr algn="l" marL="342900" indent="-342900">
+              <a:lnSpc>
+                <a:spcPts val="1620"/>
+              </a:lnSpc>
+              <a:spcAft>
+                <a:spcPts val="300"/>
+              </a:spcAft>
+              <a:buSzPct val="100000"/>
+              <a:buChar char="•"/>
+            </a:pPr>
+            <a:r>
+              <a:rPr lang="en-US" sz="1200" b="1" dirty="0">
+                <a:solidFill>
+                  <a:srgbClr val="1C2833"/>
+                </a:solidFill>
+                <a:latin typeface="Arial" pitchFamily="34" charset="0"/>
+                <a:ea typeface="Arial" pitchFamily="34" charset="-122"/>
+                <a:cs typeface="Arial" pitchFamily="34" charset="-120"/>
+              </a:rPr>
+              <a:t>Three observable effects (pick the ones most local to your students):</a:t>
+            </a:r>
+            <a:endParaRPr lang="en-US" sz="1200" dirty="0"/>
+          </a:p>
+        </p:txBody>
+      </p:sp>
+      <p:sp>
+        <p:nvSpPr>
+          <p:cNvPr id="6" name="Text 4"/>
+          <p:cNvSpPr/>
+          <p:nvPr/>
+        </p:nvSpPr>
+        <p:spPr>
+          <a:xfrm>
+            <a:off x="406301" y="1757065"/>
+            <a:ext cx="8498026" cy="213271"/>
+          </a:xfrm>
+          <a:prstGeom prst="rect">
+            <a:avLst/>
+          </a:prstGeom>
+          <a:noFill/>
+          <a:ln/>
+        </p:spPr>
+        <p:txBody>
+          <a:bodyPr wrap="square" lIns="0" tIns="0" rIns="0" bIns="0" rtlCol="0" anchor="t"/>
+          <a:lstStyle/>
+          <a:p>
             <a:pPr algn="l" indent="0" marL="0">
               <a:lnSpc>
                 <a:spcPts val="1680"/>
@@ -2414,30 +3454,7 @@
                 <a:ea typeface="Arial" pitchFamily="34" charset="-122"/>
                 <a:cs typeface="Arial" pitchFamily="34" charset="-120"/>
               </a:rPr>
-              <a:t>this is real, this is serious, this is also being worked on by millions of people including engineers, farmers, and you.</a:t>
-            </a:r>
-            <a:pPr algn="l" indent="0" marL="0">
-              <a:lnSpc>
-                <a:spcPts val="1680"/>
-              </a:lnSpc>
-              <a:spcBef>
-                <a:spcPts val="300"/>
-              </a:spcBef>
-              <a:spcAft>
-                <a:spcPts val="300"/>
-              </a:spcAft>
-              <a:buNone/>
-            </a:pPr>
-            <a:r>
-              <a:rPr lang="en-US" sz="1200" dirty="0">
-                <a:solidFill>
-                  <a:srgbClr val="1C2833"/>
-                </a:solidFill>
-                <a:latin typeface="Arial" pitchFamily="34" charset="0"/>
-                <a:ea typeface="Arial" pitchFamily="34" charset="-122"/>
-                <a:cs typeface="Arial" pitchFamily="34" charset="-120"/>
-              </a:rPr>
-              <a:t> – Avoid the opposite — false hope. Don't say "if we all just plant trees we'll be fine." Plant trees AND change energy systems AND change consumption AND change policy. The Indic frame supplies one thread of this; not the whole rope.</a:t>
+              <a:t>Each row: Effect · Where students might already see it.</a:t>
             </a:r>
             <a:endParaRPr lang="en-US" sz="1200" dirty="0"/>
           </a:p>
@@ -2445,7 +3462,7 @@
       </p:sp>
       <p:sp>
         <p:nvSpPr>
-          <p:cNvPr id="5" name="Text 3"/>
+          <p:cNvPr id="7" name="Text 5"/>
           <p:cNvSpPr/>
           <p:nvPr/>
         </p:nvSpPr>
@@ -2595,7 +3612,7 @@
                 <a:ea typeface="Georgia" pitchFamily="34" charset="-122"/>
                 <a:cs typeface="Georgia" pitchFamily="34" charset="-120"/>
               </a:rPr>
-              <a:t>Citation(s) used in this lesson</a:t>
+              <a:t>Core (25 min) (cont.)</a:t>
             </a:r>
             <a:endParaRPr lang="en-US" sz="1800" dirty="0"/>
           </a:p>
@@ -2610,7 +3627,7 @@
         <p:spPr>
           <a:xfrm>
             <a:off x="634901" y="883593"/>
-            <a:ext cx="8102798" cy="975122"/>
+            <a:ext cx="8102798" cy="769441"/>
           </a:xfrm>
           <a:prstGeom prst="rect">
             <a:avLst/>
@@ -2641,7 +3658,7 @@
                 <a:ea typeface="Arial" pitchFamily="34" charset="-122"/>
                 <a:cs typeface="Arial" pitchFamily="34" charset="-120"/>
               </a:rPr>
-              <a:t>IPCC AR6 Synthesis Report (2023)</a:t>
+              <a:t>Heatwaves and longer hot seasons</a:t>
             </a:r>
             <a:pPr algn="l" indent="0" marL="0">
               <a:lnSpc>
@@ -2661,7 +3678,7 @@
                 <a:ea typeface="Arial" pitchFamily="34" charset="-122"/>
                 <a:cs typeface="Arial" pitchFamily="34" charset="-120"/>
               </a:rPr>
-              <a:t> — for global temperature figures, the 1.5°C target, and CO₂ concentrations.</a:t>
+              <a:t> — Indian summer is hotter and longer than 30 years ago</a:t>
             </a:r>
             <a:endParaRPr lang="en-US" sz="1200" dirty="0"/>
           </a:p>
@@ -2685,7 +3702,7 @@
                 <a:ea typeface="Arial" pitchFamily="34" charset="-122"/>
                 <a:cs typeface="Arial" pitchFamily="34" charset="-120"/>
               </a:rPr>
-              <a:t>UN Sustainable Development Goals (2015)</a:t>
+              <a:t>Monsoon disruption</a:t>
             </a:r>
             <a:pPr algn="l" indent="0" marL="0">
               <a:lnSpc>
@@ -2705,7 +3722,7 @@
                 <a:ea typeface="Arial" pitchFamily="34" charset="-122"/>
                 <a:cs typeface="Arial" pitchFamily="34" charset="-120"/>
               </a:rPr>
-              <a:t> — for the SDG 13 reference.</a:t>
+              <a:t> — More floods or droughts; less predictable arrival</a:t>
             </a:r>
             <a:endParaRPr lang="en-US" sz="1200" dirty="0"/>
           </a:p>
@@ -2729,7 +3746,7 @@
                 <a:ea typeface="Arial" pitchFamily="34" charset="-122"/>
                 <a:cs typeface="Arial" pitchFamily="34" charset="-120"/>
               </a:rPr>
-              <a:t>National Action Plan on Climate Change</a:t>
+              <a:t>Glacier retreat</a:t>
             </a:r>
             <a:pPr algn="l" indent="0" marL="0">
               <a:lnSpc>
@@ -2749,7 +3766,7 @@
                 <a:ea typeface="Arial" pitchFamily="34" charset="-122"/>
                 <a:cs typeface="Arial" pitchFamily="34" charset="-120"/>
               </a:rPr>
-              <a:t> (Government of India, 2008, with 2022 updates) — for the 8 missions framework.</a:t>
+              <a:t> — Himalayan glaciers feed Gaṅgā, Yamunā, Brahmaputra — they are shrinking</a:t>
             </a:r>
             <a:endParaRPr lang="en-US" sz="1200" dirty="0"/>
           </a:p>
@@ -2763,8 +3780,8 @@
         </p:nvSpPr>
         <p:spPr>
           <a:xfrm>
-            <a:off x="406301" y="1947565"/>
-            <a:ext cx="8498026" cy="222796"/>
+            <a:off x="634901" y="1754535"/>
+            <a:ext cx="8102798" cy="281880"/>
           </a:xfrm>
           <a:prstGeom prst="rect">
             <a:avLst/>
@@ -2776,6 +3793,52 @@
           <a:bodyPr wrap="square" lIns="0" tIns="0" rIns="0" bIns="0" rtlCol="0" anchor="t"/>
           <a:lstStyle/>
           <a:p>
+            <a:pPr algn="l" marL="342900" indent="-342900">
+              <a:lnSpc>
+                <a:spcPts val="1620"/>
+              </a:lnSpc>
+              <a:spcAft>
+                <a:spcPts val="300"/>
+              </a:spcAft>
+              <a:buSzPct val="100000"/>
+              <a:buChar char="•"/>
+            </a:pPr>
+            <a:r>
+              <a:rPr lang="en-US" sz="1200" b="1" dirty="0">
+                <a:solidFill>
+                  <a:srgbClr val="1C2833"/>
+                </a:solidFill>
+                <a:latin typeface="Arial" pitchFamily="34" charset="0"/>
+                <a:ea typeface="Arial" pitchFamily="34" charset="-122"/>
+                <a:cs typeface="Arial" pitchFamily="34" charset="-120"/>
+              </a:rPr>
+              <a:t>Where the Indic frameworks help — and where they don't.</a:t>
+            </a:r>
+            <a:endParaRPr lang="en-US" sz="1200" dirty="0"/>
+          </a:p>
+        </p:txBody>
+      </p:sp>
+      <p:sp>
+        <p:nvSpPr>
+          <p:cNvPr id="6" name="Text 4"/>
+          <p:cNvSpPr/>
+          <p:nvPr/>
+        </p:nvSpPr>
+        <p:spPr>
+          <a:xfrm>
+            <a:off x="406301" y="4434929"/>
+            <a:ext cx="8498026" cy="213271"/>
+          </a:xfrm>
+          <a:prstGeom prst="rect">
+            <a:avLst/>
+          </a:prstGeom>
+          <a:noFill/>
+          <a:ln/>
+        </p:spPr>
+        <p:txBody>
+          <a:bodyPr wrap="square" lIns="0" tIns="0" rIns="0" bIns="0" rtlCol="0" anchor="t"/>
+          <a:lstStyle/>
+          <a:p>
             <a:pPr algn="l" indent="0" marL="0">
               <a:lnSpc>
                 <a:spcPts val="1680"/>
@@ -2797,8 +3860,143 @@
                 <a:ea typeface="Arial" pitchFamily="34" charset="-122"/>
                 <a:cs typeface="Arial" pitchFamily="34" charset="-120"/>
               </a:rPr>
-              <a:t>These are all open / government sources; full references in </a:t>
-            </a:r>
+              <a:t>Middle ·  · IKS Curriculum</a:t>
+            </a:r>
+            <a:endParaRPr lang="en-US" sz="1200" dirty="0"/>
+          </a:p>
+        </p:txBody>
+      </p:sp>
+    </p:spTree>
+  </p:cSld>
+  <p:clrMapOvr>
+    <a:masterClrMapping/>
+  </p:clrMapOvr>
+</p:sld>
+</file>
+
+<file path=ppt/slides/slide12.xml><?xml version="1.0" encoding="utf-8"?>
+<p:sld xmlns:a="http://schemas.openxmlformats.org/drawingml/2006/main" xmlns:r="http://schemas.openxmlformats.org/officeDocument/2006/relationships" xmlns:p="http://schemas.openxmlformats.org/presentationml/2006/main">
+  <p:cSld name="Slide 12">
+    <p:bg>
+      <p:bgPr>
+        <a:solidFill>
+          <a:srgbClr val="FFFFFF"/>
+        </a:solidFill>
+      </p:bgPr>
+    </p:bg>
+    <p:spTree>
+      <p:nvGrpSpPr>
+        <p:cNvPr id="1" name=""/>
+        <p:cNvGrpSpPr/>
+        <p:nvPr/>
+      </p:nvGrpSpPr>
+      <p:grpSpPr>
+        <a:xfrm>
+          <a:off x="0" y="0"/>
+          <a:ext cx="0" cy="0"/>
+          <a:chOff x="0" y="0"/>
+          <a:chExt cx="0" cy="0"/>
+        </a:xfrm>
+      </p:grpSpPr>
+      <p:sp>
+        <p:nvSpPr>
+          <p:cNvPr id="2" name="Text 0"/>
+          <p:cNvSpPr/>
+          <p:nvPr/>
+        </p:nvSpPr>
+        <p:spPr>
+          <a:xfrm>
+            <a:off x="0" y="0"/>
+            <a:ext cx="9144000" cy="101501"/>
+          </a:xfrm>
+          <a:prstGeom prst="rect">
+            <a:avLst/>
+          </a:prstGeom>
+          <a:solidFill>
+            <a:srgbClr val="277884"/>
+          </a:solidFill>
+          <a:ln/>
+        </p:spPr>
+        <p:txBody>
+          <a:bodyPr wrap="square" rtlCol="0" anchor="ctr"/>
+          <a:lstStyle/>
+          <a:p>
+            <a:pPr indent="0" marL="0">
+              <a:buNone/>
+            </a:pPr>
+            <a:endParaRPr lang="en-US" dirty="0"/>
+          </a:p>
+        </p:txBody>
+      </p:sp>
+      <p:sp>
+        <p:nvSpPr>
+          <p:cNvPr id="3" name="Text 1"/>
+          <p:cNvSpPr/>
+          <p:nvPr/>
+        </p:nvSpPr>
+        <p:spPr>
+          <a:xfrm>
+            <a:off x="406301" y="457051"/>
+            <a:ext cx="8498026" cy="274290"/>
+          </a:xfrm>
+          <a:prstGeom prst="rect">
+            <a:avLst/>
+          </a:prstGeom>
+          <a:noFill/>
+          <a:ln/>
+        </p:spPr>
+        <p:txBody>
+          <a:bodyPr wrap="square" lIns="0" tIns="0" rIns="0" bIns="0" rtlCol="0" anchor="t"/>
+          <a:lstStyle/>
+          <a:p>
+            <a:pPr algn="l" indent="0" marL="0">
+              <a:lnSpc>
+                <a:spcPts val="2160"/>
+              </a:lnSpc>
+              <a:spcBef>
+                <a:spcPts val="600"/>
+              </a:spcBef>
+              <a:spcAft>
+                <a:spcPts val="800"/>
+              </a:spcAft>
+              <a:buNone/>
+            </a:pPr>
+            <a:r>
+              <a:rPr lang="en-US" sz="1800" b="1" dirty="0">
+                <a:solidFill>
+                  <a:srgbClr val="FE4447"/>
+                </a:solidFill>
+                <a:latin typeface="Georgia" pitchFamily="34" charset="0"/>
+                <a:ea typeface="Georgia" pitchFamily="34" charset="-122"/>
+                <a:cs typeface="Georgia" pitchFamily="34" charset="-120"/>
+              </a:rPr>
+              <a:t>Core (25 min) (cont.)</a:t>
+            </a:r>
+            <a:endParaRPr lang="en-US" sz="1800" dirty="0"/>
+          </a:p>
+        </p:txBody>
+      </p:sp>
+      <p:sp>
+        <p:nvSpPr>
+          <p:cNvPr id="4" name="Text 2"/>
+          <p:cNvSpPr/>
+          <p:nvPr/>
+        </p:nvSpPr>
+        <p:spPr>
+          <a:xfrm>
+            <a:off x="406301" y="870942"/>
+            <a:ext cx="8498026" cy="213271"/>
+          </a:xfrm>
+          <a:prstGeom prst="rect">
+            <a:avLst/>
+          </a:prstGeom>
+          <a:noFill/>
+          <a:ln/>
+        </p:spPr>
+        <p:txBody>
+          <a:bodyPr wrap="square" lIns="0" tIns="0" rIns="0" bIns="0" rtlCol="0" anchor="t"/>
+          <a:lstStyle/>
+          <a:p>
             <a:pPr algn="l" indent="0" marL="0">
               <a:lnSpc>
                 <a:spcPts val="1680"/>
@@ -2812,6 +4010,52 @@
               <a:buNone/>
             </a:pPr>
             <a:r>
+              <a:rPr lang="en-US" sz="1200" i="1" dirty="0">
+                <a:solidFill>
+                  <a:srgbClr val="1C2833"/>
+                </a:solidFill>
+                <a:latin typeface="Arial" pitchFamily="34" charset="0"/>
+                <a:ea typeface="Arial" pitchFamily="34" charset="-122"/>
+                <a:cs typeface="Arial" pitchFamily="34" charset="-120"/>
+              </a:rPr>
+              <a:t>Help:</a:t>
+            </a:r>
+            <a:endParaRPr lang="en-US" sz="1200" dirty="0"/>
+          </a:p>
+        </p:txBody>
+      </p:sp>
+      <p:sp>
+        <p:nvSpPr>
+          <p:cNvPr id="5" name="Text 3"/>
+          <p:cNvSpPr/>
+          <p:nvPr/>
+        </p:nvSpPr>
+        <p:spPr>
+          <a:xfrm>
+            <a:off x="634901" y="1173063"/>
+            <a:ext cx="8102798" cy="1218902"/>
+          </a:xfrm>
+          <a:prstGeom prst="rect">
+            <a:avLst/>
+          </a:prstGeom>
+          <a:noFill/>
+          <a:ln/>
+        </p:spPr>
+        <p:txBody>
+          <a:bodyPr wrap="square" lIns="0" tIns="0" rIns="0" bIns="0" rtlCol="0" anchor="t"/>
+          <a:lstStyle/>
+          <a:p>
+            <a:pPr algn="l" marL="342900" indent="-342900">
+              <a:lnSpc>
+                <a:spcPts val="1620"/>
+              </a:lnSpc>
+              <a:spcAft>
+                <a:spcPts val="300"/>
+              </a:spcAft>
+              <a:buSzPct val="100000"/>
+              <a:buChar char="•"/>
+            </a:pPr>
+            <a:r>
               <a:rPr lang="en-US" sz="1200" dirty="0">
                 <a:solidFill>
                   <a:srgbClr val="1C2833"/>
@@ -2820,8 +4064,385 @@
                 <a:ea typeface="Arial" pitchFamily="34" charset="-122"/>
                 <a:cs typeface="Arial" pitchFamily="34" charset="-120"/>
               </a:rPr>
-              <a:t>sources.md</a:t>
-            </a:r>
+              <a:t>The </a:t>
+            </a:r>
+            <a:pPr algn="l" indent="0" marL="0">
+              <a:lnSpc>
+                <a:spcPts val="1620"/>
+              </a:lnSpc>
+              <a:spcAft>
+                <a:spcPts val="300"/>
+              </a:spcAft>
+              <a:buNone/>
+            </a:pPr>
+            <a:r>
+              <a:rPr lang="en-US" sz="1200" i="1" dirty="0">
+                <a:solidFill>
+                  <a:srgbClr val="1C2833"/>
+                </a:solidFill>
+                <a:latin typeface="Arial" pitchFamily="34" charset="0"/>
+                <a:ea typeface="Arial" pitchFamily="34" charset="-122"/>
+                <a:cs typeface="Arial" pitchFamily="34" charset="-120"/>
+              </a:rPr>
+              <a:t>yajña</a:t>
+            </a:r>
+            <a:pPr algn="l" indent="0" marL="0">
+              <a:lnSpc>
+                <a:spcPts val="1620"/>
+              </a:lnSpc>
+              <a:spcAft>
+                <a:spcPts val="300"/>
+              </a:spcAft>
+              <a:buNone/>
+            </a:pPr>
+            <a:r>
+              <a:rPr lang="en-US" sz="1200" dirty="0">
+                <a:solidFill>
+                  <a:srgbClr val="1C2833"/>
+                </a:solidFill>
+                <a:latin typeface="Arial" pitchFamily="34" charset="0"/>
+                <a:ea typeface="Arial" pitchFamily="34" charset="-122"/>
+                <a:cs typeface="Arial" pitchFamily="34" charset="-120"/>
+              </a:rPr>
+              <a:t> cycle (Day 5) is a direct mental model of "what you take, you must give back." Climate change is what happens when this is ignored.</a:t>
+            </a:r>
+            <a:endParaRPr lang="en-US" sz="1200" dirty="0"/>
+          </a:p>
+          <a:p>
+            <a:pPr algn="l" marL="342900" indent="-342900">
+              <a:lnSpc>
+                <a:spcPts val="1620"/>
+              </a:lnSpc>
+              <a:spcAft>
+                <a:spcPts val="300"/>
+              </a:spcAft>
+              <a:buSzPct val="100000"/>
+              <a:buChar char="•"/>
+            </a:pPr>
+            <a:r>
+              <a:rPr lang="en-US" sz="1200" dirty="0">
+                <a:solidFill>
+                  <a:srgbClr val="1C2833"/>
+                </a:solidFill>
+                <a:latin typeface="Arial" pitchFamily="34" charset="0"/>
+                <a:ea typeface="Arial" pitchFamily="34" charset="-122"/>
+                <a:cs typeface="Arial" pitchFamily="34" charset="-120"/>
+              </a:rPr>
+              <a:t>The </a:t>
+            </a:r>
+            <a:pPr algn="l" indent="0" marL="0">
+              <a:lnSpc>
+                <a:spcPts val="1620"/>
+              </a:lnSpc>
+              <a:spcAft>
+                <a:spcPts val="300"/>
+              </a:spcAft>
+              <a:buNone/>
+            </a:pPr>
+            <a:r>
+              <a:rPr lang="en-US" sz="1200" i="1" dirty="0">
+                <a:solidFill>
+                  <a:srgbClr val="1C2833"/>
+                </a:solidFill>
+                <a:latin typeface="Arial" pitchFamily="34" charset="0"/>
+                <a:ea typeface="Arial" pitchFamily="34" charset="-122"/>
+                <a:cs typeface="Arial" pitchFamily="34" charset="-120"/>
+              </a:rPr>
+              <a:t>iṣopaniṣad</a:t>
+            </a:r>
+            <a:pPr algn="l" indent="0" marL="0">
+              <a:lnSpc>
+                <a:spcPts val="1620"/>
+              </a:lnSpc>
+              <a:spcAft>
+                <a:spcPts val="300"/>
+              </a:spcAft>
+              <a:buNone/>
+            </a:pPr>
+            <a:r>
+              <a:rPr lang="en-US" sz="1200" dirty="0">
+                <a:solidFill>
+                  <a:srgbClr val="1C2833"/>
+                </a:solidFill>
+                <a:latin typeface="Arial" pitchFamily="34" charset="0"/>
+                <a:ea typeface="Arial" pitchFamily="34" charset="-122"/>
+                <a:cs typeface="Arial" pitchFamily="34" charset="-120"/>
+              </a:rPr>
+              <a:t> mantra (Day 7) — </a:t>
+            </a:r>
+            <a:pPr algn="l" indent="0" marL="0">
+              <a:lnSpc>
+                <a:spcPts val="1620"/>
+              </a:lnSpc>
+              <a:spcAft>
+                <a:spcPts val="300"/>
+              </a:spcAft>
+              <a:buNone/>
+            </a:pPr>
+            <a:r>
+              <a:rPr lang="en-US" sz="1200" i="1" dirty="0">
+                <a:solidFill>
+                  <a:srgbClr val="1C2833"/>
+                </a:solidFill>
+                <a:latin typeface="Arial" pitchFamily="34" charset="0"/>
+                <a:ea typeface="Arial" pitchFamily="34" charset="-122"/>
+                <a:cs typeface="Arial" pitchFamily="34" charset="-120"/>
+              </a:rPr>
+              <a:t>"use, don't grab"</a:t>
+            </a:r>
+            <a:pPr algn="l" indent="0" marL="0">
+              <a:lnSpc>
+                <a:spcPts val="1620"/>
+              </a:lnSpc>
+              <a:spcAft>
+                <a:spcPts val="300"/>
+              </a:spcAft>
+              <a:buNone/>
+            </a:pPr>
+            <a:r>
+              <a:rPr lang="en-US" sz="1200" dirty="0">
+                <a:solidFill>
+                  <a:srgbClr val="1C2833"/>
+                </a:solidFill>
+                <a:latin typeface="Arial" pitchFamily="34" charset="0"/>
+                <a:ea typeface="Arial" pitchFamily="34" charset="-122"/>
+                <a:cs typeface="Arial" pitchFamily="34" charset="-120"/>
+              </a:rPr>
+              <a:t> — is the ethic of a low-carbon civilisation in five words.</a:t>
+            </a:r>
+            <a:endParaRPr lang="en-US" sz="1200" dirty="0"/>
+          </a:p>
+          <a:p>
+            <a:pPr algn="l" marL="342900" indent="-342900">
+              <a:lnSpc>
+                <a:spcPts val="1620"/>
+              </a:lnSpc>
+              <a:spcAft>
+                <a:spcPts val="300"/>
+              </a:spcAft>
+              <a:buSzPct val="100000"/>
+              <a:buChar char="•"/>
+            </a:pPr>
+            <a:r>
+              <a:rPr lang="en-US" sz="1200" dirty="0">
+                <a:solidFill>
+                  <a:srgbClr val="1C2833"/>
+                </a:solidFill>
+                <a:latin typeface="Arial" pitchFamily="34" charset="0"/>
+                <a:ea typeface="Arial" pitchFamily="34" charset="-122"/>
+                <a:cs typeface="Arial" pitchFamily="34" charset="-120"/>
+              </a:rPr>
+              <a:t>The </a:t>
+            </a:r>
+            <a:pPr algn="l" indent="0" marL="0">
+              <a:lnSpc>
+                <a:spcPts val="1620"/>
+              </a:lnSpc>
+              <a:spcAft>
+                <a:spcPts val="300"/>
+              </a:spcAft>
+              <a:buNone/>
+            </a:pPr>
+            <a:r>
+              <a:rPr lang="en-US" sz="1200" i="1" dirty="0">
+                <a:solidFill>
+                  <a:srgbClr val="1C2833"/>
+                </a:solidFill>
+                <a:latin typeface="Arial" pitchFamily="34" charset="0"/>
+                <a:ea typeface="Arial" pitchFamily="34" charset="-122"/>
+                <a:cs typeface="Arial" pitchFamily="34" charset="-120"/>
+              </a:rPr>
+              <a:t>Pṛthivī Sūkta</a:t>
+            </a:r>
+            <a:pPr algn="l" indent="0" marL="0">
+              <a:lnSpc>
+                <a:spcPts val="1620"/>
+              </a:lnSpc>
+              <a:spcAft>
+                <a:spcPts val="300"/>
+              </a:spcAft>
+              <a:buNone/>
+            </a:pPr>
+            <a:r>
+              <a:rPr lang="en-US" sz="1200" dirty="0">
+                <a:solidFill>
+                  <a:srgbClr val="1C2833"/>
+                </a:solidFill>
+                <a:latin typeface="Arial" pitchFamily="34" charset="0"/>
+                <a:ea typeface="Arial" pitchFamily="34" charset="-122"/>
+                <a:cs typeface="Arial" pitchFamily="34" charset="-120"/>
+              </a:rPr>
+              <a:t> (Day 6) — </a:t>
+            </a:r>
+            <a:pPr algn="l" indent="0" marL="0">
+              <a:lnSpc>
+                <a:spcPts val="1620"/>
+              </a:lnSpc>
+              <a:spcAft>
+                <a:spcPts val="300"/>
+              </a:spcAft>
+              <a:buNone/>
+            </a:pPr>
+            <a:r>
+              <a:rPr lang="en-US" sz="1200" i="1" dirty="0">
+                <a:solidFill>
+                  <a:srgbClr val="1C2833"/>
+                </a:solidFill>
+                <a:latin typeface="Arial" pitchFamily="34" charset="0"/>
+                <a:ea typeface="Arial" pitchFamily="34" charset="-122"/>
+                <a:cs typeface="Arial" pitchFamily="34" charset="-120"/>
+              </a:rPr>
+              <a:t>"may what I dig grow back"</a:t>
+            </a:r>
+            <a:pPr algn="l" indent="0" marL="0">
+              <a:lnSpc>
+                <a:spcPts val="1620"/>
+              </a:lnSpc>
+              <a:spcAft>
+                <a:spcPts val="300"/>
+              </a:spcAft>
+              <a:buNone/>
+            </a:pPr>
+            <a:r>
+              <a:rPr lang="en-US" sz="1200" dirty="0">
+                <a:solidFill>
+                  <a:srgbClr val="1C2833"/>
+                </a:solidFill>
+                <a:latin typeface="Arial" pitchFamily="34" charset="0"/>
+                <a:ea typeface="Arial" pitchFamily="34" charset="-122"/>
+                <a:cs typeface="Arial" pitchFamily="34" charset="-120"/>
+              </a:rPr>
+              <a:t> — was always the sustainability rule.</a:t>
+            </a:r>
+            <a:endParaRPr lang="en-US" sz="1200" dirty="0"/>
+          </a:p>
+          <a:p>
+            <a:pPr algn="l" marL="342900" indent="-342900">
+              <a:lnSpc>
+                <a:spcPts val="1620"/>
+              </a:lnSpc>
+              <a:spcAft>
+                <a:spcPts val="300"/>
+              </a:spcAft>
+              <a:buSzPct val="100000"/>
+              <a:buChar char="•"/>
+            </a:pPr>
+            <a:r>
+              <a:rPr lang="en-US" sz="1200" dirty="0">
+                <a:solidFill>
+                  <a:srgbClr val="1C2833"/>
+                </a:solidFill>
+                <a:latin typeface="Arial" pitchFamily="34" charset="0"/>
+                <a:ea typeface="Arial" pitchFamily="34" charset="-122"/>
+                <a:cs typeface="Arial" pitchFamily="34" charset="-120"/>
+              </a:rPr>
+              <a:t>The </a:t>
+            </a:r>
+            <a:pPr algn="l" indent="0" marL="0">
+              <a:lnSpc>
+                <a:spcPts val="1620"/>
+              </a:lnSpc>
+              <a:spcAft>
+                <a:spcPts val="300"/>
+              </a:spcAft>
+              <a:buNone/>
+            </a:pPr>
+            <a:r>
+              <a:rPr lang="en-US" sz="1200" i="1" dirty="0">
+                <a:solidFill>
+                  <a:srgbClr val="1C2833"/>
+                </a:solidFill>
+                <a:latin typeface="Arial" pitchFamily="34" charset="0"/>
+                <a:ea typeface="Arial" pitchFamily="34" charset="-122"/>
+                <a:cs typeface="Arial" pitchFamily="34" charset="-120"/>
+              </a:rPr>
+              <a:t>vasudhaiva kuṭumbakam</a:t>
+            </a:r>
+            <a:pPr algn="l" indent="0" marL="0">
+              <a:lnSpc>
+                <a:spcPts val="1620"/>
+              </a:lnSpc>
+              <a:spcAft>
+                <a:spcPts val="300"/>
+              </a:spcAft>
+              <a:buNone/>
+            </a:pPr>
+            <a:r>
+              <a:rPr lang="en-US" sz="1200" dirty="0">
+                <a:solidFill>
+                  <a:srgbClr val="1C2833"/>
+                </a:solidFill>
+                <a:latin typeface="Arial" pitchFamily="34" charset="0"/>
+                <a:ea typeface="Arial" pitchFamily="34" charset="-122"/>
+                <a:cs typeface="Arial" pitchFamily="34" charset="-120"/>
+              </a:rPr>
+              <a:t> ethic (Day 1) reframes climate as a </a:t>
+            </a:r>
+            <a:pPr algn="l" indent="0" marL="0">
+              <a:lnSpc>
+                <a:spcPts val="1620"/>
+              </a:lnSpc>
+              <a:spcAft>
+                <a:spcPts val="300"/>
+              </a:spcAft>
+              <a:buNone/>
+            </a:pPr>
+            <a:r>
+              <a:rPr lang="en-US" sz="1200" i="1" dirty="0">
+                <a:solidFill>
+                  <a:srgbClr val="1C2833"/>
+                </a:solidFill>
+                <a:latin typeface="Arial" pitchFamily="34" charset="0"/>
+                <a:ea typeface="Arial" pitchFamily="34" charset="-122"/>
+                <a:cs typeface="Arial" pitchFamily="34" charset="-120"/>
+              </a:rPr>
+              <a:t>family</a:t>
+            </a:r>
+            <a:pPr algn="l" indent="0" marL="0">
+              <a:lnSpc>
+                <a:spcPts val="1620"/>
+              </a:lnSpc>
+              <a:spcAft>
+                <a:spcPts val="300"/>
+              </a:spcAft>
+              <a:buNone/>
+            </a:pPr>
+            <a:r>
+              <a:rPr lang="en-US" sz="1200" dirty="0">
+                <a:solidFill>
+                  <a:srgbClr val="1C2833"/>
+                </a:solidFill>
+                <a:latin typeface="Arial" pitchFamily="34" charset="0"/>
+                <a:ea typeface="Arial" pitchFamily="34" charset="-122"/>
+                <a:cs typeface="Arial" pitchFamily="34" charset="-120"/>
+              </a:rPr>
+              <a:t> problem, not a national one.</a:t>
+            </a:r>
+            <a:endParaRPr lang="en-US" sz="1200" dirty="0"/>
+          </a:p>
+        </p:txBody>
+      </p:sp>
+      <p:sp>
+        <p:nvSpPr>
+          <p:cNvPr id="6" name="Text 4"/>
+          <p:cNvSpPr/>
+          <p:nvPr/>
+        </p:nvSpPr>
+        <p:spPr>
+          <a:xfrm>
+            <a:off x="406301" y="4434929"/>
+            <a:ext cx="8498026" cy="213271"/>
+          </a:xfrm>
+          <a:prstGeom prst="rect">
+            <a:avLst/>
+          </a:prstGeom>
+          <a:noFill/>
+          <a:ln/>
+        </p:spPr>
+        <p:txBody>
+          <a:bodyPr wrap="square" lIns="0" tIns="0" rIns="0" bIns="0" rtlCol="0" anchor="t"/>
+          <a:lstStyle/>
+          <a:p>
             <a:pPr algn="l" indent="0" marL="0">
               <a:lnSpc>
                 <a:spcPts val="1680"/>
@@ -2843,7 +4464,2228 @@
                 <a:ea typeface="Arial" pitchFamily="34" charset="-122"/>
                 <a:cs typeface="Arial" pitchFamily="34" charset="-120"/>
               </a:rPr>
-              <a:t>.</a:t>
+              <a:t>Middle ·  · IKS Curriculum</a:t>
+            </a:r>
+            <a:endParaRPr lang="en-US" sz="1200" dirty="0"/>
+          </a:p>
+        </p:txBody>
+      </p:sp>
+    </p:spTree>
+  </p:cSld>
+  <p:clrMapOvr>
+    <a:masterClrMapping/>
+  </p:clrMapOvr>
+</p:sld>
+</file>
+
+<file path=ppt/slides/slide13.xml><?xml version="1.0" encoding="utf-8"?>
+<p:sld xmlns:a="http://schemas.openxmlformats.org/drawingml/2006/main" xmlns:r="http://schemas.openxmlformats.org/officeDocument/2006/relationships" xmlns:p="http://schemas.openxmlformats.org/presentationml/2006/main">
+  <p:cSld name="Slide 13">
+    <p:bg>
+      <p:bgPr>
+        <a:solidFill>
+          <a:srgbClr val="FFFFFF"/>
+        </a:solidFill>
+      </p:bgPr>
+    </p:bg>
+    <p:spTree>
+      <p:nvGrpSpPr>
+        <p:cNvPr id="1" name=""/>
+        <p:cNvGrpSpPr/>
+        <p:nvPr/>
+      </p:nvGrpSpPr>
+      <p:grpSpPr>
+        <a:xfrm>
+          <a:off x="0" y="0"/>
+          <a:ext cx="0" cy="0"/>
+          <a:chOff x="0" y="0"/>
+          <a:chExt cx="0" cy="0"/>
+        </a:xfrm>
+      </p:grpSpPr>
+      <p:sp>
+        <p:nvSpPr>
+          <p:cNvPr id="2" name="Text 0"/>
+          <p:cNvSpPr/>
+          <p:nvPr/>
+        </p:nvSpPr>
+        <p:spPr>
+          <a:xfrm>
+            <a:off x="0" y="0"/>
+            <a:ext cx="9144000" cy="101501"/>
+          </a:xfrm>
+          <a:prstGeom prst="rect">
+            <a:avLst/>
+          </a:prstGeom>
+          <a:solidFill>
+            <a:srgbClr val="277884"/>
+          </a:solidFill>
+          <a:ln/>
+        </p:spPr>
+        <p:txBody>
+          <a:bodyPr wrap="square" rtlCol="0" anchor="ctr"/>
+          <a:lstStyle/>
+          <a:p>
+            <a:pPr indent="0" marL="0">
+              <a:buNone/>
+            </a:pPr>
+            <a:endParaRPr lang="en-US" dirty="0"/>
+          </a:p>
+        </p:txBody>
+      </p:sp>
+      <p:sp>
+        <p:nvSpPr>
+          <p:cNvPr id="3" name="Text 1"/>
+          <p:cNvSpPr/>
+          <p:nvPr/>
+        </p:nvSpPr>
+        <p:spPr>
+          <a:xfrm>
+            <a:off x="406301" y="457051"/>
+            <a:ext cx="8498026" cy="274290"/>
+          </a:xfrm>
+          <a:prstGeom prst="rect">
+            <a:avLst/>
+          </a:prstGeom>
+          <a:noFill/>
+          <a:ln/>
+        </p:spPr>
+        <p:txBody>
+          <a:bodyPr wrap="square" lIns="0" tIns="0" rIns="0" bIns="0" rtlCol="0" anchor="t"/>
+          <a:lstStyle/>
+          <a:p>
+            <a:pPr algn="l" indent="0" marL="0">
+              <a:lnSpc>
+                <a:spcPts val="2160"/>
+              </a:lnSpc>
+              <a:spcBef>
+                <a:spcPts val="600"/>
+              </a:spcBef>
+              <a:spcAft>
+                <a:spcPts val="800"/>
+              </a:spcAft>
+              <a:buNone/>
+            </a:pPr>
+            <a:r>
+              <a:rPr lang="en-US" sz="1800" b="1" dirty="0">
+                <a:solidFill>
+                  <a:srgbClr val="FE4447"/>
+                </a:solidFill>
+                <a:latin typeface="Georgia" pitchFamily="34" charset="0"/>
+                <a:ea typeface="Georgia" pitchFamily="34" charset="-122"/>
+                <a:cs typeface="Georgia" pitchFamily="34" charset="-120"/>
+              </a:rPr>
+              <a:t>Core (25 min) (cont.)</a:t>
+            </a:r>
+            <a:endParaRPr lang="en-US" sz="1800" dirty="0"/>
+          </a:p>
+        </p:txBody>
+      </p:sp>
+      <p:sp>
+        <p:nvSpPr>
+          <p:cNvPr id="4" name="Text 2"/>
+          <p:cNvSpPr/>
+          <p:nvPr/>
+        </p:nvSpPr>
+        <p:spPr>
+          <a:xfrm>
+            <a:off x="406301" y="870942"/>
+            <a:ext cx="8498026" cy="213271"/>
+          </a:xfrm>
+          <a:prstGeom prst="rect">
+            <a:avLst/>
+          </a:prstGeom>
+          <a:noFill/>
+          <a:ln/>
+        </p:spPr>
+        <p:txBody>
+          <a:bodyPr wrap="square" lIns="0" tIns="0" rIns="0" bIns="0" rtlCol="0" anchor="t"/>
+          <a:lstStyle/>
+          <a:p>
+            <a:pPr algn="l" indent="0" marL="0">
+              <a:lnSpc>
+                <a:spcPts val="1680"/>
+              </a:lnSpc>
+              <a:spcBef>
+                <a:spcPts val="300"/>
+              </a:spcBef>
+              <a:spcAft>
+                <a:spcPts val="300"/>
+              </a:spcAft>
+              <a:buNone/>
+            </a:pPr>
+            <a:r>
+              <a:rPr lang="en-US" sz="1200" i="1" dirty="0">
+                <a:solidFill>
+                  <a:srgbClr val="1C2833"/>
+                </a:solidFill>
+                <a:latin typeface="Arial" pitchFamily="34" charset="0"/>
+                <a:ea typeface="Arial" pitchFamily="34" charset="-122"/>
+                <a:cs typeface="Arial" pitchFamily="34" charset="-120"/>
+              </a:rPr>
+              <a:t>Don't help (or don't help by themselves):</a:t>
+            </a:r>
+            <a:endParaRPr lang="en-US" sz="1200" dirty="0"/>
+          </a:p>
+        </p:txBody>
+      </p:sp>
+      <p:sp>
+        <p:nvSpPr>
+          <p:cNvPr id="5" name="Text 3"/>
+          <p:cNvSpPr/>
+          <p:nvPr/>
+        </p:nvSpPr>
+        <p:spPr>
+          <a:xfrm>
+            <a:off x="634901" y="1173063"/>
+            <a:ext cx="8102798" cy="769441"/>
+          </a:xfrm>
+          <a:prstGeom prst="rect">
+            <a:avLst/>
+          </a:prstGeom>
+          <a:noFill/>
+          <a:ln/>
+        </p:spPr>
+        <p:txBody>
+          <a:bodyPr wrap="square" lIns="0" tIns="0" rIns="0" bIns="0" rtlCol="0" anchor="t"/>
+          <a:lstStyle/>
+          <a:p>
+            <a:pPr algn="l" marL="342900" indent="-342900">
+              <a:lnSpc>
+                <a:spcPts val="1620"/>
+              </a:lnSpc>
+              <a:spcAft>
+                <a:spcPts val="300"/>
+              </a:spcAft>
+              <a:buSzPct val="100000"/>
+              <a:buChar char="•"/>
+            </a:pPr>
+            <a:r>
+              <a:rPr lang="en-US" sz="1200" dirty="0">
+                <a:solidFill>
+                  <a:srgbClr val="1C2833"/>
+                </a:solidFill>
+                <a:latin typeface="Arial" pitchFamily="34" charset="0"/>
+                <a:ea typeface="Arial" pitchFamily="34" charset="-122"/>
+                <a:cs typeface="Arial" pitchFamily="34" charset="-120"/>
+              </a:rPr>
+              <a:t>Old frameworks don't tell us what 1.5°C means.</a:t>
+            </a:r>
+            <a:endParaRPr lang="en-US" sz="1200" dirty="0"/>
+          </a:p>
+          <a:p>
+            <a:pPr algn="l" marL="342900" indent="-342900">
+              <a:lnSpc>
+                <a:spcPts val="1620"/>
+              </a:lnSpc>
+              <a:spcAft>
+                <a:spcPts val="300"/>
+              </a:spcAft>
+              <a:buSzPct val="100000"/>
+              <a:buChar char="•"/>
+            </a:pPr>
+            <a:r>
+              <a:rPr lang="en-US" sz="1200" dirty="0">
+                <a:solidFill>
+                  <a:srgbClr val="1C2833"/>
+                </a:solidFill>
+                <a:latin typeface="Arial" pitchFamily="34" charset="0"/>
+                <a:ea typeface="Arial" pitchFamily="34" charset="-122"/>
+                <a:cs typeface="Arial" pitchFamily="34" charset="-120"/>
+              </a:rPr>
+              <a:t>They don't tell us how to design a solar grid, a heat-resistant rice variety, or a more efficient kiln.</a:t>
+            </a:r>
+            <a:endParaRPr lang="en-US" sz="1200" dirty="0"/>
+          </a:p>
+          <a:p>
+            <a:pPr algn="l" marL="342900" indent="-342900">
+              <a:lnSpc>
+                <a:spcPts val="1620"/>
+              </a:lnSpc>
+              <a:spcAft>
+                <a:spcPts val="300"/>
+              </a:spcAft>
+              <a:buSzPct val="100000"/>
+              <a:buChar char="•"/>
+            </a:pPr>
+            <a:r>
+              <a:rPr lang="en-US" sz="1200" dirty="0">
+                <a:solidFill>
+                  <a:srgbClr val="1C2833"/>
+                </a:solidFill>
+                <a:latin typeface="Arial" pitchFamily="34" charset="0"/>
+                <a:ea typeface="Arial" pitchFamily="34" charset="-122"/>
+                <a:cs typeface="Arial" pitchFamily="34" charset="-120"/>
+              </a:rPr>
+              <a:t>They don't substitute for measurement, monitoring, policy, and engineering.</a:t>
+            </a:r>
+            <a:endParaRPr lang="en-US" sz="1200" dirty="0"/>
+          </a:p>
+        </p:txBody>
+      </p:sp>
+      <p:sp>
+        <p:nvSpPr>
+          <p:cNvPr id="6" name="Text 4"/>
+          <p:cNvSpPr/>
+          <p:nvPr/>
+        </p:nvSpPr>
+        <p:spPr>
+          <a:xfrm>
+            <a:off x="406301" y="4434929"/>
+            <a:ext cx="8498026" cy="213271"/>
+          </a:xfrm>
+          <a:prstGeom prst="rect">
+            <a:avLst/>
+          </a:prstGeom>
+          <a:noFill/>
+          <a:ln/>
+        </p:spPr>
+        <p:txBody>
+          <a:bodyPr wrap="square" lIns="0" tIns="0" rIns="0" bIns="0" rtlCol="0" anchor="t"/>
+          <a:lstStyle/>
+          <a:p>
+            <a:pPr algn="l" indent="0" marL="0">
+              <a:lnSpc>
+                <a:spcPts val="1680"/>
+              </a:lnSpc>
+              <a:spcBef>
+                <a:spcPts val="300"/>
+              </a:spcBef>
+              <a:spcAft>
+                <a:spcPts val="300"/>
+              </a:spcAft>
+              <a:buNone/>
+            </a:pPr>
+            <a:r>
+              <a:rPr lang="en-US" sz="1200" dirty="0">
+                <a:solidFill>
+                  <a:srgbClr val="1C2833"/>
+                </a:solidFill>
+                <a:latin typeface="Arial" pitchFamily="34" charset="0"/>
+                <a:ea typeface="Arial" pitchFamily="34" charset="-122"/>
+                <a:cs typeface="Arial" pitchFamily="34" charset="-120"/>
+              </a:rPr>
+              <a:t>Middle ·  · IKS Curriculum</a:t>
+            </a:r>
+            <a:endParaRPr lang="en-US" sz="1200" dirty="0"/>
+          </a:p>
+        </p:txBody>
+      </p:sp>
+    </p:spTree>
+  </p:cSld>
+  <p:clrMapOvr>
+    <a:masterClrMapping/>
+  </p:clrMapOvr>
+</p:sld>
+</file>
+
+<file path=ppt/slides/slide14.xml><?xml version="1.0" encoding="utf-8"?>
+<p:sld xmlns:a="http://schemas.openxmlformats.org/drawingml/2006/main" xmlns:r="http://schemas.openxmlformats.org/officeDocument/2006/relationships" xmlns:p="http://schemas.openxmlformats.org/presentationml/2006/main">
+  <p:cSld name="Slide 14">
+    <p:bg>
+      <p:bgPr>
+        <a:solidFill>
+          <a:srgbClr val="FFFFFF"/>
+        </a:solidFill>
+      </p:bgPr>
+    </p:bg>
+    <p:spTree>
+      <p:nvGrpSpPr>
+        <p:cNvPr id="1" name=""/>
+        <p:cNvGrpSpPr/>
+        <p:nvPr/>
+      </p:nvGrpSpPr>
+      <p:grpSpPr>
+        <a:xfrm>
+          <a:off x="0" y="0"/>
+          <a:ext cx="0" cy="0"/>
+          <a:chOff x="0" y="0"/>
+          <a:chExt cx="0" cy="0"/>
+        </a:xfrm>
+      </p:grpSpPr>
+      <p:sp>
+        <p:nvSpPr>
+          <p:cNvPr id="2" name="Text 0"/>
+          <p:cNvSpPr/>
+          <p:nvPr/>
+        </p:nvSpPr>
+        <p:spPr>
+          <a:xfrm>
+            <a:off x="0" y="0"/>
+            <a:ext cx="9144000" cy="101501"/>
+          </a:xfrm>
+          <a:prstGeom prst="rect">
+            <a:avLst/>
+          </a:prstGeom>
+          <a:solidFill>
+            <a:srgbClr val="277884"/>
+          </a:solidFill>
+          <a:ln/>
+        </p:spPr>
+        <p:txBody>
+          <a:bodyPr wrap="square" rtlCol="0" anchor="ctr"/>
+          <a:lstStyle/>
+          <a:p>
+            <a:pPr indent="0" marL="0">
+              <a:buNone/>
+            </a:pPr>
+            <a:endParaRPr lang="en-US" dirty="0"/>
+          </a:p>
+        </p:txBody>
+      </p:sp>
+      <p:sp>
+        <p:nvSpPr>
+          <p:cNvPr id="3" name="Text 1"/>
+          <p:cNvSpPr/>
+          <p:nvPr/>
+        </p:nvSpPr>
+        <p:spPr>
+          <a:xfrm>
+            <a:off x="406301" y="457051"/>
+            <a:ext cx="8498026" cy="274290"/>
+          </a:xfrm>
+          <a:prstGeom prst="rect">
+            <a:avLst/>
+          </a:prstGeom>
+          <a:noFill/>
+          <a:ln/>
+        </p:spPr>
+        <p:txBody>
+          <a:bodyPr wrap="square" lIns="0" tIns="0" rIns="0" bIns="0" rtlCol="0" anchor="t"/>
+          <a:lstStyle/>
+          <a:p>
+            <a:pPr algn="l" indent="0" marL="0">
+              <a:lnSpc>
+                <a:spcPts val="2160"/>
+              </a:lnSpc>
+              <a:spcBef>
+                <a:spcPts val="600"/>
+              </a:spcBef>
+              <a:spcAft>
+                <a:spcPts val="800"/>
+              </a:spcAft>
+              <a:buNone/>
+            </a:pPr>
+            <a:r>
+              <a:rPr lang="en-US" sz="1800" b="1" dirty="0">
+                <a:solidFill>
+                  <a:srgbClr val="FE4447"/>
+                </a:solidFill>
+                <a:latin typeface="Georgia" pitchFamily="34" charset="0"/>
+                <a:ea typeface="Georgia" pitchFamily="34" charset="-122"/>
+                <a:cs typeface="Georgia" pitchFamily="34" charset="-120"/>
+              </a:rPr>
+              <a:t>Core (25 min) (cont.)</a:t>
+            </a:r>
+            <a:endParaRPr lang="en-US" sz="1800" dirty="0"/>
+          </a:p>
+        </p:txBody>
+      </p:sp>
+      <p:sp>
+        <p:nvSpPr>
+          <p:cNvPr id="4" name="Text 2"/>
+          <p:cNvSpPr/>
+          <p:nvPr/>
+        </p:nvSpPr>
+        <p:spPr>
+          <a:xfrm>
+            <a:off x="406301" y="870942"/>
+            <a:ext cx="8498026" cy="426541"/>
+          </a:xfrm>
+          <a:prstGeom prst="rect">
+            <a:avLst/>
+          </a:prstGeom>
+          <a:noFill/>
+          <a:ln/>
+        </p:spPr>
+        <p:txBody>
+          <a:bodyPr wrap="square" lIns="0" tIns="0" rIns="0" bIns="0" rtlCol="0" anchor="t"/>
+          <a:lstStyle/>
+          <a:p>
+            <a:pPr algn="l" indent="0" marL="0">
+              <a:lnSpc>
+                <a:spcPts val="1680"/>
+              </a:lnSpc>
+              <a:spcBef>
+                <a:spcPts val="300"/>
+              </a:spcBef>
+              <a:spcAft>
+                <a:spcPts val="300"/>
+              </a:spcAft>
+              <a:buNone/>
+            </a:pPr>
+            <a:r>
+              <a:rPr lang="en-US" sz="1200" i="1" dirty="0">
+                <a:solidFill>
+                  <a:srgbClr val="1C2833"/>
+                </a:solidFill>
+                <a:latin typeface="Arial" pitchFamily="34" charset="0"/>
+                <a:ea typeface="Arial" pitchFamily="34" charset="-122"/>
+                <a:cs typeface="Arial" pitchFamily="34" charset="-120"/>
+              </a:rPr>
+              <a:t>Honest summary:</a:t>
+            </a:r>
+            <a:pPr algn="l" indent="0" marL="0">
+              <a:lnSpc>
+                <a:spcPts val="1680"/>
+              </a:lnSpc>
+              <a:spcBef>
+                <a:spcPts val="300"/>
+              </a:spcBef>
+              <a:spcAft>
+                <a:spcPts val="300"/>
+              </a:spcAft>
+              <a:buNone/>
+            </a:pPr>
+            <a:r>
+              <a:rPr lang="en-US" sz="1200" dirty="0">
+                <a:solidFill>
+                  <a:srgbClr val="1C2833"/>
+                </a:solidFill>
+                <a:latin typeface="Arial" pitchFamily="34" charset="0"/>
+                <a:ea typeface="Arial" pitchFamily="34" charset="-122"/>
+                <a:cs typeface="Arial" pitchFamily="34" charset="-120"/>
+              </a:rPr>
+              <a:t> the Indic frameworks give us the </a:t>
+            </a:r>
+            <a:pPr algn="l" indent="0" marL="0">
+              <a:lnSpc>
+                <a:spcPts val="1680"/>
+              </a:lnSpc>
+              <a:spcBef>
+                <a:spcPts val="300"/>
+              </a:spcBef>
+              <a:spcAft>
+                <a:spcPts val="300"/>
+              </a:spcAft>
+              <a:buNone/>
+            </a:pPr>
+            <a:r>
+              <a:rPr lang="en-US" sz="1200" i="1" dirty="0">
+                <a:solidFill>
+                  <a:srgbClr val="1C2833"/>
+                </a:solidFill>
+                <a:latin typeface="Arial" pitchFamily="34" charset="0"/>
+                <a:ea typeface="Arial" pitchFamily="34" charset="-122"/>
+                <a:cs typeface="Arial" pitchFamily="34" charset="-120"/>
+              </a:rPr>
+              <a:t>attitude</a:t>
+            </a:r>
+            <a:pPr algn="l" indent="0" marL="0">
+              <a:lnSpc>
+                <a:spcPts val="1680"/>
+              </a:lnSpc>
+              <a:spcBef>
+                <a:spcPts val="300"/>
+              </a:spcBef>
+              <a:spcAft>
+                <a:spcPts val="300"/>
+              </a:spcAft>
+              <a:buNone/>
+            </a:pPr>
+            <a:r>
+              <a:rPr lang="en-US" sz="1200" dirty="0">
+                <a:solidFill>
+                  <a:srgbClr val="1C2833"/>
+                </a:solidFill>
+                <a:latin typeface="Arial" pitchFamily="34" charset="0"/>
+                <a:ea typeface="Arial" pitchFamily="34" charset="-122"/>
+                <a:cs typeface="Arial" pitchFamily="34" charset="-120"/>
+              </a:rPr>
+              <a:t> and the </a:t>
+            </a:r>
+            <a:pPr algn="l" indent="0" marL="0">
+              <a:lnSpc>
+                <a:spcPts val="1680"/>
+              </a:lnSpc>
+              <a:spcBef>
+                <a:spcPts val="300"/>
+              </a:spcBef>
+              <a:spcAft>
+                <a:spcPts val="300"/>
+              </a:spcAft>
+              <a:buNone/>
+            </a:pPr>
+            <a:r>
+              <a:rPr lang="en-US" sz="1200" i="1" dirty="0">
+                <a:solidFill>
+                  <a:srgbClr val="1C2833"/>
+                </a:solidFill>
+                <a:latin typeface="Arial" pitchFamily="34" charset="0"/>
+                <a:ea typeface="Arial" pitchFamily="34" charset="-122"/>
+                <a:cs typeface="Arial" pitchFamily="34" charset="-120"/>
+              </a:rPr>
+              <a:t>language</a:t>
+            </a:r>
+            <a:pPr algn="l" indent="0" marL="0">
+              <a:lnSpc>
+                <a:spcPts val="1680"/>
+              </a:lnSpc>
+              <a:spcBef>
+                <a:spcPts val="300"/>
+              </a:spcBef>
+              <a:spcAft>
+                <a:spcPts val="300"/>
+              </a:spcAft>
+              <a:buNone/>
+            </a:pPr>
+            <a:r>
+              <a:rPr lang="en-US" sz="1200" dirty="0">
+                <a:solidFill>
+                  <a:srgbClr val="1C2833"/>
+                </a:solidFill>
+                <a:latin typeface="Arial" pitchFamily="34" charset="0"/>
+                <a:ea typeface="Arial" pitchFamily="34" charset="-122"/>
+                <a:cs typeface="Arial" pitchFamily="34" charset="-120"/>
+              </a:rPr>
+              <a:t> of restraint. Modern science gives us the </a:t>
+            </a:r>
+            <a:pPr algn="l" indent="0" marL="0">
+              <a:lnSpc>
+                <a:spcPts val="1680"/>
+              </a:lnSpc>
+              <a:spcBef>
+                <a:spcPts val="300"/>
+              </a:spcBef>
+              <a:spcAft>
+                <a:spcPts val="300"/>
+              </a:spcAft>
+              <a:buNone/>
+            </a:pPr>
+            <a:r>
+              <a:rPr lang="en-US" sz="1200" i="1" dirty="0">
+                <a:solidFill>
+                  <a:srgbClr val="1C2833"/>
+                </a:solidFill>
+                <a:latin typeface="Arial" pitchFamily="34" charset="0"/>
+                <a:ea typeface="Arial" pitchFamily="34" charset="-122"/>
+                <a:cs typeface="Arial" pitchFamily="34" charset="-120"/>
+              </a:rPr>
+              <a:t>measurements</a:t>
+            </a:r>
+            <a:pPr algn="l" indent="0" marL="0">
+              <a:lnSpc>
+                <a:spcPts val="1680"/>
+              </a:lnSpc>
+              <a:spcBef>
+                <a:spcPts val="300"/>
+              </a:spcBef>
+              <a:spcAft>
+                <a:spcPts val="300"/>
+              </a:spcAft>
+              <a:buNone/>
+            </a:pPr>
+            <a:r>
+              <a:rPr lang="en-US" sz="1200" dirty="0">
+                <a:solidFill>
+                  <a:srgbClr val="1C2833"/>
+                </a:solidFill>
+                <a:latin typeface="Arial" pitchFamily="34" charset="0"/>
+                <a:ea typeface="Arial" pitchFamily="34" charset="-122"/>
+                <a:cs typeface="Arial" pitchFamily="34" charset="-120"/>
+              </a:rPr>
+              <a:t> and the </a:t>
+            </a:r>
+            <a:pPr algn="l" indent="0" marL="0">
+              <a:lnSpc>
+                <a:spcPts val="1680"/>
+              </a:lnSpc>
+              <a:spcBef>
+                <a:spcPts val="300"/>
+              </a:spcBef>
+              <a:spcAft>
+                <a:spcPts val="300"/>
+              </a:spcAft>
+              <a:buNone/>
+            </a:pPr>
+            <a:r>
+              <a:rPr lang="en-US" sz="1200" i="1" dirty="0">
+                <a:solidFill>
+                  <a:srgbClr val="1C2833"/>
+                </a:solidFill>
+                <a:latin typeface="Arial" pitchFamily="34" charset="0"/>
+                <a:ea typeface="Arial" pitchFamily="34" charset="-122"/>
+                <a:cs typeface="Arial" pitchFamily="34" charset="-120"/>
+              </a:rPr>
+              <a:t>technology</a:t>
+            </a:r>
+            <a:pPr algn="l" indent="0" marL="0">
+              <a:lnSpc>
+                <a:spcPts val="1680"/>
+              </a:lnSpc>
+              <a:spcBef>
+                <a:spcPts val="300"/>
+              </a:spcBef>
+              <a:spcAft>
+                <a:spcPts val="300"/>
+              </a:spcAft>
+              <a:buNone/>
+            </a:pPr>
+            <a:r>
+              <a:rPr lang="en-US" sz="1200" dirty="0">
+                <a:solidFill>
+                  <a:srgbClr val="1C2833"/>
+                </a:solidFill>
+                <a:latin typeface="Arial" pitchFamily="34" charset="0"/>
+                <a:ea typeface="Arial" pitchFamily="34" charset="-122"/>
+                <a:cs typeface="Arial" pitchFamily="34" charset="-120"/>
+              </a:rPr>
+              <a:t>. The climate crisis needs both.</a:t>
+            </a:r>
+            <a:endParaRPr lang="en-US" sz="1200" dirty="0"/>
+          </a:p>
+        </p:txBody>
+      </p:sp>
+      <p:sp>
+        <p:nvSpPr>
+          <p:cNvPr id="5" name="Text 3"/>
+          <p:cNvSpPr/>
+          <p:nvPr/>
+        </p:nvSpPr>
+        <p:spPr>
+          <a:xfrm>
+            <a:off x="406301" y="4434929"/>
+            <a:ext cx="8498026" cy="213271"/>
+          </a:xfrm>
+          <a:prstGeom prst="rect">
+            <a:avLst/>
+          </a:prstGeom>
+          <a:noFill/>
+          <a:ln/>
+        </p:spPr>
+        <p:txBody>
+          <a:bodyPr wrap="square" lIns="0" tIns="0" rIns="0" bIns="0" rtlCol="0" anchor="t"/>
+          <a:lstStyle/>
+          <a:p>
+            <a:pPr algn="l" indent="0" marL="0">
+              <a:lnSpc>
+                <a:spcPts val="1680"/>
+              </a:lnSpc>
+              <a:spcBef>
+                <a:spcPts val="300"/>
+              </a:spcBef>
+              <a:spcAft>
+                <a:spcPts val="300"/>
+              </a:spcAft>
+              <a:buNone/>
+            </a:pPr>
+            <a:r>
+              <a:rPr lang="en-US" sz="1200" dirty="0">
+                <a:solidFill>
+                  <a:srgbClr val="1C2833"/>
+                </a:solidFill>
+                <a:latin typeface="Arial" pitchFamily="34" charset="0"/>
+                <a:ea typeface="Arial" pitchFamily="34" charset="-122"/>
+                <a:cs typeface="Arial" pitchFamily="34" charset="-120"/>
+              </a:rPr>
+              <a:t>Middle ·  · IKS Curriculum</a:t>
+            </a:r>
+            <a:endParaRPr lang="en-US" sz="1200" dirty="0"/>
+          </a:p>
+        </p:txBody>
+      </p:sp>
+    </p:spTree>
+  </p:cSld>
+  <p:clrMapOvr>
+    <a:masterClrMapping/>
+  </p:clrMapOvr>
+</p:sld>
+</file>
+
+<file path=ppt/slides/slide15.xml><?xml version="1.0" encoding="utf-8"?>
+<p:sld xmlns:a="http://schemas.openxmlformats.org/drawingml/2006/main" xmlns:r="http://schemas.openxmlformats.org/officeDocument/2006/relationships" xmlns:p="http://schemas.openxmlformats.org/presentationml/2006/main">
+  <p:cSld name="Slide 15">
+    <p:bg>
+      <p:bgPr>
+        <a:solidFill>
+          <a:srgbClr val="FFFFFF"/>
+        </a:solidFill>
+      </p:bgPr>
+    </p:bg>
+    <p:spTree>
+      <p:nvGrpSpPr>
+        <p:cNvPr id="1" name=""/>
+        <p:cNvGrpSpPr/>
+        <p:nvPr/>
+      </p:nvGrpSpPr>
+      <p:grpSpPr>
+        <a:xfrm>
+          <a:off x="0" y="0"/>
+          <a:ext cx="0" cy="0"/>
+          <a:chOff x="0" y="0"/>
+          <a:chExt cx="0" cy="0"/>
+        </a:xfrm>
+      </p:grpSpPr>
+      <p:sp>
+        <p:nvSpPr>
+          <p:cNvPr id="2" name="Text 0"/>
+          <p:cNvSpPr/>
+          <p:nvPr/>
+        </p:nvSpPr>
+        <p:spPr>
+          <a:xfrm>
+            <a:off x="0" y="0"/>
+            <a:ext cx="9144000" cy="101501"/>
+          </a:xfrm>
+          <a:prstGeom prst="rect">
+            <a:avLst/>
+          </a:prstGeom>
+          <a:solidFill>
+            <a:srgbClr val="277884"/>
+          </a:solidFill>
+          <a:ln/>
+        </p:spPr>
+        <p:txBody>
+          <a:bodyPr wrap="square" rtlCol="0" anchor="ctr"/>
+          <a:lstStyle/>
+          <a:p>
+            <a:pPr indent="0" marL="0">
+              <a:buNone/>
+            </a:pPr>
+            <a:endParaRPr lang="en-US" dirty="0"/>
+          </a:p>
+        </p:txBody>
+      </p:sp>
+      <p:sp>
+        <p:nvSpPr>
+          <p:cNvPr id="3" name="Text 1"/>
+          <p:cNvSpPr/>
+          <p:nvPr/>
+        </p:nvSpPr>
+        <p:spPr>
+          <a:xfrm>
+            <a:off x="406301" y="457051"/>
+            <a:ext cx="8498026" cy="274290"/>
+          </a:xfrm>
+          <a:prstGeom prst="rect">
+            <a:avLst/>
+          </a:prstGeom>
+          <a:noFill/>
+          <a:ln/>
+        </p:spPr>
+        <p:txBody>
+          <a:bodyPr wrap="square" lIns="0" tIns="0" rIns="0" bIns="0" rtlCol="0" anchor="t"/>
+          <a:lstStyle/>
+          <a:p>
+            <a:pPr algn="l" indent="0" marL="0">
+              <a:lnSpc>
+                <a:spcPts val="2160"/>
+              </a:lnSpc>
+              <a:spcBef>
+                <a:spcPts val="600"/>
+              </a:spcBef>
+              <a:spcAft>
+                <a:spcPts val="800"/>
+              </a:spcAft>
+              <a:buNone/>
+            </a:pPr>
+            <a:r>
+              <a:rPr lang="en-US" sz="1800" b="1" dirty="0">
+                <a:solidFill>
+                  <a:srgbClr val="FE4447"/>
+                </a:solidFill>
+                <a:latin typeface="Georgia" pitchFamily="34" charset="0"/>
+                <a:ea typeface="Georgia" pitchFamily="34" charset="-122"/>
+                <a:cs typeface="Georgia" pitchFamily="34" charset="-120"/>
+              </a:rPr>
+              <a:t>Core (25 min) (cont.)</a:t>
+            </a:r>
+            <a:endParaRPr lang="en-US" sz="1800" dirty="0"/>
+          </a:p>
+        </p:txBody>
+      </p:sp>
+      <p:sp>
+        <p:nvSpPr>
+          <p:cNvPr id="4" name="Text 2"/>
+          <p:cNvSpPr/>
+          <p:nvPr/>
+        </p:nvSpPr>
+        <p:spPr>
+          <a:xfrm>
+            <a:off x="634901" y="883593"/>
+            <a:ext cx="8102798" cy="281880"/>
+          </a:xfrm>
+          <a:prstGeom prst="rect">
+            <a:avLst/>
+          </a:prstGeom>
+          <a:noFill/>
+          <a:ln/>
+        </p:spPr>
+        <p:txBody>
+          <a:bodyPr wrap="square" lIns="0" tIns="0" rIns="0" bIns="0" rtlCol="0" anchor="t"/>
+          <a:lstStyle/>
+          <a:p>
+            <a:pPr algn="l" marL="342900" indent="-342900">
+              <a:lnSpc>
+                <a:spcPts val="1620"/>
+              </a:lnSpc>
+              <a:spcAft>
+                <a:spcPts val="300"/>
+              </a:spcAft>
+              <a:buSzPct val="100000"/>
+              <a:buChar char="•"/>
+            </a:pPr>
+            <a:r>
+              <a:rPr lang="en-US" sz="1200" b="1" dirty="0">
+                <a:solidFill>
+                  <a:srgbClr val="1C2833"/>
+                </a:solidFill>
+                <a:latin typeface="Arial" pitchFamily="34" charset="0"/>
+                <a:ea typeface="Arial" pitchFamily="34" charset="-122"/>
+                <a:cs typeface="Arial" pitchFamily="34" charset="-120"/>
+              </a:rPr>
+              <a:t>What India is doing.</a:t>
+            </a:r>
+            <a:pPr algn="l" indent="0" marL="0">
+              <a:lnSpc>
+                <a:spcPts val="1620"/>
+              </a:lnSpc>
+              <a:spcAft>
+                <a:spcPts val="300"/>
+              </a:spcAft>
+              <a:buNone/>
+            </a:pPr>
+            <a:r>
+              <a:rPr lang="en-US" sz="1200" dirty="0">
+                <a:solidFill>
+                  <a:srgbClr val="1C2833"/>
+                </a:solidFill>
+                <a:latin typeface="Arial" pitchFamily="34" charset="0"/>
+                <a:ea typeface="Arial" pitchFamily="34" charset="-122"/>
+                <a:cs typeface="Arial" pitchFamily="34" charset="-120"/>
+              </a:rPr>
+              <a:t> Brief mention:</a:t>
+            </a:r>
+            <a:endParaRPr lang="en-US" sz="1200" dirty="0"/>
+          </a:p>
+        </p:txBody>
+      </p:sp>
+      <p:sp>
+        <p:nvSpPr>
+          <p:cNvPr id="5" name="Text 3"/>
+          <p:cNvSpPr/>
+          <p:nvPr/>
+        </p:nvSpPr>
+        <p:spPr>
+          <a:xfrm>
+            <a:off x="634901" y="1266974"/>
+            <a:ext cx="8102798" cy="975122"/>
+          </a:xfrm>
+          <a:prstGeom prst="rect">
+            <a:avLst/>
+          </a:prstGeom>
+          <a:noFill/>
+          <a:ln/>
+        </p:spPr>
+        <p:txBody>
+          <a:bodyPr wrap="square" lIns="0" tIns="0" rIns="0" bIns="0" rtlCol="0" anchor="t"/>
+          <a:lstStyle/>
+          <a:p>
+            <a:pPr algn="l" marL="342900" indent="-342900">
+              <a:lnSpc>
+                <a:spcPts val="1620"/>
+              </a:lnSpc>
+              <a:spcAft>
+                <a:spcPts val="300"/>
+              </a:spcAft>
+              <a:buSzPct val="100000"/>
+              <a:buChar char="•"/>
+            </a:pPr>
+            <a:r>
+              <a:rPr lang="en-US" sz="1200" dirty="0">
+                <a:solidFill>
+                  <a:srgbClr val="1C2833"/>
+                </a:solidFill>
+                <a:latin typeface="Arial" pitchFamily="34" charset="0"/>
+                <a:ea typeface="Arial" pitchFamily="34" charset="-122"/>
+                <a:cs typeface="Arial" pitchFamily="34" charset="-120"/>
+              </a:rPr>
+              <a:t>India has committed (Paris pledges + COP26) to reach net-zero emissions by 2070.</a:t>
+            </a:r>
+            <a:endParaRPr lang="en-US" sz="1200" dirty="0"/>
+          </a:p>
+          <a:p>
+            <a:pPr algn="l" marL="342900" indent="-342900">
+              <a:lnSpc>
+                <a:spcPts val="1620"/>
+              </a:lnSpc>
+              <a:spcAft>
+                <a:spcPts val="300"/>
+              </a:spcAft>
+              <a:buSzPct val="100000"/>
+              <a:buChar char="•"/>
+            </a:pPr>
+            <a:r>
+              <a:rPr lang="en-US" sz="1200" dirty="0">
+                <a:solidFill>
+                  <a:srgbClr val="1C2833"/>
+                </a:solidFill>
+                <a:latin typeface="Arial" pitchFamily="34" charset="0"/>
+                <a:ea typeface="Arial" pitchFamily="34" charset="-122"/>
+                <a:cs typeface="Arial" pitchFamily="34" charset="-120"/>
+              </a:rPr>
+              <a:t>National solar capacity has grown ~30× since 2010.</a:t>
+            </a:r>
+            <a:endParaRPr lang="en-US" sz="1200" dirty="0"/>
+          </a:p>
+          <a:p>
+            <a:pPr algn="l" marL="342900" indent="-342900">
+              <a:lnSpc>
+                <a:spcPts val="1620"/>
+              </a:lnSpc>
+              <a:spcAft>
+                <a:spcPts val="300"/>
+              </a:spcAft>
+              <a:buSzPct val="100000"/>
+              <a:buChar char="•"/>
+            </a:pPr>
+            <a:r>
+              <a:rPr lang="en-US" sz="1200" dirty="0">
+                <a:solidFill>
+                  <a:srgbClr val="1C2833"/>
+                </a:solidFill>
+                <a:latin typeface="Arial" pitchFamily="34" charset="0"/>
+                <a:ea typeface="Arial" pitchFamily="34" charset="-122"/>
+                <a:cs typeface="Arial" pitchFamily="34" charset="-120"/>
+              </a:rPr>
+              <a:t>National Action Plan on Climate Change has 8 missions (solar, water, energy efficiency, sustainable agriculture, Himalayan ecosystem, sustainable habitat, green India, knowledge).</a:t>
+            </a:r>
+            <a:endParaRPr lang="en-US" sz="1200" dirty="0"/>
+          </a:p>
+        </p:txBody>
+      </p:sp>
+      <p:sp>
+        <p:nvSpPr>
+          <p:cNvPr id="6" name="Text 4"/>
+          <p:cNvSpPr/>
+          <p:nvPr/>
+        </p:nvSpPr>
+        <p:spPr>
+          <a:xfrm>
+            <a:off x="406301" y="4434929"/>
+            <a:ext cx="8498026" cy="213271"/>
+          </a:xfrm>
+          <a:prstGeom prst="rect">
+            <a:avLst/>
+          </a:prstGeom>
+          <a:noFill/>
+          <a:ln/>
+        </p:spPr>
+        <p:txBody>
+          <a:bodyPr wrap="square" lIns="0" tIns="0" rIns="0" bIns="0" rtlCol="0" anchor="t"/>
+          <a:lstStyle/>
+          <a:p>
+            <a:pPr algn="l" indent="0" marL="0">
+              <a:lnSpc>
+                <a:spcPts val="1680"/>
+              </a:lnSpc>
+              <a:spcBef>
+                <a:spcPts val="300"/>
+              </a:spcBef>
+              <a:spcAft>
+                <a:spcPts val="300"/>
+              </a:spcAft>
+              <a:buNone/>
+            </a:pPr>
+            <a:r>
+              <a:rPr lang="en-US" sz="1200" dirty="0">
+                <a:solidFill>
+                  <a:srgbClr val="1C2833"/>
+                </a:solidFill>
+                <a:latin typeface="Arial" pitchFamily="34" charset="0"/>
+                <a:ea typeface="Arial" pitchFamily="34" charset="-122"/>
+                <a:cs typeface="Arial" pitchFamily="34" charset="-120"/>
+              </a:rPr>
+              <a:t>Middle ·  · IKS Curriculum</a:t>
+            </a:r>
+            <a:endParaRPr lang="en-US" sz="1200" dirty="0"/>
+          </a:p>
+        </p:txBody>
+      </p:sp>
+    </p:spTree>
+  </p:cSld>
+  <p:clrMapOvr>
+    <a:masterClrMapping/>
+  </p:clrMapOvr>
+</p:sld>
+</file>
+
+<file path=ppt/slides/slide16.xml><?xml version="1.0" encoding="utf-8"?>
+<p:sld xmlns:a="http://schemas.openxmlformats.org/drawingml/2006/main" xmlns:r="http://schemas.openxmlformats.org/officeDocument/2006/relationships" xmlns:p="http://schemas.openxmlformats.org/presentationml/2006/main">
+  <p:cSld name="Slide 16">
+    <p:bg>
+      <p:bgPr>
+        <a:solidFill>
+          <a:srgbClr val="FFFFFF"/>
+        </a:solidFill>
+      </p:bgPr>
+    </p:bg>
+    <p:spTree>
+      <p:nvGrpSpPr>
+        <p:cNvPr id="1" name=""/>
+        <p:cNvGrpSpPr/>
+        <p:nvPr/>
+      </p:nvGrpSpPr>
+      <p:grpSpPr>
+        <a:xfrm>
+          <a:off x="0" y="0"/>
+          <a:ext cx="0" cy="0"/>
+          <a:chOff x="0" y="0"/>
+          <a:chExt cx="0" cy="0"/>
+        </a:xfrm>
+      </p:grpSpPr>
+      <p:sp>
+        <p:nvSpPr>
+          <p:cNvPr id="2" name="Text 0"/>
+          <p:cNvSpPr/>
+          <p:nvPr/>
+        </p:nvSpPr>
+        <p:spPr>
+          <a:xfrm>
+            <a:off x="0" y="0"/>
+            <a:ext cx="9144000" cy="101501"/>
+          </a:xfrm>
+          <a:prstGeom prst="rect">
+            <a:avLst/>
+          </a:prstGeom>
+          <a:solidFill>
+            <a:srgbClr val="277884"/>
+          </a:solidFill>
+          <a:ln/>
+        </p:spPr>
+        <p:txBody>
+          <a:bodyPr wrap="square" rtlCol="0" anchor="ctr"/>
+          <a:lstStyle/>
+          <a:p>
+            <a:pPr indent="0" marL="0">
+              <a:buNone/>
+            </a:pPr>
+            <a:endParaRPr lang="en-US" dirty="0"/>
+          </a:p>
+        </p:txBody>
+      </p:sp>
+      <p:sp>
+        <p:nvSpPr>
+          <p:cNvPr id="3" name="Text 1"/>
+          <p:cNvSpPr/>
+          <p:nvPr/>
+        </p:nvSpPr>
+        <p:spPr>
+          <a:xfrm>
+            <a:off x="406301" y="457051"/>
+            <a:ext cx="8498026" cy="274290"/>
+          </a:xfrm>
+          <a:prstGeom prst="rect">
+            <a:avLst/>
+          </a:prstGeom>
+          <a:noFill/>
+          <a:ln/>
+        </p:spPr>
+        <p:txBody>
+          <a:bodyPr wrap="square" lIns="0" tIns="0" rIns="0" bIns="0" rtlCol="0" anchor="t"/>
+          <a:lstStyle/>
+          <a:p>
+            <a:pPr algn="l" indent="0" marL="0">
+              <a:lnSpc>
+                <a:spcPts val="2160"/>
+              </a:lnSpc>
+              <a:spcBef>
+                <a:spcPts val="600"/>
+              </a:spcBef>
+              <a:spcAft>
+                <a:spcPts val="800"/>
+              </a:spcAft>
+              <a:buNone/>
+            </a:pPr>
+            <a:r>
+              <a:rPr lang="en-US" sz="1800" b="1" dirty="0">
+                <a:solidFill>
+                  <a:srgbClr val="FE4447"/>
+                </a:solidFill>
+                <a:latin typeface="Georgia" pitchFamily="34" charset="0"/>
+                <a:ea typeface="Georgia" pitchFamily="34" charset="-122"/>
+                <a:cs typeface="Georgia" pitchFamily="34" charset="-120"/>
+              </a:rPr>
+              <a:t>Core (25 min) (cont.)</a:t>
+            </a:r>
+            <a:endParaRPr lang="en-US" sz="1800" dirty="0"/>
+          </a:p>
+        </p:txBody>
+      </p:sp>
+      <p:sp>
+        <p:nvSpPr>
+          <p:cNvPr id="4" name="Text 2"/>
+          <p:cNvSpPr/>
+          <p:nvPr/>
+        </p:nvSpPr>
+        <p:spPr>
+          <a:xfrm>
+            <a:off x="406301" y="870942"/>
+            <a:ext cx="8498026" cy="213271"/>
+          </a:xfrm>
+          <a:prstGeom prst="rect">
+            <a:avLst/>
+          </a:prstGeom>
+          <a:noFill/>
+          <a:ln/>
+        </p:spPr>
+        <p:txBody>
+          <a:bodyPr wrap="square" lIns="0" tIns="0" rIns="0" bIns="0" rtlCol="0" anchor="t"/>
+          <a:lstStyle/>
+          <a:p>
+            <a:pPr algn="l" indent="0" marL="0">
+              <a:lnSpc>
+                <a:spcPts val="1680"/>
+              </a:lnSpc>
+              <a:spcBef>
+                <a:spcPts val="300"/>
+              </a:spcBef>
+              <a:spcAft>
+                <a:spcPts val="300"/>
+              </a:spcAft>
+              <a:buNone/>
+            </a:pPr>
+            <a:r>
+              <a:rPr lang="en-US" sz="1200" dirty="0">
+                <a:solidFill>
+                  <a:srgbClr val="1C2833"/>
+                </a:solidFill>
+                <a:latin typeface="Arial" pitchFamily="34" charset="0"/>
+                <a:ea typeface="Arial" pitchFamily="34" charset="-122"/>
+                <a:cs typeface="Arial" pitchFamily="34" charset="-120"/>
+              </a:rPr>
+              <a:t>This is not a politics lesson; this is just "what's currently happening."</a:t>
+            </a:r>
+            <a:endParaRPr lang="en-US" sz="1200" dirty="0"/>
+          </a:p>
+        </p:txBody>
+      </p:sp>
+      <p:sp>
+        <p:nvSpPr>
+          <p:cNvPr id="5" name="Text 3"/>
+          <p:cNvSpPr/>
+          <p:nvPr/>
+        </p:nvSpPr>
+        <p:spPr>
+          <a:xfrm>
+            <a:off x="406301" y="4434929"/>
+            <a:ext cx="8498026" cy="213271"/>
+          </a:xfrm>
+          <a:prstGeom prst="rect">
+            <a:avLst/>
+          </a:prstGeom>
+          <a:noFill/>
+          <a:ln/>
+        </p:spPr>
+        <p:txBody>
+          <a:bodyPr wrap="square" lIns="0" tIns="0" rIns="0" bIns="0" rtlCol="0" anchor="t"/>
+          <a:lstStyle/>
+          <a:p>
+            <a:pPr algn="l" indent="0" marL="0">
+              <a:lnSpc>
+                <a:spcPts val="1680"/>
+              </a:lnSpc>
+              <a:spcBef>
+                <a:spcPts val="300"/>
+              </a:spcBef>
+              <a:spcAft>
+                <a:spcPts val="300"/>
+              </a:spcAft>
+              <a:buNone/>
+            </a:pPr>
+            <a:r>
+              <a:rPr lang="en-US" sz="1200" dirty="0">
+                <a:solidFill>
+                  <a:srgbClr val="1C2833"/>
+                </a:solidFill>
+                <a:latin typeface="Arial" pitchFamily="34" charset="0"/>
+                <a:ea typeface="Arial" pitchFamily="34" charset="-122"/>
+                <a:cs typeface="Arial" pitchFamily="34" charset="-120"/>
+              </a:rPr>
+              <a:t>Middle ·  · IKS Curriculum</a:t>
+            </a:r>
+            <a:endParaRPr lang="en-US" sz="1200" dirty="0"/>
+          </a:p>
+        </p:txBody>
+      </p:sp>
+    </p:spTree>
+  </p:cSld>
+  <p:clrMapOvr>
+    <a:masterClrMapping/>
+  </p:clrMapOvr>
+</p:sld>
+</file>
+
+<file path=ppt/slides/slide17.xml><?xml version="1.0" encoding="utf-8"?>
+<p:sld xmlns:a="http://schemas.openxmlformats.org/drawingml/2006/main" xmlns:r="http://schemas.openxmlformats.org/officeDocument/2006/relationships" xmlns:p="http://schemas.openxmlformats.org/presentationml/2006/main">
+  <p:cSld name="Slide 17">
+    <p:bg>
+      <p:bgPr>
+        <a:solidFill>
+          <a:srgbClr val="FFFFFF"/>
+        </a:solidFill>
+      </p:bgPr>
+    </p:bg>
+    <p:spTree>
+      <p:nvGrpSpPr>
+        <p:cNvPr id="1" name=""/>
+        <p:cNvGrpSpPr/>
+        <p:nvPr/>
+      </p:nvGrpSpPr>
+      <p:grpSpPr>
+        <a:xfrm>
+          <a:off x="0" y="0"/>
+          <a:ext cx="0" cy="0"/>
+          <a:chOff x="0" y="0"/>
+          <a:chExt cx="0" cy="0"/>
+        </a:xfrm>
+      </p:grpSpPr>
+      <p:sp>
+        <p:nvSpPr>
+          <p:cNvPr id="2" name="Text 0"/>
+          <p:cNvSpPr/>
+          <p:nvPr/>
+        </p:nvSpPr>
+        <p:spPr>
+          <a:xfrm>
+            <a:off x="0" y="0"/>
+            <a:ext cx="9144000" cy="101501"/>
+          </a:xfrm>
+          <a:prstGeom prst="rect">
+            <a:avLst/>
+          </a:prstGeom>
+          <a:solidFill>
+            <a:srgbClr val="277884"/>
+          </a:solidFill>
+          <a:ln/>
+        </p:spPr>
+        <p:txBody>
+          <a:bodyPr wrap="square" rtlCol="0" anchor="ctr"/>
+          <a:lstStyle/>
+          <a:p>
+            <a:pPr indent="0" marL="0">
+              <a:buNone/>
+            </a:pPr>
+            <a:endParaRPr lang="en-US" dirty="0"/>
+          </a:p>
+        </p:txBody>
+      </p:sp>
+      <p:sp>
+        <p:nvSpPr>
+          <p:cNvPr id="3" name="Text 1"/>
+          <p:cNvSpPr/>
+          <p:nvPr/>
+        </p:nvSpPr>
+        <p:spPr>
+          <a:xfrm>
+            <a:off x="406301" y="457051"/>
+            <a:ext cx="8498026" cy="274290"/>
+          </a:xfrm>
+          <a:prstGeom prst="rect">
+            <a:avLst/>
+          </a:prstGeom>
+          <a:noFill/>
+          <a:ln/>
+        </p:spPr>
+        <p:txBody>
+          <a:bodyPr wrap="square" lIns="0" tIns="0" rIns="0" bIns="0" rtlCol="0" anchor="t"/>
+          <a:lstStyle/>
+          <a:p>
+            <a:pPr algn="l" indent="0" marL="0">
+              <a:lnSpc>
+                <a:spcPts val="2160"/>
+              </a:lnSpc>
+              <a:spcBef>
+                <a:spcPts val="600"/>
+              </a:spcBef>
+              <a:spcAft>
+                <a:spcPts val="800"/>
+              </a:spcAft>
+              <a:buNone/>
+            </a:pPr>
+            <a:r>
+              <a:rPr lang="en-US" sz="1800" b="1" dirty="0">
+                <a:solidFill>
+                  <a:srgbClr val="FE4447"/>
+                </a:solidFill>
+                <a:latin typeface="Georgia" pitchFamily="34" charset="0"/>
+                <a:ea typeface="Georgia" pitchFamily="34" charset="-122"/>
+                <a:cs typeface="Georgia" pitchFamily="34" charset="-120"/>
+              </a:rPr>
+              <a:t>Activity (10 min) — Pair brainstorm: pitch the principle</a:t>
+            </a:r>
+            <a:endParaRPr lang="en-US" sz="1800" dirty="0"/>
+          </a:p>
+        </p:txBody>
+      </p:sp>
+      <p:sp>
+        <p:nvSpPr>
+          <p:cNvPr id="4" name="Text 2"/>
+          <p:cNvSpPr/>
+          <p:nvPr/>
+        </p:nvSpPr>
+        <p:spPr>
+          <a:xfrm>
+            <a:off x="634901" y="883593"/>
+            <a:ext cx="8102798" cy="1257002"/>
+          </a:xfrm>
+          <a:prstGeom prst="rect">
+            <a:avLst/>
+          </a:prstGeom>
+          <a:noFill/>
+          <a:ln/>
+        </p:spPr>
+        <p:txBody>
+          <a:bodyPr wrap="square" lIns="0" tIns="0" rIns="0" bIns="0" rtlCol="0" anchor="t"/>
+          <a:lstStyle/>
+          <a:p>
+            <a:pPr algn="l" marL="342900" indent="-342900">
+              <a:lnSpc>
+                <a:spcPts val="1620"/>
+              </a:lnSpc>
+              <a:spcAft>
+                <a:spcPts val="300"/>
+              </a:spcAft>
+              <a:buSzPct val="100000"/>
+              <a:buChar char="•"/>
+            </a:pPr>
+            <a:r>
+              <a:rPr lang="en-US" sz="1200" dirty="0">
+                <a:solidFill>
+                  <a:srgbClr val="1C2833"/>
+                </a:solidFill>
+                <a:latin typeface="Arial" pitchFamily="34" charset="0"/>
+                <a:ea typeface="Arial" pitchFamily="34" charset="-122"/>
+                <a:cs typeface="Arial" pitchFamily="34" charset="-120"/>
+              </a:rPr>
+              <a:t>Each pair picks ONE of the four Indic ideas they've studied:</a:t>
+            </a:r>
+            <a:endParaRPr lang="en-US" sz="1200" dirty="0"/>
+          </a:p>
+          <a:p>
+            <a:pPr algn="l" marL="342900" indent="-342900">
+              <a:lnSpc>
+                <a:spcPts val="1620"/>
+              </a:lnSpc>
+              <a:spcAft>
+                <a:spcPts val="300"/>
+              </a:spcAft>
+              <a:buSzPct val="100000"/>
+              <a:buChar char="•"/>
+            </a:pPr>
+            <a:r>
+              <a:rPr lang="en-US" sz="1200" i="1" dirty="0">
+                <a:solidFill>
+                  <a:srgbClr val="1C2833"/>
+                </a:solidFill>
+                <a:latin typeface="Arial" pitchFamily="34" charset="0"/>
+                <a:ea typeface="Arial" pitchFamily="34" charset="-122"/>
+                <a:cs typeface="Arial" pitchFamily="34" charset="-120"/>
+              </a:rPr>
+              <a:t>vasudhaiva kuṭumbakam</a:t>
+            </a:r>
+            <a:pPr algn="l" indent="0" marL="0">
+              <a:lnSpc>
+                <a:spcPts val="1620"/>
+              </a:lnSpc>
+              <a:spcAft>
+                <a:spcPts val="300"/>
+              </a:spcAft>
+              <a:buNone/>
+            </a:pPr>
+            <a:r>
+              <a:rPr lang="en-US" sz="1200" dirty="0">
+                <a:solidFill>
+                  <a:srgbClr val="1C2833"/>
+                </a:solidFill>
+                <a:latin typeface="Arial" pitchFamily="34" charset="0"/>
+                <a:ea typeface="Arial" pitchFamily="34" charset="-122"/>
+                <a:cs typeface="Arial" pitchFamily="34" charset="-120"/>
+              </a:rPr>
+              <a:t> (one family)</a:t>
+            </a:r>
+            <a:endParaRPr lang="en-US" sz="1200" dirty="0"/>
+          </a:p>
+          <a:p>
+            <a:pPr algn="l" marL="342900" indent="-342900">
+              <a:lnSpc>
+                <a:spcPts val="1620"/>
+              </a:lnSpc>
+              <a:spcAft>
+                <a:spcPts val="300"/>
+              </a:spcAft>
+              <a:buSzPct val="100000"/>
+              <a:buChar char="•"/>
+            </a:pPr>
+            <a:r>
+              <a:rPr lang="en-US" sz="1200" i="1" dirty="0">
+                <a:solidFill>
+                  <a:srgbClr val="1C2833"/>
+                </a:solidFill>
+                <a:latin typeface="Arial" pitchFamily="34" charset="0"/>
+                <a:ea typeface="Arial" pitchFamily="34" charset="-122"/>
+                <a:cs typeface="Arial" pitchFamily="34" charset="-120"/>
+              </a:rPr>
+              <a:t>yajña</a:t>
+            </a:r>
+            <a:pPr algn="l" indent="0" marL="0">
+              <a:lnSpc>
+                <a:spcPts val="1620"/>
+              </a:lnSpc>
+              <a:spcAft>
+                <a:spcPts val="300"/>
+              </a:spcAft>
+              <a:buNone/>
+            </a:pPr>
+            <a:r>
+              <a:rPr lang="en-US" sz="1200" dirty="0">
+                <a:solidFill>
+                  <a:srgbClr val="1C2833"/>
+                </a:solidFill>
+                <a:latin typeface="Arial" pitchFamily="34" charset="0"/>
+                <a:ea typeface="Arial" pitchFamily="34" charset="-122"/>
+                <a:cs typeface="Arial" pitchFamily="34" charset="-120"/>
+              </a:rPr>
+              <a:t> cycle (give back)</a:t>
+            </a:r>
+            <a:endParaRPr lang="en-US" sz="1200" dirty="0"/>
+          </a:p>
+          <a:p>
+            <a:pPr algn="l" marL="342900" indent="-342900">
+              <a:lnSpc>
+                <a:spcPts val="1620"/>
+              </a:lnSpc>
+              <a:spcAft>
+                <a:spcPts val="300"/>
+              </a:spcAft>
+              <a:buSzPct val="100000"/>
+              <a:buChar char="•"/>
+            </a:pPr>
+            <a:r>
+              <a:rPr lang="en-US" sz="1200" i="1" dirty="0">
+                <a:solidFill>
+                  <a:srgbClr val="1C2833"/>
+                </a:solidFill>
+                <a:latin typeface="Arial" pitchFamily="34" charset="0"/>
+                <a:ea typeface="Arial" pitchFamily="34" charset="-122"/>
+                <a:cs typeface="Arial" pitchFamily="34" charset="-120"/>
+              </a:rPr>
+              <a:t>Pṛthivī sūkta</a:t>
+            </a:r>
+            <a:pPr algn="l" indent="0" marL="0">
+              <a:lnSpc>
+                <a:spcPts val="1620"/>
+              </a:lnSpc>
+              <a:spcAft>
+                <a:spcPts val="300"/>
+              </a:spcAft>
+              <a:buNone/>
+            </a:pPr>
+            <a:r>
+              <a:rPr lang="en-US" sz="1200" dirty="0">
+                <a:solidFill>
+                  <a:srgbClr val="1C2833"/>
+                </a:solidFill>
+                <a:latin typeface="Arial" pitchFamily="34" charset="0"/>
+                <a:ea typeface="Arial" pitchFamily="34" charset="-122"/>
+                <a:cs typeface="Arial" pitchFamily="34" charset="-120"/>
+              </a:rPr>
+              <a:t> (Earth as mother)</a:t>
+            </a:r>
+            <a:endParaRPr lang="en-US" sz="1200" dirty="0"/>
+          </a:p>
+          <a:p>
+            <a:pPr algn="l" marL="342900" indent="-342900">
+              <a:lnSpc>
+                <a:spcPts val="1620"/>
+              </a:lnSpc>
+              <a:spcAft>
+                <a:spcPts val="300"/>
+              </a:spcAft>
+              <a:buSzPct val="100000"/>
+              <a:buChar char="•"/>
+            </a:pPr>
+            <a:r>
+              <a:rPr lang="en-US" sz="1200" i="1" dirty="0">
+                <a:solidFill>
+                  <a:srgbClr val="1C2833"/>
+                </a:solidFill>
+                <a:latin typeface="Arial" pitchFamily="34" charset="0"/>
+                <a:ea typeface="Arial" pitchFamily="34" charset="-122"/>
+                <a:cs typeface="Arial" pitchFamily="34" charset="-120"/>
+              </a:rPr>
+              <a:t>Iṣopaniṣad</a:t>
+            </a:r>
+            <a:pPr algn="l" indent="0" marL="0">
+              <a:lnSpc>
+                <a:spcPts val="1620"/>
+              </a:lnSpc>
+              <a:spcAft>
+                <a:spcPts val="300"/>
+              </a:spcAft>
+              <a:buNone/>
+            </a:pPr>
+            <a:r>
+              <a:rPr lang="en-US" sz="1200" dirty="0">
+                <a:solidFill>
+                  <a:srgbClr val="1C2833"/>
+                </a:solidFill>
+                <a:latin typeface="Arial" pitchFamily="34" charset="0"/>
+                <a:ea typeface="Arial" pitchFamily="34" charset="-122"/>
+                <a:cs typeface="Arial" pitchFamily="34" charset="-120"/>
+              </a:rPr>
+              <a:t> mantra (use, don't grab)</a:t>
+            </a:r>
+            <a:endParaRPr lang="en-US" sz="1200" dirty="0"/>
+          </a:p>
+        </p:txBody>
+      </p:sp>
+      <p:sp>
+        <p:nvSpPr>
+          <p:cNvPr id="5" name="Text 3"/>
+          <p:cNvSpPr/>
+          <p:nvPr/>
+        </p:nvSpPr>
+        <p:spPr>
+          <a:xfrm>
+            <a:off x="406301" y="4434929"/>
+            <a:ext cx="8498026" cy="213271"/>
+          </a:xfrm>
+          <a:prstGeom prst="rect">
+            <a:avLst/>
+          </a:prstGeom>
+          <a:noFill/>
+          <a:ln/>
+        </p:spPr>
+        <p:txBody>
+          <a:bodyPr wrap="square" lIns="0" tIns="0" rIns="0" bIns="0" rtlCol="0" anchor="t"/>
+          <a:lstStyle/>
+          <a:p>
+            <a:pPr algn="l" indent="0" marL="0">
+              <a:lnSpc>
+                <a:spcPts val="1680"/>
+              </a:lnSpc>
+              <a:spcBef>
+                <a:spcPts val="300"/>
+              </a:spcBef>
+              <a:spcAft>
+                <a:spcPts val="300"/>
+              </a:spcAft>
+              <a:buNone/>
+            </a:pPr>
+            <a:r>
+              <a:rPr lang="en-US" sz="1200" dirty="0">
+                <a:solidFill>
+                  <a:srgbClr val="1C2833"/>
+                </a:solidFill>
+                <a:latin typeface="Arial" pitchFamily="34" charset="0"/>
+                <a:ea typeface="Arial" pitchFamily="34" charset="-122"/>
+                <a:cs typeface="Arial" pitchFamily="34" charset="-120"/>
+              </a:rPr>
+              <a:t>Middle ·  · IKS Curriculum</a:t>
+            </a:r>
+            <a:endParaRPr lang="en-US" sz="1200" dirty="0"/>
+          </a:p>
+        </p:txBody>
+      </p:sp>
+    </p:spTree>
+  </p:cSld>
+  <p:clrMapOvr>
+    <a:masterClrMapping/>
+  </p:clrMapOvr>
+</p:sld>
+</file>
+
+<file path=ppt/slides/slide18.xml><?xml version="1.0" encoding="utf-8"?>
+<p:sld xmlns:a="http://schemas.openxmlformats.org/drawingml/2006/main" xmlns:r="http://schemas.openxmlformats.org/officeDocument/2006/relationships" xmlns:p="http://schemas.openxmlformats.org/presentationml/2006/main">
+  <p:cSld name="Slide 18">
+    <p:bg>
+      <p:bgPr>
+        <a:solidFill>
+          <a:srgbClr val="FFFFFF"/>
+        </a:solidFill>
+      </p:bgPr>
+    </p:bg>
+    <p:spTree>
+      <p:nvGrpSpPr>
+        <p:cNvPr id="1" name=""/>
+        <p:cNvGrpSpPr/>
+        <p:nvPr/>
+      </p:nvGrpSpPr>
+      <p:grpSpPr>
+        <a:xfrm>
+          <a:off x="0" y="0"/>
+          <a:ext cx="0" cy="0"/>
+          <a:chOff x="0" y="0"/>
+          <a:chExt cx="0" cy="0"/>
+        </a:xfrm>
+      </p:grpSpPr>
+      <p:sp>
+        <p:nvSpPr>
+          <p:cNvPr id="2" name="Text 0"/>
+          <p:cNvSpPr/>
+          <p:nvPr/>
+        </p:nvSpPr>
+        <p:spPr>
+          <a:xfrm>
+            <a:off x="0" y="0"/>
+            <a:ext cx="9144000" cy="101501"/>
+          </a:xfrm>
+          <a:prstGeom prst="rect">
+            <a:avLst/>
+          </a:prstGeom>
+          <a:solidFill>
+            <a:srgbClr val="277884"/>
+          </a:solidFill>
+          <a:ln/>
+        </p:spPr>
+        <p:txBody>
+          <a:bodyPr wrap="square" rtlCol="0" anchor="ctr"/>
+          <a:lstStyle/>
+          <a:p>
+            <a:pPr indent="0" marL="0">
+              <a:buNone/>
+            </a:pPr>
+            <a:endParaRPr lang="en-US" dirty="0"/>
+          </a:p>
+        </p:txBody>
+      </p:sp>
+      <p:sp>
+        <p:nvSpPr>
+          <p:cNvPr id="3" name="Text 1"/>
+          <p:cNvSpPr/>
+          <p:nvPr/>
+        </p:nvSpPr>
+        <p:spPr>
+          <a:xfrm>
+            <a:off x="406301" y="457051"/>
+            <a:ext cx="8498026" cy="274290"/>
+          </a:xfrm>
+          <a:prstGeom prst="rect">
+            <a:avLst/>
+          </a:prstGeom>
+          <a:noFill/>
+          <a:ln/>
+        </p:spPr>
+        <p:txBody>
+          <a:bodyPr wrap="square" lIns="0" tIns="0" rIns="0" bIns="0" rtlCol="0" anchor="t"/>
+          <a:lstStyle/>
+          <a:p>
+            <a:pPr algn="l" indent="0" marL="0">
+              <a:lnSpc>
+                <a:spcPts val="2160"/>
+              </a:lnSpc>
+              <a:spcBef>
+                <a:spcPts val="600"/>
+              </a:spcBef>
+              <a:spcAft>
+                <a:spcPts val="800"/>
+              </a:spcAft>
+              <a:buNone/>
+            </a:pPr>
+            <a:r>
+              <a:rPr lang="en-US" sz="1800" b="1" dirty="0">
+                <a:solidFill>
+                  <a:srgbClr val="FE4447"/>
+                </a:solidFill>
+                <a:latin typeface="Georgia" pitchFamily="34" charset="0"/>
+                <a:ea typeface="Georgia" pitchFamily="34" charset="-122"/>
+                <a:cs typeface="Georgia" pitchFamily="34" charset="-120"/>
+              </a:rPr>
+              <a:t>Activity (10 min) — Pair brainstorm: pitch the principle (cont.)</a:t>
+            </a:r>
+            <a:endParaRPr lang="en-US" sz="1800" dirty="0"/>
+          </a:p>
+        </p:txBody>
+      </p:sp>
+      <p:sp>
+        <p:nvSpPr>
+          <p:cNvPr id="4" name="Text 2"/>
+          <p:cNvSpPr/>
+          <p:nvPr/>
+        </p:nvSpPr>
+        <p:spPr>
+          <a:xfrm>
+            <a:off x="634901" y="883593"/>
+            <a:ext cx="8102798" cy="281880"/>
+          </a:xfrm>
+          <a:prstGeom prst="rect">
+            <a:avLst/>
+          </a:prstGeom>
+          <a:noFill/>
+          <a:ln/>
+        </p:spPr>
+        <p:txBody>
+          <a:bodyPr wrap="square" lIns="0" tIns="0" rIns="0" bIns="0" rtlCol="0" anchor="t"/>
+          <a:lstStyle/>
+          <a:p>
+            <a:pPr algn="l" marL="342900" indent="-342900">
+              <a:lnSpc>
+                <a:spcPts val="1620"/>
+              </a:lnSpc>
+              <a:spcAft>
+                <a:spcPts val="300"/>
+              </a:spcAft>
+              <a:buSzPct val="100000"/>
+              <a:buChar char="•"/>
+            </a:pPr>
+            <a:r>
+              <a:rPr lang="en-US" sz="1200" dirty="0">
+                <a:solidFill>
+                  <a:srgbClr val="1C2833"/>
+                </a:solidFill>
+                <a:latin typeface="Arial" pitchFamily="34" charset="0"/>
+                <a:ea typeface="Arial" pitchFamily="34" charset="-122"/>
+                <a:cs typeface="Arial" pitchFamily="34" charset="-120"/>
+              </a:rPr>
+              <a:t>They write 3 sentences: </a:t>
+            </a:r>
+            <a:pPr algn="l" indent="0" marL="0">
+              <a:lnSpc>
+                <a:spcPts val="1620"/>
+              </a:lnSpc>
+              <a:spcAft>
+                <a:spcPts val="300"/>
+              </a:spcAft>
+              <a:buNone/>
+            </a:pPr>
+            <a:r>
+              <a:rPr lang="en-US" sz="1200" i="1" dirty="0">
+                <a:solidFill>
+                  <a:srgbClr val="1C2833"/>
+                </a:solidFill>
+                <a:latin typeface="Arial" pitchFamily="34" charset="0"/>
+                <a:ea typeface="Arial" pitchFamily="34" charset="-122"/>
+                <a:cs typeface="Arial" pitchFamily="34" charset="-120"/>
+              </a:rPr>
+              <a:t>"How does this idea help us think about climate change? What does it NOT solve?"</a:t>
+            </a:r>
+            <a:endParaRPr lang="en-US" sz="1200" dirty="0"/>
+          </a:p>
+        </p:txBody>
+      </p:sp>
+      <p:sp>
+        <p:nvSpPr>
+          <p:cNvPr id="5" name="Text 3"/>
+          <p:cNvSpPr/>
+          <p:nvPr/>
+        </p:nvSpPr>
+        <p:spPr>
+          <a:xfrm>
+            <a:off x="634901" y="1266974"/>
+            <a:ext cx="8102798" cy="487561"/>
+          </a:xfrm>
+          <a:prstGeom prst="rect">
+            <a:avLst/>
+          </a:prstGeom>
+          <a:noFill/>
+          <a:ln/>
+        </p:spPr>
+        <p:txBody>
+          <a:bodyPr wrap="square" lIns="0" tIns="0" rIns="0" bIns="0" rtlCol="0" anchor="t"/>
+          <a:lstStyle/>
+          <a:p>
+            <a:pPr algn="l" marL="342900" indent="-342900">
+              <a:lnSpc>
+                <a:spcPts val="1620"/>
+              </a:lnSpc>
+              <a:spcAft>
+                <a:spcPts val="300"/>
+              </a:spcAft>
+              <a:buSzPct val="100000"/>
+              <a:buChar char="•"/>
+            </a:pPr>
+            <a:r>
+              <a:rPr lang="en-US" sz="1200" dirty="0">
+                <a:solidFill>
+                  <a:srgbClr val="1C2833"/>
+                </a:solidFill>
+                <a:latin typeface="Arial" pitchFamily="34" charset="0"/>
+                <a:ea typeface="Arial" pitchFamily="34" charset="-122"/>
+                <a:cs typeface="Arial" pitchFamily="34" charset="-120"/>
+              </a:rPr>
+              <a:t>This is the precursor to the project pitch on Day 10. Pairs should pick whichever principle they want to anchor their project around.</a:t>
+            </a:r>
+            <a:endParaRPr lang="en-US" sz="1200" dirty="0"/>
+          </a:p>
+        </p:txBody>
+      </p:sp>
+      <p:sp>
+        <p:nvSpPr>
+          <p:cNvPr id="6" name="Text 4"/>
+          <p:cNvSpPr/>
+          <p:nvPr/>
+        </p:nvSpPr>
+        <p:spPr>
+          <a:xfrm>
+            <a:off x="406301" y="4434929"/>
+            <a:ext cx="8498026" cy="213271"/>
+          </a:xfrm>
+          <a:prstGeom prst="rect">
+            <a:avLst/>
+          </a:prstGeom>
+          <a:noFill/>
+          <a:ln/>
+        </p:spPr>
+        <p:txBody>
+          <a:bodyPr wrap="square" lIns="0" tIns="0" rIns="0" bIns="0" rtlCol="0" anchor="t"/>
+          <a:lstStyle/>
+          <a:p>
+            <a:pPr algn="l" indent="0" marL="0">
+              <a:lnSpc>
+                <a:spcPts val="1680"/>
+              </a:lnSpc>
+              <a:spcBef>
+                <a:spcPts val="300"/>
+              </a:spcBef>
+              <a:spcAft>
+                <a:spcPts val="300"/>
+              </a:spcAft>
+              <a:buNone/>
+            </a:pPr>
+            <a:r>
+              <a:rPr lang="en-US" sz="1200" dirty="0">
+                <a:solidFill>
+                  <a:srgbClr val="1C2833"/>
+                </a:solidFill>
+                <a:latin typeface="Arial" pitchFamily="34" charset="0"/>
+                <a:ea typeface="Arial" pitchFamily="34" charset="-122"/>
+                <a:cs typeface="Arial" pitchFamily="34" charset="-120"/>
+              </a:rPr>
+              <a:t>Middle ·  · IKS Curriculum</a:t>
+            </a:r>
+            <a:endParaRPr lang="en-US" sz="1200" dirty="0"/>
+          </a:p>
+        </p:txBody>
+      </p:sp>
+    </p:spTree>
+  </p:cSld>
+  <p:clrMapOvr>
+    <a:masterClrMapping/>
+  </p:clrMapOvr>
+</p:sld>
+</file>
+
+<file path=ppt/slides/slide19.xml><?xml version="1.0" encoding="utf-8"?>
+<p:sld xmlns:a="http://schemas.openxmlformats.org/drawingml/2006/main" xmlns:r="http://schemas.openxmlformats.org/officeDocument/2006/relationships" xmlns:p="http://schemas.openxmlformats.org/presentationml/2006/main">
+  <p:cSld name="Slide 19">
+    <p:bg>
+      <p:bgPr>
+        <a:solidFill>
+          <a:srgbClr val="FFFFFF"/>
+        </a:solidFill>
+      </p:bgPr>
+    </p:bg>
+    <p:spTree>
+      <p:nvGrpSpPr>
+        <p:cNvPr id="1" name=""/>
+        <p:cNvGrpSpPr/>
+        <p:nvPr/>
+      </p:nvGrpSpPr>
+      <p:grpSpPr>
+        <a:xfrm>
+          <a:off x="0" y="0"/>
+          <a:ext cx="0" cy="0"/>
+          <a:chOff x="0" y="0"/>
+          <a:chExt cx="0" cy="0"/>
+        </a:xfrm>
+      </p:grpSpPr>
+      <p:sp>
+        <p:nvSpPr>
+          <p:cNvPr id="2" name="Text 0"/>
+          <p:cNvSpPr/>
+          <p:nvPr/>
+        </p:nvSpPr>
+        <p:spPr>
+          <a:xfrm>
+            <a:off x="0" y="0"/>
+            <a:ext cx="9144000" cy="101501"/>
+          </a:xfrm>
+          <a:prstGeom prst="rect">
+            <a:avLst/>
+          </a:prstGeom>
+          <a:solidFill>
+            <a:srgbClr val="277884"/>
+          </a:solidFill>
+          <a:ln/>
+        </p:spPr>
+        <p:txBody>
+          <a:bodyPr wrap="square" rtlCol="0" anchor="ctr"/>
+          <a:lstStyle/>
+          <a:p>
+            <a:pPr indent="0" marL="0">
+              <a:buNone/>
+            </a:pPr>
+            <a:endParaRPr lang="en-US" dirty="0"/>
+          </a:p>
+        </p:txBody>
+      </p:sp>
+      <p:sp>
+        <p:nvSpPr>
+          <p:cNvPr id="3" name="Text 1"/>
+          <p:cNvSpPr/>
+          <p:nvPr/>
+        </p:nvSpPr>
+        <p:spPr>
+          <a:xfrm>
+            <a:off x="406301" y="457051"/>
+            <a:ext cx="8498026" cy="274290"/>
+          </a:xfrm>
+          <a:prstGeom prst="rect">
+            <a:avLst/>
+          </a:prstGeom>
+          <a:noFill/>
+          <a:ln/>
+        </p:spPr>
+        <p:txBody>
+          <a:bodyPr wrap="square" lIns="0" tIns="0" rIns="0" bIns="0" rtlCol="0" anchor="t"/>
+          <a:lstStyle/>
+          <a:p>
+            <a:pPr algn="l" indent="0" marL="0">
+              <a:lnSpc>
+                <a:spcPts val="2160"/>
+              </a:lnSpc>
+              <a:spcBef>
+                <a:spcPts val="600"/>
+              </a:spcBef>
+              <a:spcAft>
+                <a:spcPts val="800"/>
+              </a:spcAft>
+              <a:buNone/>
+            </a:pPr>
+            <a:r>
+              <a:rPr lang="en-US" sz="1800" b="1" dirty="0">
+                <a:solidFill>
+                  <a:srgbClr val="FE4447"/>
+                </a:solidFill>
+                <a:latin typeface="Georgia" pitchFamily="34" charset="0"/>
+                <a:ea typeface="Georgia" pitchFamily="34" charset="-122"/>
+                <a:cs typeface="Georgia" pitchFamily="34" charset="-120"/>
+              </a:rPr>
+              <a:t>Wrap-up (5 min)</a:t>
+            </a:r>
+            <a:endParaRPr lang="en-US" sz="1800" dirty="0"/>
+          </a:p>
+        </p:txBody>
+      </p:sp>
+      <p:sp>
+        <p:nvSpPr>
+          <p:cNvPr id="4" name="Text 2"/>
+          <p:cNvSpPr/>
+          <p:nvPr/>
+        </p:nvSpPr>
+        <p:spPr>
+          <a:xfrm>
+            <a:off x="634901" y="883593"/>
+            <a:ext cx="8102798" cy="1013222"/>
+          </a:xfrm>
+          <a:prstGeom prst="rect">
+            <a:avLst/>
+          </a:prstGeom>
+          <a:noFill/>
+          <a:ln/>
+        </p:spPr>
+        <p:txBody>
+          <a:bodyPr wrap="square" lIns="0" tIns="0" rIns="0" bIns="0" rtlCol="0" anchor="t"/>
+          <a:lstStyle/>
+          <a:p>
+            <a:pPr algn="l" marL="342900" indent="-342900">
+              <a:lnSpc>
+                <a:spcPts val="1620"/>
+              </a:lnSpc>
+              <a:spcAft>
+                <a:spcPts val="300"/>
+              </a:spcAft>
+              <a:buSzPct val="100000"/>
+              <a:buChar char="•"/>
+            </a:pPr>
+            <a:r>
+              <a:rPr lang="en-US" sz="1200" b="1" dirty="0">
+                <a:solidFill>
+                  <a:srgbClr val="1C2833"/>
+                </a:solidFill>
+                <a:latin typeface="Arial" pitchFamily="34" charset="0"/>
+                <a:ea typeface="Arial" pitchFamily="34" charset="-122"/>
+                <a:cs typeface="Arial" pitchFamily="34" charset="-120"/>
+              </a:rPr>
+              <a:t>Project plan due tomorrow (Day 9 morning).</a:t>
+            </a:r>
+            <a:pPr algn="l" indent="0" marL="0">
+              <a:lnSpc>
+                <a:spcPts val="1620"/>
+              </a:lnSpc>
+              <a:spcAft>
+                <a:spcPts val="300"/>
+              </a:spcAft>
+              <a:buNone/>
+            </a:pPr>
+            <a:r>
+              <a:rPr lang="en-US" sz="1200" dirty="0">
+                <a:solidFill>
+                  <a:srgbClr val="1C2833"/>
+                </a:solidFill>
+                <a:latin typeface="Arial" pitchFamily="34" charset="0"/>
+                <a:ea typeface="Arial" pitchFamily="34" charset="-122"/>
+                <a:cs typeface="Arial" pitchFamily="34" charset="-120"/>
+              </a:rPr>
+              <a:t> Each pair must submit a paragraph stating:</a:t>
+            </a:r>
+            <a:endParaRPr lang="en-US" sz="1200" dirty="0"/>
+          </a:p>
+          <a:p>
+            <a:pPr algn="l" marL="342900" indent="-342900">
+              <a:lnSpc>
+                <a:spcPts val="1620"/>
+              </a:lnSpc>
+              <a:spcAft>
+                <a:spcPts val="300"/>
+              </a:spcAft>
+              <a:buSzPct val="100000"/>
+              <a:buChar char="•"/>
+            </a:pPr>
+            <a:r>
+              <a:rPr lang="en-US" sz="1200" dirty="0">
+                <a:solidFill>
+                  <a:srgbClr val="1C2833"/>
+                </a:solidFill>
+                <a:latin typeface="Arial" pitchFamily="34" charset="0"/>
+                <a:ea typeface="Arial" pitchFamily="34" charset="-122"/>
+                <a:cs typeface="Arial" pitchFamily="34" charset="-120"/>
+              </a:rPr>
+              <a:t>Which Indic principle they will anchor on.</a:t>
+            </a:r>
+            <a:endParaRPr lang="en-US" sz="1200" dirty="0"/>
+          </a:p>
+          <a:p>
+            <a:pPr algn="l" marL="342900" indent="-342900">
+              <a:lnSpc>
+                <a:spcPts val="1620"/>
+              </a:lnSpc>
+              <a:spcAft>
+                <a:spcPts val="300"/>
+              </a:spcAft>
+              <a:buSzPct val="100000"/>
+              <a:buChar char="•"/>
+            </a:pPr>
+            <a:r>
+              <a:rPr lang="en-US" sz="1200" dirty="0">
+                <a:solidFill>
+                  <a:srgbClr val="1C2833"/>
+                </a:solidFill>
+                <a:latin typeface="Arial" pitchFamily="34" charset="0"/>
+                <a:ea typeface="Arial" pitchFamily="34" charset="-122"/>
+                <a:cs typeface="Arial" pitchFamily="34" charset="-120"/>
+              </a:rPr>
+              <a:t>What local observation they will make on Day 9's walk.</a:t>
+            </a:r>
+            <a:endParaRPr lang="en-US" sz="1200" dirty="0"/>
+          </a:p>
+          <a:p>
+            <a:pPr algn="l" marL="342900" indent="-342900">
+              <a:lnSpc>
+                <a:spcPts val="1620"/>
+              </a:lnSpc>
+              <a:spcAft>
+                <a:spcPts val="300"/>
+              </a:spcAft>
+              <a:buSzPct val="100000"/>
+              <a:buChar char="•"/>
+            </a:pPr>
+            <a:r>
+              <a:rPr lang="en-US" sz="1200" dirty="0">
+                <a:solidFill>
+                  <a:srgbClr val="1C2833"/>
+                </a:solidFill>
+                <a:latin typeface="Arial" pitchFamily="34" charset="0"/>
+                <a:ea typeface="Arial" pitchFamily="34" charset="-122"/>
+                <a:cs typeface="Arial" pitchFamily="34" charset="-120"/>
+              </a:rPr>
+              <a:t>What format (poster / audio / action plan) their pitch will take.</a:t>
+            </a:r>
+            <a:endParaRPr lang="en-US" sz="1200" dirty="0"/>
+          </a:p>
+        </p:txBody>
+      </p:sp>
+      <p:sp>
+        <p:nvSpPr>
+          <p:cNvPr id="5" name="Text 3"/>
+          <p:cNvSpPr/>
+          <p:nvPr/>
+        </p:nvSpPr>
+        <p:spPr>
+          <a:xfrm>
+            <a:off x="634901" y="1998315"/>
+            <a:ext cx="8102798" cy="487561"/>
+          </a:xfrm>
+          <a:prstGeom prst="rect">
+            <a:avLst/>
+          </a:prstGeom>
+          <a:noFill/>
+          <a:ln/>
+        </p:spPr>
+        <p:txBody>
+          <a:bodyPr wrap="square" lIns="0" tIns="0" rIns="0" bIns="0" rtlCol="0" anchor="t"/>
+          <a:lstStyle/>
+          <a:p>
+            <a:pPr algn="l" marL="342900" indent="-342900">
+              <a:lnSpc>
+                <a:spcPts val="1620"/>
+              </a:lnSpc>
+              <a:spcAft>
+                <a:spcPts val="300"/>
+              </a:spcAft>
+              <a:buSzPct val="100000"/>
+              <a:buChar char="•"/>
+            </a:pPr>
+            <a:r>
+              <a:rPr lang="en-US" sz="1200" dirty="0">
+                <a:solidFill>
+                  <a:srgbClr val="1C2833"/>
+                </a:solidFill>
+                <a:latin typeface="Arial" pitchFamily="34" charset="0"/>
+                <a:ea typeface="Arial" pitchFamily="34" charset="-122"/>
+                <a:cs typeface="Arial" pitchFamily="34" charset="-120"/>
+              </a:rPr>
+              <a:t>One-sentence exit ticket: </a:t>
+            </a:r>
+            <a:pPr algn="l" indent="0" marL="0">
+              <a:lnSpc>
+                <a:spcPts val="1620"/>
+              </a:lnSpc>
+              <a:spcAft>
+                <a:spcPts val="300"/>
+              </a:spcAft>
+              <a:buNone/>
+            </a:pPr>
+            <a:r>
+              <a:rPr lang="en-US" sz="1200" i="1" dirty="0">
+                <a:solidFill>
+                  <a:srgbClr val="1C2833"/>
+                </a:solidFill>
+                <a:latin typeface="Arial" pitchFamily="34" charset="0"/>
+                <a:ea typeface="Arial" pitchFamily="34" charset="-122"/>
+                <a:cs typeface="Arial" pitchFamily="34" charset="-120"/>
+              </a:rPr>
+              <a:t>"The hardest thing about taking climate change seriously is _______."</a:t>
+            </a:r>
+            <a:pPr algn="l" indent="0" marL="0">
+              <a:lnSpc>
+                <a:spcPts val="1620"/>
+              </a:lnSpc>
+              <a:spcAft>
+                <a:spcPts val="300"/>
+              </a:spcAft>
+              <a:buNone/>
+            </a:pPr>
+            <a:r>
+              <a:rPr lang="en-US" sz="1200" dirty="0">
+                <a:solidFill>
+                  <a:srgbClr val="1C2833"/>
+                </a:solidFill>
+                <a:latin typeface="Arial" pitchFamily="34" charset="0"/>
+                <a:ea typeface="Arial" pitchFamily="34" charset="-122"/>
+                <a:cs typeface="Arial" pitchFamily="34" charset="-120"/>
+              </a:rPr>
+              <a:t> (Honest answers welcome.)</a:t>
             </a:r>
             <a:endParaRPr lang="en-US" sz="1200" dirty="0"/>
           </a:p>
@@ -3001,7 +6843,7 @@
                 <a:ea typeface="Georgia" pitchFamily="34" charset="-122"/>
                 <a:cs typeface="Georgia" pitchFamily="34" charset="-120"/>
               </a:rPr>
-              <a:t>Materials</a:t>
+              <a:t>Learning objective</a:t>
             </a:r>
             <a:endParaRPr lang="en-US" sz="1800" dirty="0"/>
           </a:p>
@@ -3016,7 +6858,7 @@
         <p:spPr>
           <a:xfrm>
             <a:off x="406301" y="870942"/>
-            <a:ext cx="8498026" cy="639812"/>
+            <a:ext cx="8498026" cy="426541"/>
           </a:xfrm>
           <a:prstGeom prst="rect">
             <a:avLst/>
@@ -3049,7 +6891,99 @@
                 <a:ea typeface="Arial" pitchFamily="34" charset="-122"/>
                 <a:cs typeface="Arial" pitchFamily="34" charset="-120"/>
               </a:rPr>
-              <a:t>– Whiteboard – A simple graph (printed or projected): global average temperature since 1850 (the "hockey stick"). Source: IPCC AR6 Working Group I. – Optional: a 2-minute video clip from the IPCC's outreach material or a reliable news source on a recent extreme-weather event – Notebook</a:t>
+              <a:t>Students explain — in their own words — what climate change is, name three observable effects, distinguish </a:t>
+            </a:r>
+            <a:pPr algn="l" indent="0" marL="0">
+              <a:lnSpc>
+                <a:spcPts val="1680"/>
+              </a:lnSpc>
+              <a:spcBef>
+                <a:spcPts val="300"/>
+              </a:spcBef>
+              <a:spcAft>
+                <a:spcPts val="300"/>
+              </a:spcAft>
+              <a:buNone/>
+            </a:pPr>
+            <a:r>
+              <a:rPr lang="en-US" sz="1200" i="1" dirty="0">
+                <a:solidFill>
+                  <a:srgbClr val="1C2833"/>
+                </a:solidFill>
+                <a:latin typeface="Arial" pitchFamily="34" charset="0"/>
+                <a:ea typeface="Arial" pitchFamily="34" charset="-122"/>
+                <a:cs typeface="Arial" pitchFamily="34" charset="-120"/>
+              </a:rPr>
+              <a:t>climate</a:t>
+            </a:r>
+            <a:pPr algn="l" indent="0" marL="0">
+              <a:lnSpc>
+                <a:spcPts val="1680"/>
+              </a:lnSpc>
+              <a:spcBef>
+                <a:spcPts val="300"/>
+              </a:spcBef>
+              <a:spcAft>
+                <a:spcPts val="300"/>
+              </a:spcAft>
+              <a:buNone/>
+            </a:pPr>
+            <a:r>
+              <a:rPr lang="en-US" sz="1200" dirty="0">
+                <a:solidFill>
+                  <a:srgbClr val="1C2833"/>
+                </a:solidFill>
+                <a:latin typeface="Arial" pitchFamily="34" charset="0"/>
+                <a:ea typeface="Arial" pitchFamily="34" charset="-122"/>
+                <a:cs typeface="Arial" pitchFamily="34" charset="-120"/>
+              </a:rPr>
+              <a:t> from </a:t>
+            </a:r>
+            <a:pPr algn="l" indent="0" marL="0">
+              <a:lnSpc>
+                <a:spcPts val="1680"/>
+              </a:lnSpc>
+              <a:spcBef>
+                <a:spcPts val="300"/>
+              </a:spcBef>
+              <a:spcAft>
+                <a:spcPts val="300"/>
+              </a:spcAft>
+              <a:buNone/>
+            </a:pPr>
+            <a:r>
+              <a:rPr lang="en-US" sz="1200" i="1" dirty="0">
+                <a:solidFill>
+                  <a:srgbClr val="1C2833"/>
+                </a:solidFill>
+                <a:latin typeface="Arial" pitchFamily="34" charset="0"/>
+                <a:ea typeface="Arial" pitchFamily="34" charset="-122"/>
+                <a:cs typeface="Arial" pitchFamily="34" charset="-120"/>
+              </a:rPr>
+              <a:t>weather</a:t>
+            </a:r>
+            <a:pPr algn="l" indent="0" marL="0">
+              <a:lnSpc>
+                <a:spcPts val="1680"/>
+              </a:lnSpc>
+              <a:spcBef>
+                <a:spcPts val="300"/>
+              </a:spcBef>
+              <a:spcAft>
+                <a:spcPts val="300"/>
+              </a:spcAft>
+              <a:buNone/>
+            </a:pPr>
+            <a:r>
+              <a:rPr lang="en-US" sz="1200" dirty="0">
+                <a:solidFill>
+                  <a:srgbClr val="1C2833"/>
+                </a:solidFill>
+                <a:latin typeface="Arial" pitchFamily="34" charset="0"/>
+                <a:ea typeface="Arial" pitchFamily="34" charset="-122"/>
+                <a:cs typeface="Arial" pitchFamily="34" charset="-120"/>
+              </a:rPr>
+              <a:t>, and articulate what the Indic frameworks they've studied can (and cannot) add to a modern response.</a:t>
             </a:r>
             <a:endParaRPr lang="en-US" sz="1200" dirty="0"/>
           </a:p>
@@ -3058,6 +6992,1444 @@
       <p:sp>
         <p:nvSpPr>
           <p:cNvPr id="5" name="Text 3"/>
+          <p:cNvSpPr/>
+          <p:nvPr/>
+        </p:nvSpPr>
+        <p:spPr>
+          <a:xfrm>
+            <a:off x="406301" y="4434929"/>
+            <a:ext cx="8498026" cy="213271"/>
+          </a:xfrm>
+          <a:prstGeom prst="rect">
+            <a:avLst/>
+          </a:prstGeom>
+          <a:noFill/>
+          <a:ln/>
+        </p:spPr>
+        <p:txBody>
+          <a:bodyPr wrap="square" lIns="0" tIns="0" rIns="0" bIns="0" rtlCol="0" anchor="t"/>
+          <a:lstStyle/>
+          <a:p>
+            <a:pPr algn="l" indent="0" marL="0">
+              <a:lnSpc>
+                <a:spcPts val="1680"/>
+              </a:lnSpc>
+              <a:spcBef>
+                <a:spcPts val="300"/>
+              </a:spcBef>
+              <a:spcAft>
+                <a:spcPts val="300"/>
+              </a:spcAft>
+              <a:buNone/>
+            </a:pPr>
+            <a:r>
+              <a:rPr lang="en-US" sz="1200" dirty="0">
+                <a:solidFill>
+                  <a:srgbClr val="1C2833"/>
+                </a:solidFill>
+                <a:latin typeface="Arial" pitchFamily="34" charset="0"/>
+                <a:ea typeface="Arial" pitchFamily="34" charset="-122"/>
+                <a:cs typeface="Arial" pitchFamily="34" charset="-120"/>
+              </a:rPr>
+              <a:t>Middle ·  · IKS Curriculum</a:t>
+            </a:r>
+            <a:endParaRPr lang="en-US" sz="1200" dirty="0"/>
+          </a:p>
+        </p:txBody>
+      </p:sp>
+    </p:spTree>
+  </p:cSld>
+  <p:clrMapOvr>
+    <a:masterClrMapping/>
+  </p:clrMapOvr>
+</p:sld>
+</file>
+
+<file path=ppt/slides/slide20.xml><?xml version="1.0" encoding="utf-8"?>
+<p:sld xmlns:a="http://schemas.openxmlformats.org/drawingml/2006/main" xmlns:r="http://schemas.openxmlformats.org/officeDocument/2006/relationships" xmlns:p="http://schemas.openxmlformats.org/presentationml/2006/main">
+  <p:cSld name="Slide 20">
+    <p:bg>
+      <p:bgPr>
+        <a:solidFill>
+          <a:srgbClr val="FFFFFF"/>
+        </a:solidFill>
+      </p:bgPr>
+    </p:bg>
+    <p:spTree>
+      <p:nvGrpSpPr>
+        <p:cNvPr id="1" name=""/>
+        <p:cNvGrpSpPr/>
+        <p:nvPr/>
+      </p:nvGrpSpPr>
+      <p:grpSpPr>
+        <a:xfrm>
+          <a:off x="0" y="0"/>
+          <a:ext cx="0" cy="0"/>
+          <a:chOff x="0" y="0"/>
+          <a:chExt cx="0" cy="0"/>
+        </a:xfrm>
+      </p:grpSpPr>
+      <p:sp>
+        <p:nvSpPr>
+          <p:cNvPr id="2" name="Text 0"/>
+          <p:cNvSpPr/>
+          <p:nvPr/>
+        </p:nvSpPr>
+        <p:spPr>
+          <a:xfrm>
+            <a:off x="0" y="0"/>
+            <a:ext cx="9144000" cy="101501"/>
+          </a:xfrm>
+          <a:prstGeom prst="rect">
+            <a:avLst/>
+          </a:prstGeom>
+          <a:solidFill>
+            <a:srgbClr val="277884"/>
+          </a:solidFill>
+          <a:ln/>
+        </p:spPr>
+        <p:txBody>
+          <a:bodyPr wrap="square" rtlCol="0" anchor="ctr"/>
+          <a:lstStyle/>
+          <a:p>
+            <a:pPr indent="0" marL="0">
+              <a:buNone/>
+            </a:pPr>
+            <a:endParaRPr lang="en-US" dirty="0"/>
+          </a:p>
+        </p:txBody>
+      </p:sp>
+      <p:sp>
+        <p:nvSpPr>
+          <p:cNvPr id="3" name="Text 1"/>
+          <p:cNvSpPr/>
+          <p:nvPr/>
+        </p:nvSpPr>
+        <p:spPr>
+          <a:xfrm>
+            <a:off x="406301" y="457051"/>
+            <a:ext cx="8498026" cy="274290"/>
+          </a:xfrm>
+          <a:prstGeom prst="rect">
+            <a:avLst/>
+          </a:prstGeom>
+          <a:noFill/>
+          <a:ln/>
+        </p:spPr>
+        <p:txBody>
+          <a:bodyPr wrap="square" lIns="0" tIns="0" rIns="0" bIns="0" rtlCol="0" anchor="t"/>
+          <a:lstStyle/>
+          <a:p>
+            <a:pPr algn="l" indent="0" marL="0">
+              <a:lnSpc>
+                <a:spcPts val="2160"/>
+              </a:lnSpc>
+              <a:spcBef>
+                <a:spcPts val="600"/>
+              </a:spcBef>
+              <a:spcAft>
+                <a:spcPts val="800"/>
+              </a:spcAft>
+              <a:buNone/>
+            </a:pPr>
+            <a:r>
+              <a:rPr lang="en-US" sz="1800" b="1" dirty="0">
+                <a:solidFill>
+                  <a:srgbClr val="FE4447"/>
+                </a:solidFill>
+                <a:latin typeface="Georgia" pitchFamily="34" charset="0"/>
+                <a:ea typeface="Georgia" pitchFamily="34" charset="-122"/>
+                <a:cs typeface="Georgia" pitchFamily="34" charset="-120"/>
+              </a:rPr>
+              <a:t>Homework</a:t>
+            </a:r>
+            <a:endParaRPr lang="en-US" sz="1800" dirty="0"/>
+          </a:p>
+        </p:txBody>
+      </p:sp>
+      <p:sp>
+        <p:nvSpPr>
+          <p:cNvPr id="4" name="Text 2"/>
+          <p:cNvSpPr/>
+          <p:nvPr/>
+        </p:nvSpPr>
+        <p:spPr>
+          <a:xfrm>
+            <a:off x="634901" y="883593"/>
+            <a:ext cx="8102798" cy="750391"/>
+          </a:xfrm>
+          <a:prstGeom prst="rect">
+            <a:avLst/>
+          </a:prstGeom>
+          <a:noFill/>
+          <a:ln/>
+        </p:spPr>
+        <p:txBody>
+          <a:bodyPr wrap="square" lIns="0" tIns="0" rIns="0" bIns="0" rtlCol="0" anchor="t"/>
+          <a:lstStyle/>
+          <a:p>
+            <a:pPr algn="l" marL="342900" indent="-342900">
+              <a:lnSpc>
+                <a:spcPts val="1620"/>
+              </a:lnSpc>
+              <a:spcAft>
+                <a:spcPts val="300"/>
+              </a:spcAft>
+              <a:buSzPct val="100000"/>
+              <a:buChar char="•"/>
+            </a:pPr>
+            <a:r>
+              <a:rPr lang="en-US" sz="1200" b="1" dirty="0">
+                <a:solidFill>
+                  <a:srgbClr val="1C2833"/>
+                </a:solidFill>
+                <a:latin typeface="Arial" pitchFamily="34" charset="0"/>
+                <a:ea typeface="Arial" pitchFamily="34" charset="-122"/>
+                <a:cs typeface="Arial" pitchFamily="34" charset="-120"/>
+              </a:rPr>
+              <a:t>Project plan paragraph due tomorrow morning.</a:t>
+            </a:r>
+            <a:pPr algn="l" indent="0" marL="0">
+              <a:lnSpc>
+                <a:spcPts val="1620"/>
+              </a:lnSpc>
+              <a:spcAft>
+                <a:spcPts val="300"/>
+              </a:spcAft>
+              <a:buNone/>
+            </a:pPr>
+            <a:r>
+              <a:rPr lang="en-US" sz="1200" dirty="0">
+                <a:solidFill>
+                  <a:srgbClr val="1C2833"/>
+                </a:solidFill>
+                <a:latin typeface="Arial" pitchFamily="34" charset="0"/>
+                <a:ea typeface="Arial" pitchFamily="34" charset="-122"/>
+                <a:cs typeface="Arial" pitchFamily="34" charset="-120"/>
+              </a:rPr>
+              <a:t> See </a:t>
+            </a:r>
+            <a:pPr algn="l" indent="0" marL="0">
+              <a:lnSpc>
+                <a:spcPts val="1620"/>
+              </a:lnSpc>
+              <a:spcAft>
+                <a:spcPts val="300"/>
+              </a:spcAft>
+              <a:buNone/>
+            </a:pPr>
+            <a:r>
+              <a:rPr lang="en-US" sz="1200" dirty="0">
+                <a:solidFill>
+                  <a:srgbClr val="1C2833"/>
+                </a:solidFill>
+                <a:latin typeface="Arial" pitchFamily="34" charset="0"/>
+                <a:ea typeface="Arial" pitchFamily="34" charset="-122"/>
+                <a:cs typeface="Arial" pitchFamily="34" charset="-120"/>
+              </a:rPr>
+              <a:t>assessments/project-brief.md</a:t>
+            </a:r>
+            <a:pPr algn="l" indent="0" marL="0">
+              <a:lnSpc>
+                <a:spcPts val="1620"/>
+              </a:lnSpc>
+              <a:spcAft>
+                <a:spcPts val="300"/>
+              </a:spcAft>
+              <a:buNone/>
+            </a:pPr>
+            <a:r>
+              <a:rPr lang="en-US" sz="1200" dirty="0">
+                <a:solidFill>
+                  <a:srgbClr val="1C2833"/>
+                </a:solidFill>
+                <a:latin typeface="Arial" pitchFamily="34" charset="0"/>
+                <a:ea typeface="Arial" pitchFamily="34" charset="-122"/>
+                <a:cs typeface="Arial" pitchFamily="34" charset="-120"/>
+              </a:rPr>
+              <a:t>.</a:t>
+            </a:r>
+            <a:endParaRPr lang="en-US" sz="1200" dirty="0"/>
+          </a:p>
+          <a:p>
+            <a:pPr algn="l" marL="342900" indent="-342900">
+              <a:lnSpc>
+                <a:spcPts val="1620"/>
+              </a:lnSpc>
+              <a:spcAft>
+                <a:spcPts val="300"/>
+              </a:spcAft>
+              <a:buSzPct val="100000"/>
+              <a:buChar char="•"/>
+            </a:pPr>
+            <a:r>
+              <a:rPr lang="en-US" sz="1200" dirty="0">
+                <a:solidFill>
+                  <a:srgbClr val="1C2833"/>
+                </a:solidFill>
+                <a:latin typeface="Arial" pitchFamily="34" charset="0"/>
+                <a:ea typeface="Arial" pitchFamily="34" charset="-122"/>
+                <a:cs typeface="Arial" pitchFamily="34" charset="-120"/>
+              </a:rPr>
+              <a:t>Also: pick one news headline from the last week that mentions climate change, weather extremes, or pollution. Bring a one-sentence summary.</a:t>
+            </a:r>
+            <a:endParaRPr lang="en-US" sz="1200" dirty="0"/>
+          </a:p>
+        </p:txBody>
+      </p:sp>
+      <p:sp>
+        <p:nvSpPr>
+          <p:cNvPr id="5" name="Text 3"/>
+          <p:cNvSpPr/>
+          <p:nvPr/>
+        </p:nvSpPr>
+        <p:spPr>
+          <a:xfrm>
+            <a:off x="406301" y="4434929"/>
+            <a:ext cx="8498026" cy="213271"/>
+          </a:xfrm>
+          <a:prstGeom prst="rect">
+            <a:avLst/>
+          </a:prstGeom>
+          <a:noFill/>
+          <a:ln/>
+        </p:spPr>
+        <p:txBody>
+          <a:bodyPr wrap="square" lIns="0" tIns="0" rIns="0" bIns="0" rtlCol="0" anchor="t"/>
+          <a:lstStyle/>
+          <a:p>
+            <a:pPr algn="l" indent="0" marL="0">
+              <a:lnSpc>
+                <a:spcPts val="1680"/>
+              </a:lnSpc>
+              <a:spcBef>
+                <a:spcPts val="300"/>
+              </a:spcBef>
+              <a:spcAft>
+                <a:spcPts val="300"/>
+              </a:spcAft>
+              <a:buNone/>
+            </a:pPr>
+            <a:r>
+              <a:rPr lang="en-US" sz="1200" dirty="0">
+                <a:solidFill>
+                  <a:srgbClr val="1C2833"/>
+                </a:solidFill>
+                <a:latin typeface="Arial" pitchFamily="34" charset="0"/>
+                <a:ea typeface="Arial" pitchFamily="34" charset="-122"/>
+                <a:cs typeface="Arial" pitchFamily="34" charset="-120"/>
+              </a:rPr>
+              <a:t>Middle ·  · IKS Curriculum</a:t>
+            </a:r>
+            <a:endParaRPr lang="en-US" sz="1200" dirty="0"/>
+          </a:p>
+        </p:txBody>
+      </p:sp>
+    </p:spTree>
+  </p:cSld>
+  <p:clrMapOvr>
+    <a:masterClrMapping/>
+  </p:clrMapOvr>
+</p:sld>
+</file>
+
+<file path=ppt/slides/slide21.xml><?xml version="1.0" encoding="utf-8"?>
+<p:sld xmlns:a="http://schemas.openxmlformats.org/drawingml/2006/main" xmlns:r="http://schemas.openxmlformats.org/officeDocument/2006/relationships" xmlns:p="http://schemas.openxmlformats.org/presentationml/2006/main">
+  <p:cSld name="Slide 21">
+    <p:bg>
+      <p:bgPr>
+        <a:solidFill>
+          <a:srgbClr val="FFFFFF"/>
+        </a:solidFill>
+      </p:bgPr>
+    </p:bg>
+    <p:spTree>
+      <p:nvGrpSpPr>
+        <p:cNvPr id="1" name=""/>
+        <p:cNvGrpSpPr/>
+        <p:nvPr/>
+      </p:nvGrpSpPr>
+      <p:grpSpPr>
+        <a:xfrm>
+          <a:off x="0" y="0"/>
+          <a:ext cx="0" cy="0"/>
+          <a:chOff x="0" y="0"/>
+          <a:chExt cx="0" cy="0"/>
+        </a:xfrm>
+      </p:grpSpPr>
+      <p:sp>
+        <p:nvSpPr>
+          <p:cNvPr id="2" name="Text 0"/>
+          <p:cNvSpPr/>
+          <p:nvPr/>
+        </p:nvSpPr>
+        <p:spPr>
+          <a:xfrm>
+            <a:off x="0" y="0"/>
+            <a:ext cx="9144000" cy="101501"/>
+          </a:xfrm>
+          <a:prstGeom prst="rect">
+            <a:avLst/>
+          </a:prstGeom>
+          <a:solidFill>
+            <a:srgbClr val="277884"/>
+          </a:solidFill>
+          <a:ln/>
+        </p:spPr>
+        <p:txBody>
+          <a:bodyPr wrap="square" rtlCol="0" anchor="ctr"/>
+          <a:lstStyle/>
+          <a:p>
+            <a:pPr indent="0" marL="0">
+              <a:buNone/>
+            </a:pPr>
+            <a:endParaRPr lang="en-US" dirty="0"/>
+          </a:p>
+        </p:txBody>
+      </p:sp>
+      <p:sp>
+        <p:nvSpPr>
+          <p:cNvPr id="3" name="Text 1"/>
+          <p:cNvSpPr/>
+          <p:nvPr/>
+        </p:nvSpPr>
+        <p:spPr>
+          <a:xfrm>
+            <a:off x="406301" y="457051"/>
+            <a:ext cx="8498026" cy="274290"/>
+          </a:xfrm>
+          <a:prstGeom prst="rect">
+            <a:avLst/>
+          </a:prstGeom>
+          <a:noFill/>
+          <a:ln/>
+        </p:spPr>
+        <p:txBody>
+          <a:bodyPr wrap="square" lIns="0" tIns="0" rIns="0" bIns="0" rtlCol="0" anchor="t"/>
+          <a:lstStyle/>
+          <a:p>
+            <a:pPr algn="l" indent="0" marL="0">
+              <a:lnSpc>
+                <a:spcPts val="2160"/>
+              </a:lnSpc>
+              <a:spcBef>
+                <a:spcPts val="600"/>
+              </a:spcBef>
+              <a:spcAft>
+                <a:spcPts val="800"/>
+              </a:spcAft>
+              <a:buNone/>
+            </a:pPr>
+            <a:r>
+              <a:rPr lang="en-US" sz="1800" b="1" dirty="0">
+                <a:solidFill>
+                  <a:srgbClr val="FE4447"/>
+                </a:solidFill>
+                <a:latin typeface="Georgia" pitchFamily="34" charset="0"/>
+                <a:ea typeface="Georgia" pitchFamily="34" charset="-122"/>
+                <a:cs typeface="Georgia" pitchFamily="34" charset="-120"/>
+              </a:rPr>
+              <a:t>Differentiation</a:t>
+            </a:r>
+            <a:endParaRPr lang="en-US" sz="1800" dirty="0"/>
+          </a:p>
+        </p:txBody>
+      </p:sp>
+      <p:sp>
+        <p:nvSpPr>
+          <p:cNvPr id="4" name="Text 2"/>
+          <p:cNvSpPr/>
+          <p:nvPr/>
+        </p:nvSpPr>
+        <p:spPr>
+          <a:xfrm>
+            <a:off x="634901" y="883593"/>
+            <a:ext cx="8102798" cy="937022"/>
+          </a:xfrm>
+          <a:prstGeom prst="rect">
+            <a:avLst/>
+          </a:prstGeom>
+          <a:noFill/>
+          <a:ln/>
+        </p:spPr>
+        <p:txBody>
+          <a:bodyPr wrap="square" lIns="0" tIns="0" rIns="0" bIns="0" rtlCol="0" anchor="t"/>
+          <a:lstStyle/>
+          <a:p>
+            <a:pPr algn="l" marL="342900" indent="-342900">
+              <a:lnSpc>
+                <a:spcPts val="1620"/>
+              </a:lnSpc>
+              <a:spcAft>
+                <a:spcPts val="300"/>
+              </a:spcAft>
+              <a:buSzPct val="100000"/>
+              <a:buChar char="•"/>
+            </a:pPr>
+            <a:r>
+              <a:rPr lang="en-US" sz="1200" b="1" dirty="0">
+                <a:solidFill>
+                  <a:srgbClr val="1C2833"/>
+                </a:solidFill>
+                <a:latin typeface="Arial" pitchFamily="34" charset="0"/>
+                <a:ea typeface="Arial" pitchFamily="34" charset="-122"/>
+                <a:cs typeface="Arial" pitchFamily="34" charset="-120"/>
+              </a:rPr>
+              <a:t>One tier up:</a:t>
+            </a:r>
+            <a:pPr algn="l" indent="0" marL="0">
+              <a:lnSpc>
+                <a:spcPts val="1620"/>
+              </a:lnSpc>
+              <a:spcAft>
+                <a:spcPts val="300"/>
+              </a:spcAft>
+              <a:buNone/>
+            </a:pPr>
+            <a:r>
+              <a:rPr lang="en-US" sz="1200" dirty="0">
+                <a:solidFill>
+                  <a:srgbClr val="1C2833"/>
+                </a:solidFill>
+                <a:latin typeface="Arial" pitchFamily="34" charset="0"/>
+                <a:ea typeface="Arial" pitchFamily="34" charset="-122"/>
+                <a:cs typeface="Arial" pitchFamily="34" charset="-120"/>
+              </a:rPr>
+              <a:t> Read the IPCC AR6 Synthesis Report's "Summary for Policymakers" — first 5 pages only (it's accessible online). Bring one fact tomorrow.</a:t>
+            </a:r>
+            <a:endParaRPr lang="en-US" sz="1200" dirty="0"/>
+          </a:p>
+          <a:p>
+            <a:pPr algn="l" marL="342900" indent="-342900">
+              <a:lnSpc>
+                <a:spcPts val="1620"/>
+              </a:lnSpc>
+              <a:spcAft>
+                <a:spcPts val="300"/>
+              </a:spcAft>
+              <a:buSzPct val="100000"/>
+              <a:buChar char="•"/>
+            </a:pPr>
+            <a:r>
+              <a:rPr lang="en-US" sz="1200" b="1" dirty="0">
+                <a:solidFill>
+                  <a:srgbClr val="1C2833"/>
+                </a:solidFill>
+                <a:latin typeface="Arial" pitchFamily="34" charset="0"/>
+                <a:ea typeface="Arial" pitchFamily="34" charset="-122"/>
+                <a:cs typeface="Arial" pitchFamily="34" charset="-120"/>
+              </a:rPr>
+              <a:t>One tier down:</a:t>
+            </a:r>
+            <a:pPr algn="l" indent="0" marL="0">
+              <a:lnSpc>
+                <a:spcPts val="1620"/>
+              </a:lnSpc>
+              <a:spcAft>
+                <a:spcPts val="300"/>
+              </a:spcAft>
+              <a:buNone/>
+            </a:pPr>
+            <a:r>
+              <a:rPr lang="en-US" sz="1200" dirty="0">
+                <a:solidFill>
+                  <a:srgbClr val="1C2833"/>
+                </a:solidFill>
+                <a:latin typeface="Arial" pitchFamily="34" charset="0"/>
+                <a:ea typeface="Arial" pitchFamily="34" charset="-122"/>
+                <a:cs typeface="Arial" pitchFamily="34" charset="-120"/>
+              </a:rPr>
+              <a:t> Focus on one observable effect — the one most visible in your region (heatwaves, floods, monsoon shift). One effect, well understood, is enough.</a:t>
+            </a:r>
+            <a:endParaRPr lang="en-US" sz="1200" dirty="0"/>
+          </a:p>
+        </p:txBody>
+      </p:sp>
+      <p:sp>
+        <p:nvSpPr>
+          <p:cNvPr id="5" name="Text 3"/>
+          <p:cNvSpPr/>
+          <p:nvPr/>
+        </p:nvSpPr>
+        <p:spPr>
+          <a:xfrm>
+            <a:off x="406301" y="4434929"/>
+            <a:ext cx="8498026" cy="213271"/>
+          </a:xfrm>
+          <a:prstGeom prst="rect">
+            <a:avLst/>
+          </a:prstGeom>
+          <a:noFill/>
+          <a:ln/>
+        </p:spPr>
+        <p:txBody>
+          <a:bodyPr wrap="square" lIns="0" tIns="0" rIns="0" bIns="0" rtlCol="0" anchor="t"/>
+          <a:lstStyle/>
+          <a:p>
+            <a:pPr algn="l" indent="0" marL="0">
+              <a:lnSpc>
+                <a:spcPts val="1680"/>
+              </a:lnSpc>
+              <a:spcBef>
+                <a:spcPts val="300"/>
+              </a:spcBef>
+              <a:spcAft>
+                <a:spcPts val="300"/>
+              </a:spcAft>
+              <a:buNone/>
+            </a:pPr>
+            <a:r>
+              <a:rPr lang="en-US" sz="1200" dirty="0">
+                <a:solidFill>
+                  <a:srgbClr val="1C2833"/>
+                </a:solidFill>
+                <a:latin typeface="Arial" pitchFamily="34" charset="0"/>
+                <a:ea typeface="Arial" pitchFamily="34" charset="-122"/>
+                <a:cs typeface="Arial" pitchFamily="34" charset="-120"/>
+              </a:rPr>
+              <a:t>Middle ·  · IKS Curriculum</a:t>
+            </a:r>
+            <a:endParaRPr lang="en-US" sz="1200" dirty="0"/>
+          </a:p>
+        </p:txBody>
+      </p:sp>
+    </p:spTree>
+  </p:cSld>
+  <p:clrMapOvr>
+    <a:masterClrMapping/>
+  </p:clrMapOvr>
+</p:sld>
+</file>
+
+<file path=ppt/slides/slide22.xml><?xml version="1.0" encoding="utf-8"?>
+<p:sld xmlns:a="http://schemas.openxmlformats.org/drawingml/2006/main" xmlns:r="http://schemas.openxmlformats.org/officeDocument/2006/relationships" xmlns:p="http://schemas.openxmlformats.org/presentationml/2006/main">
+  <p:cSld name="Slide 22">
+    <p:bg>
+      <p:bgPr>
+        <a:solidFill>
+          <a:srgbClr val="FFFFFF"/>
+        </a:solidFill>
+      </p:bgPr>
+    </p:bg>
+    <p:spTree>
+      <p:nvGrpSpPr>
+        <p:cNvPr id="1" name=""/>
+        <p:cNvGrpSpPr/>
+        <p:nvPr/>
+      </p:nvGrpSpPr>
+      <p:grpSpPr>
+        <a:xfrm>
+          <a:off x="0" y="0"/>
+          <a:ext cx="0" cy="0"/>
+          <a:chOff x="0" y="0"/>
+          <a:chExt cx="0" cy="0"/>
+        </a:xfrm>
+      </p:grpSpPr>
+      <p:sp>
+        <p:nvSpPr>
+          <p:cNvPr id="2" name="Text 0"/>
+          <p:cNvSpPr/>
+          <p:nvPr/>
+        </p:nvSpPr>
+        <p:spPr>
+          <a:xfrm>
+            <a:off x="0" y="0"/>
+            <a:ext cx="9144000" cy="101501"/>
+          </a:xfrm>
+          <a:prstGeom prst="rect">
+            <a:avLst/>
+          </a:prstGeom>
+          <a:solidFill>
+            <a:srgbClr val="277884"/>
+          </a:solidFill>
+          <a:ln/>
+        </p:spPr>
+        <p:txBody>
+          <a:bodyPr wrap="square" rtlCol="0" anchor="ctr"/>
+          <a:lstStyle/>
+          <a:p>
+            <a:pPr indent="0" marL="0">
+              <a:buNone/>
+            </a:pPr>
+            <a:endParaRPr lang="en-US" dirty="0"/>
+          </a:p>
+        </p:txBody>
+      </p:sp>
+      <p:sp>
+        <p:nvSpPr>
+          <p:cNvPr id="3" name="Text 1"/>
+          <p:cNvSpPr/>
+          <p:nvPr/>
+        </p:nvSpPr>
+        <p:spPr>
+          <a:xfrm>
+            <a:off x="406301" y="457051"/>
+            <a:ext cx="8498026" cy="274290"/>
+          </a:xfrm>
+          <a:prstGeom prst="rect">
+            <a:avLst/>
+          </a:prstGeom>
+          <a:noFill/>
+          <a:ln/>
+        </p:spPr>
+        <p:txBody>
+          <a:bodyPr wrap="square" lIns="0" tIns="0" rIns="0" bIns="0" rtlCol="0" anchor="t"/>
+          <a:lstStyle/>
+          <a:p>
+            <a:pPr algn="l" indent="0" marL="0">
+              <a:lnSpc>
+                <a:spcPts val="2160"/>
+              </a:lnSpc>
+              <a:spcBef>
+                <a:spcPts val="600"/>
+              </a:spcBef>
+              <a:spcAft>
+                <a:spcPts val="800"/>
+              </a:spcAft>
+              <a:buNone/>
+            </a:pPr>
+            <a:r>
+              <a:rPr lang="en-US" sz="1800" b="1" dirty="0">
+                <a:solidFill>
+                  <a:srgbClr val="FE4447"/>
+                </a:solidFill>
+                <a:latin typeface="Georgia" pitchFamily="34" charset="0"/>
+                <a:ea typeface="Georgia" pitchFamily="34" charset="-122"/>
+                <a:cs typeface="Georgia" pitchFamily="34" charset="-120"/>
+              </a:rPr>
+              <a:t>Teacher notes</a:t>
+            </a:r>
+            <a:endParaRPr lang="en-US" sz="1800" dirty="0"/>
+          </a:p>
+        </p:txBody>
+      </p:sp>
+      <p:sp>
+        <p:nvSpPr>
+          <p:cNvPr id="4" name="Text 2"/>
+          <p:cNvSpPr/>
+          <p:nvPr/>
+        </p:nvSpPr>
+        <p:spPr>
+          <a:xfrm>
+            <a:off x="634901" y="883593"/>
+            <a:ext cx="8102798" cy="1386483"/>
+          </a:xfrm>
+          <a:prstGeom prst="rect">
+            <a:avLst/>
+          </a:prstGeom>
+          <a:noFill/>
+          <a:ln/>
+        </p:spPr>
+        <p:txBody>
+          <a:bodyPr wrap="square" lIns="0" tIns="0" rIns="0" bIns="0" rtlCol="0" anchor="t"/>
+          <a:lstStyle/>
+          <a:p>
+            <a:pPr algn="l" marL="342900" indent="-342900">
+              <a:lnSpc>
+                <a:spcPts val="1620"/>
+              </a:lnSpc>
+              <a:spcAft>
+                <a:spcPts val="300"/>
+              </a:spcAft>
+              <a:buSzPct val="100000"/>
+              <a:buChar char="•"/>
+            </a:pPr>
+            <a:r>
+              <a:rPr lang="en-US" sz="1200" dirty="0">
+                <a:solidFill>
+                  <a:srgbClr val="1C2833"/>
+                </a:solidFill>
+                <a:latin typeface="Arial" pitchFamily="34" charset="0"/>
+                <a:ea typeface="Arial" pitchFamily="34" charset="-122"/>
+                <a:cs typeface="Arial" pitchFamily="34" charset="-120"/>
+              </a:rPr>
+              <a:t>Climate change is a politically loaded topic in some classrooms. Stick to the IPCC numbers; they are the consensus scientific source. Avoid the activist framing on either side.</a:t>
+            </a:r>
+            <a:endParaRPr lang="en-US" sz="1200" dirty="0"/>
+          </a:p>
+          <a:p>
+            <a:pPr algn="l" marL="342900" indent="-342900">
+              <a:lnSpc>
+                <a:spcPts val="1620"/>
+              </a:lnSpc>
+              <a:spcAft>
+                <a:spcPts val="300"/>
+              </a:spcAft>
+              <a:buSzPct val="100000"/>
+              <a:buChar char="•"/>
+            </a:pPr>
+            <a:r>
+              <a:rPr lang="en-US" sz="1200" dirty="0">
+                <a:solidFill>
+                  <a:srgbClr val="1C2833"/>
+                </a:solidFill>
+                <a:latin typeface="Arial" pitchFamily="34" charset="0"/>
+                <a:ea typeface="Arial" pitchFamily="34" charset="-122"/>
+                <a:cs typeface="Arial" pitchFamily="34" charset="-120"/>
+              </a:rPr>
+              <a:t>Some students or parents may dispute the science. The classroom position is: "the IPCC is what we are teaching. If you disagree, the place to argue with the science is with peer-reviewed responses to the IPCC, not in this classroom."</a:t>
+            </a:r>
+            <a:endParaRPr lang="en-US" sz="1200" dirty="0"/>
+          </a:p>
+          <a:p>
+            <a:pPr algn="l" marL="342900" indent="-342900">
+              <a:lnSpc>
+                <a:spcPts val="1620"/>
+              </a:lnSpc>
+              <a:spcAft>
+                <a:spcPts val="300"/>
+              </a:spcAft>
+              <a:buSzPct val="100000"/>
+              <a:buChar char="•"/>
+            </a:pPr>
+            <a:r>
+              <a:rPr lang="en-US" sz="1200" dirty="0">
+                <a:solidFill>
+                  <a:srgbClr val="1C2833"/>
+                </a:solidFill>
+                <a:latin typeface="Arial" pitchFamily="34" charset="0"/>
+                <a:ea typeface="Arial" pitchFamily="34" charset="-122"/>
+                <a:cs typeface="Arial" pitchFamily="34" charset="-120"/>
+              </a:rPr>
+              <a:t>Avoid catastrophising. Students at this age can become genuinely anxious about climate news. Frame it as: </a:t>
+            </a:r>
+            <a:pPr algn="l" indent="0" marL="0">
+              <a:lnSpc>
+                <a:spcPts val="1620"/>
+              </a:lnSpc>
+              <a:spcAft>
+                <a:spcPts val="300"/>
+              </a:spcAft>
+              <a:buNone/>
+            </a:pPr>
+            <a:r>
+              <a:rPr lang="en-US" sz="1200" i="1" dirty="0">
+                <a:solidFill>
+                  <a:srgbClr val="1C2833"/>
+                </a:solidFill>
+                <a:latin typeface="Arial" pitchFamily="34" charset="0"/>
+                <a:ea typeface="Arial" pitchFamily="34" charset="-122"/>
+                <a:cs typeface="Arial" pitchFamily="34" charset="-120"/>
+              </a:rPr>
+              <a:t>this is real, this is serious, this is also being worked on by millions of people including engineers, farmers, and you.</a:t>
+            </a:r>
+            <a:endParaRPr lang="en-US" sz="1200" dirty="0"/>
+          </a:p>
+        </p:txBody>
+      </p:sp>
+      <p:sp>
+        <p:nvSpPr>
+          <p:cNvPr id="5" name="Text 3"/>
+          <p:cNvSpPr/>
+          <p:nvPr/>
+        </p:nvSpPr>
+        <p:spPr>
+          <a:xfrm>
+            <a:off x="406301" y="4434929"/>
+            <a:ext cx="8498026" cy="213271"/>
+          </a:xfrm>
+          <a:prstGeom prst="rect">
+            <a:avLst/>
+          </a:prstGeom>
+          <a:noFill/>
+          <a:ln/>
+        </p:spPr>
+        <p:txBody>
+          <a:bodyPr wrap="square" lIns="0" tIns="0" rIns="0" bIns="0" rtlCol="0" anchor="t"/>
+          <a:lstStyle/>
+          <a:p>
+            <a:pPr algn="l" indent="0" marL="0">
+              <a:lnSpc>
+                <a:spcPts val="1680"/>
+              </a:lnSpc>
+              <a:spcBef>
+                <a:spcPts val="300"/>
+              </a:spcBef>
+              <a:spcAft>
+                <a:spcPts val="300"/>
+              </a:spcAft>
+              <a:buNone/>
+            </a:pPr>
+            <a:r>
+              <a:rPr lang="en-US" sz="1200" dirty="0">
+                <a:solidFill>
+                  <a:srgbClr val="1C2833"/>
+                </a:solidFill>
+                <a:latin typeface="Arial" pitchFamily="34" charset="0"/>
+                <a:ea typeface="Arial" pitchFamily="34" charset="-122"/>
+                <a:cs typeface="Arial" pitchFamily="34" charset="-120"/>
+              </a:rPr>
+              <a:t>Middle ·  · IKS Curriculum</a:t>
+            </a:r>
+            <a:endParaRPr lang="en-US" sz="1200" dirty="0"/>
+          </a:p>
+        </p:txBody>
+      </p:sp>
+    </p:spTree>
+  </p:cSld>
+  <p:clrMapOvr>
+    <a:masterClrMapping/>
+  </p:clrMapOvr>
+</p:sld>
+</file>
+
+<file path=ppt/slides/slide23.xml><?xml version="1.0" encoding="utf-8"?>
+<p:sld xmlns:a="http://schemas.openxmlformats.org/drawingml/2006/main" xmlns:r="http://schemas.openxmlformats.org/officeDocument/2006/relationships" xmlns:p="http://schemas.openxmlformats.org/presentationml/2006/main">
+  <p:cSld name="Slide 23">
+    <p:bg>
+      <p:bgPr>
+        <a:solidFill>
+          <a:srgbClr val="FFFFFF"/>
+        </a:solidFill>
+      </p:bgPr>
+    </p:bg>
+    <p:spTree>
+      <p:nvGrpSpPr>
+        <p:cNvPr id="1" name=""/>
+        <p:cNvGrpSpPr/>
+        <p:nvPr/>
+      </p:nvGrpSpPr>
+      <p:grpSpPr>
+        <a:xfrm>
+          <a:off x="0" y="0"/>
+          <a:ext cx="0" cy="0"/>
+          <a:chOff x="0" y="0"/>
+          <a:chExt cx="0" cy="0"/>
+        </a:xfrm>
+      </p:grpSpPr>
+      <p:sp>
+        <p:nvSpPr>
+          <p:cNvPr id="2" name="Text 0"/>
+          <p:cNvSpPr/>
+          <p:nvPr/>
+        </p:nvSpPr>
+        <p:spPr>
+          <a:xfrm>
+            <a:off x="0" y="0"/>
+            <a:ext cx="9144000" cy="101501"/>
+          </a:xfrm>
+          <a:prstGeom prst="rect">
+            <a:avLst/>
+          </a:prstGeom>
+          <a:solidFill>
+            <a:srgbClr val="277884"/>
+          </a:solidFill>
+          <a:ln/>
+        </p:spPr>
+        <p:txBody>
+          <a:bodyPr wrap="square" rtlCol="0" anchor="ctr"/>
+          <a:lstStyle/>
+          <a:p>
+            <a:pPr indent="0" marL="0">
+              <a:buNone/>
+            </a:pPr>
+            <a:endParaRPr lang="en-US" dirty="0"/>
+          </a:p>
+        </p:txBody>
+      </p:sp>
+      <p:sp>
+        <p:nvSpPr>
+          <p:cNvPr id="3" name="Text 1"/>
+          <p:cNvSpPr/>
+          <p:nvPr/>
+        </p:nvSpPr>
+        <p:spPr>
+          <a:xfrm>
+            <a:off x="406301" y="457051"/>
+            <a:ext cx="8498026" cy="274290"/>
+          </a:xfrm>
+          <a:prstGeom prst="rect">
+            <a:avLst/>
+          </a:prstGeom>
+          <a:noFill/>
+          <a:ln/>
+        </p:spPr>
+        <p:txBody>
+          <a:bodyPr wrap="square" lIns="0" tIns="0" rIns="0" bIns="0" rtlCol="0" anchor="t"/>
+          <a:lstStyle/>
+          <a:p>
+            <a:pPr algn="l" indent="0" marL="0">
+              <a:lnSpc>
+                <a:spcPts val="2160"/>
+              </a:lnSpc>
+              <a:spcBef>
+                <a:spcPts val="600"/>
+              </a:spcBef>
+              <a:spcAft>
+                <a:spcPts val="800"/>
+              </a:spcAft>
+              <a:buNone/>
+            </a:pPr>
+            <a:r>
+              <a:rPr lang="en-US" sz="1800" b="1" dirty="0">
+                <a:solidFill>
+                  <a:srgbClr val="FE4447"/>
+                </a:solidFill>
+                <a:latin typeface="Georgia" pitchFamily="34" charset="0"/>
+                <a:ea typeface="Georgia" pitchFamily="34" charset="-122"/>
+                <a:cs typeface="Georgia" pitchFamily="34" charset="-120"/>
+              </a:rPr>
+              <a:t>Teacher notes (cont.)</a:t>
+            </a:r>
+            <a:endParaRPr lang="en-US" sz="1800" dirty="0"/>
+          </a:p>
+        </p:txBody>
+      </p:sp>
+      <p:sp>
+        <p:nvSpPr>
+          <p:cNvPr id="4" name="Text 2"/>
+          <p:cNvSpPr/>
+          <p:nvPr/>
+        </p:nvSpPr>
+        <p:spPr>
+          <a:xfrm>
+            <a:off x="634901" y="883593"/>
+            <a:ext cx="8102798" cy="487561"/>
+          </a:xfrm>
+          <a:prstGeom prst="rect">
+            <a:avLst/>
+          </a:prstGeom>
+          <a:noFill/>
+          <a:ln/>
+        </p:spPr>
+        <p:txBody>
+          <a:bodyPr wrap="square" lIns="0" tIns="0" rIns="0" bIns="0" rtlCol="0" anchor="t"/>
+          <a:lstStyle/>
+          <a:p>
+            <a:pPr algn="l" marL="342900" indent="-342900">
+              <a:lnSpc>
+                <a:spcPts val="1620"/>
+              </a:lnSpc>
+              <a:spcAft>
+                <a:spcPts val="300"/>
+              </a:spcAft>
+              <a:buSzPct val="100000"/>
+              <a:buChar char="•"/>
+            </a:pPr>
+            <a:r>
+              <a:rPr lang="en-US" sz="1200" dirty="0">
+                <a:solidFill>
+                  <a:srgbClr val="1C2833"/>
+                </a:solidFill>
+                <a:latin typeface="Arial" pitchFamily="34" charset="0"/>
+                <a:ea typeface="Arial" pitchFamily="34" charset="-122"/>
+                <a:cs typeface="Arial" pitchFamily="34" charset="-120"/>
+              </a:rPr>
+              <a:t>Avoid the opposite — false hope. Don't say "if we all just plant trees we'll be fine." Plant trees AND change energy systems AND change consumption AND change policy. The Indic frame supplies one thread of this; not the whole rope.</a:t>
+            </a:r>
+            <a:endParaRPr lang="en-US" sz="1200" dirty="0"/>
+          </a:p>
+        </p:txBody>
+      </p:sp>
+      <p:sp>
+        <p:nvSpPr>
+          <p:cNvPr id="5" name="Text 3"/>
+          <p:cNvSpPr/>
+          <p:nvPr/>
+        </p:nvSpPr>
+        <p:spPr>
+          <a:xfrm>
+            <a:off x="406301" y="4434929"/>
+            <a:ext cx="8498026" cy="213271"/>
+          </a:xfrm>
+          <a:prstGeom prst="rect">
+            <a:avLst/>
+          </a:prstGeom>
+          <a:noFill/>
+          <a:ln/>
+        </p:spPr>
+        <p:txBody>
+          <a:bodyPr wrap="square" lIns="0" tIns="0" rIns="0" bIns="0" rtlCol="0" anchor="t"/>
+          <a:lstStyle/>
+          <a:p>
+            <a:pPr algn="l" indent="0" marL="0">
+              <a:lnSpc>
+                <a:spcPts val="1680"/>
+              </a:lnSpc>
+              <a:spcBef>
+                <a:spcPts val="300"/>
+              </a:spcBef>
+              <a:spcAft>
+                <a:spcPts val="300"/>
+              </a:spcAft>
+              <a:buNone/>
+            </a:pPr>
+            <a:r>
+              <a:rPr lang="en-US" sz="1200" dirty="0">
+                <a:solidFill>
+                  <a:srgbClr val="1C2833"/>
+                </a:solidFill>
+                <a:latin typeface="Arial" pitchFamily="34" charset="0"/>
+                <a:ea typeface="Arial" pitchFamily="34" charset="-122"/>
+                <a:cs typeface="Arial" pitchFamily="34" charset="-120"/>
+              </a:rPr>
+              <a:t>Middle ·  · IKS Curriculum</a:t>
+            </a:r>
+            <a:endParaRPr lang="en-US" sz="1200" dirty="0"/>
+          </a:p>
+        </p:txBody>
+      </p:sp>
+    </p:spTree>
+  </p:cSld>
+  <p:clrMapOvr>
+    <a:masterClrMapping/>
+  </p:clrMapOvr>
+</p:sld>
+</file>
+
+<file path=ppt/slides/slide24.xml><?xml version="1.0" encoding="utf-8"?>
+<p:sld xmlns:a="http://schemas.openxmlformats.org/drawingml/2006/main" xmlns:r="http://schemas.openxmlformats.org/officeDocument/2006/relationships" xmlns:p="http://schemas.openxmlformats.org/presentationml/2006/main">
+  <p:cSld name="Slide 24">
+    <p:bg>
+      <p:bgPr>
+        <a:solidFill>
+          <a:srgbClr val="FFFFFF"/>
+        </a:solidFill>
+      </p:bgPr>
+    </p:bg>
+    <p:spTree>
+      <p:nvGrpSpPr>
+        <p:cNvPr id="1" name=""/>
+        <p:cNvGrpSpPr/>
+        <p:nvPr/>
+      </p:nvGrpSpPr>
+      <p:grpSpPr>
+        <a:xfrm>
+          <a:off x="0" y="0"/>
+          <a:ext cx="0" cy="0"/>
+          <a:chOff x="0" y="0"/>
+          <a:chExt cx="0" cy="0"/>
+        </a:xfrm>
+      </p:grpSpPr>
+      <p:sp>
+        <p:nvSpPr>
+          <p:cNvPr id="2" name="Text 0"/>
+          <p:cNvSpPr/>
+          <p:nvPr/>
+        </p:nvSpPr>
+        <p:spPr>
+          <a:xfrm>
+            <a:off x="0" y="0"/>
+            <a:ext cx="9144000" cy="101501"/>
+          </a:xfrm>
+          <a:prstGeom prst="rect">
+            <a:avLst/>
+          </a:prstGeom>
+          <a:solidFill>
+            <a:srgbClr val="277884"/>
+          </a:solidFill>
+          <a:ln/>
+        </p:spPr>
+        <p:txBody>
+          <a:bodyPr wrap="square" rtlCol="0" anchor="ctr"/>
+          <a:lstStyle/>
+          <a:p>
+            <a:pPr indent="0" marL="0">
+              <a:buNone/>
+            </a:pPr>
+            <a:endParaRPr lang="en-US" dirty="0"/>
+          </a:p>
+        </p:txBody>
+      </p:sp>
+      <p:sp>
+        <p:nvSpPr>
+          <p:cNvPr id="3" name="Text 1"/>
+          <p:cNvSpPr/>
+          <p:nvPr/>
+        </p:nvSpPr>
+        <p:spPr>
+          <a:xfrm>
+            <a:off x="406301" y="457051"/>
+            <a:ext cx="8498026" cy="274290"/>
+          </a:xfrm>
+          <a:prstGeom prst="rect">
+            <a:avLst/>
+          </a:prstGeom>
+          <a:noFill/>
+          <a:ln/>
+        </p:spPr>
+        <p:txBody>
+          <a:bodyPr wrap="square" lIns="0" tIns="0" rIns="0" bIns="0" rtlCol="0" anchor="t"/>
+          <a:lstStyle/>
+          <a:p>
+            <a:pPr algn="l" indent="0" marL="0">
+              <a:lnSpc>
+                <a:spcPts val="2160"/>
+              </a:lnSpc>
+              <a:spcBef>
+                <a:spcPts val="600"/>
+              </a:spcBef>
+              <a:spcAft>
+                <a:spcPts val="800"/>
+              </a:spcAft>
+              <a:buNone/>
+            </a:pPr>
+            <a:r>
+              <a:rPr lang="en-US" sz="1800" b="1" dirty="0">
+                <a:solidFill>
+                  <a:srgbClr val="FE4447"/>
+                </a:solidFill>
+                <a:latin typeface="Georgia" pitchFamily="34" charset="0"/>
+                <a:ea typeface="Georgia" pitchFamily="34" charset="-122"/>
+                <a:cs typeface="Georgia" pitchFamily="34" charset="-120"/>
+              </a:rPr>
+              <a:t>Citation(s) used in this lesson</a:t>
+            </a:r>
+            <a:endParaRPr lang="en-US" sz="1800" dirty="0"/>
+          </a:p>
+        </p:txBody>
+      </p:sp>
+      <p:sp>
+        <p:nvSpPr>
+          <p:cNvPr id="4" name="Text 2"/>
+          <p:cNvSpPr/>
+          <p:nvPr/>
+        </p:nvSpPr>
+        <p:spPr>
+          <a:xfrm>
+            <a:off x="634901" y="883593"/>
+            <a:ext cx="8102798" cy="975122"/>
+          </a:xfrm>
+          <a:prstGeom prst="rect">
+            <a:avLst/>
+          </a:prstGeom>
+          <a:noFill/>
+          <a:ln/>
+        </p:spPr>
+        <p:txBody>
+          <a:bodyPr wrap="square" lIns="0" tIns="0" rIns="0" bIns="0" rtlCol="0" anchor="t"/>
+          <a:lstStyle/>
+          <a:p>
+            <a:pPr algn="l" marL="342900" indent="-342900">
+              <a:lnSpc>
+                <a:spcPts val="1620"/>
+              </a:lnSpc>
+              <a:spcAft>
+                <a:spcPts val="300"/>
+              </a:spcAft>
+              <a:buSzPct val="100000"/>
+              <a:buChar char="•"/>
+            </a:pPr>
+            <a:r>
+              <a:rPr lang="en-US" sz="1200" b="1" dirty="0">
+                <a:solidFill>
+                  <a:srgbClr val="1C2833"/>
+                </a:solidFill>
+                <a:latin typeface="Arial" pitchFamily="34" charset="0"/>
+                <a:ea typeface="Arial" pitchFamily="34" charset="-122"/>
+                <a:cs typeface="Arial" pitchFamily="34" charset="-120"/>
+              </a:rPr>
+              <a:t>IPCC AR6 Synthesis Report (2023)</a:t>
+            </a:r>
+            <a:pPr algn="l" indent="0" marL="0">
+              <a:lnSpc>
+                <a:spcPts val="1620"/>
+              </a:lnSpc>
+              <a:spcAft>
+                <a:spcPts val="300"/>
+              </a:spcAft>
+              <a:buNone/>
+            </a:pPr>
+            <a:r>
+              <a:rPr lang="en-US" sz="1200" dirty="0">
+                <a:solidFill>
+                  <a:srgbClr val="1C2833"/>
+                </a:solidFill>
+                <a:latin typeface="Arial" pitchFamily="34" charset="0"/>
+                <a:ea typeface="Arial" pitchFamily="34" charset="-122"/>
+                <a:cs typeface="Arial" pitchFamily="34" charset="-120"/>
+              </a:rPr>
+              <a:t> — for global temperature figures, the 1.5°C target, and CO₂ concentrations.</a:t>
+            </a:r>
+            <a:endParaRPr lang="en-US" sz="1200" dirty="0"/>
+          </a:p>
+          <a:p>
+            <a:pPr algn="l" marL="342900" indent="-342900">
+              <a:lnSpc>
+                <a:spcPts val="1620"/>
+              </a:lnSpc>
+              <a:spcAft>
+                <a:spcPts val="300"/>
+              </a:spcAft>
+              <a:buSzPct val="100000"/>
+              <a:buChar char="•"/>
+            </a:pPr>
+            <a:r>
+              <a:rPr lang="en-US" sz="1200" b="1" dirty="0">
+                <a:solidFill>
+                  <a:srgbClr val="1C2833"/>
+                </a:solidFill>
+                <a:latin typeface="Arial" pitchFamily="34" charset="0"/>
+                <a:ea typeface="Arial" pitchFamily="34" charset="-122"/>
+                <a:cs typeface="Arial" pitchFamily="34" charset="-120"/>
+              </a:rPr>
+              <a:t>UN Sustainable Development Goals (2015)</a:t>
+            </a:r>
+            <a:pPr algn="l" indent="0" marL="0">
+              <a:lnSpc>
+                <a:spcPts val="1620"/>
+              </a:lnSpc>
+              <a:spcAft>
+                <a:spcPts val="300"/>
+              </a:spcAft>
+              <a:buNone/>
+            </a:pPr>
+            <a:r>
+              <a:rPr lang="en-US" sz="1200" dirty="0">
+                <a:solidFill>
+                  <a:srgbClr val="1C2833"/>
+                </a:solidFill>
+                <a:latin typeface="Arial" pitchFamily="34" charset="0"/>
+                <a:ea typeface="Arial" pitchFamily="34" charset="-122"/>
+                <a:cs typeface="Arial" pitchFamily="34" charset="-120"/>
+              </a:rPr>
+              <a:t> — for the SDG 13 reference.</a:t>
+            </a:r>
+            <a:endParaRPr lang="en-US" sz="1200" dirty="0"/>
+          </a:p>
+          <a:p>
+            <a:pPr algn="l" marL="342900" indent="-342900">
+              <a:lnSpc>
+                <a:spcPts val="1620"/>
+              </a:lnSpc>
+              <a:spcAft>
+                <a:spcPts val="300"/>
+              </a:spcAft>
+              <a:buSzPct val="100000"/>
+              <a:buChar char="•"/>
+            </a:pPr>
+            <a:r>
+              <a:rPr lang="en-US" sz="1200" b="1" dirty="0">
+                <a:solidFill>
+                  <a:srgbClr val="1C2833"/>
+                </a:solidFill>
+                <a:latin typeface="Arial" pitchFamily="34" charset="0"/>
+                <a:ea typeface="Arial" pitchFamily="34" charset="-122"/>
+                <a:cs typeface="Arial" pitchFamily="34" charset="-120"/>
+              </a:rPr>
+              <a:t>National Action Plan on Climate Change</a:t>
+            </a:r>
+            <a:pPr algn="l" indent="0" marL="0">
+              <a:lnSpc>
+                <a:spcPts val="1620"/>
+              </a:lnSpc>
+              <a:spcAft>
+                <a:spcPts val="300"/>
+              </a:spcAft>
+              <a:buNone/>
+            </a:pPr>
+            <a:r>
+              <a:rPr lang="en-US" sz="1200" dirty="0">
+                <a:solidFill>
+                  <a:srgbClr val="1C2833"/>
+                </a:solidFill>
+                <a:latin typeface="Arial" pitchFamily="34" charset="0"/>
+                <a:ea typeface="Arial" pitchFamily="34" charset="-122"/>
+                <a:cs typeface="Arial" pitchFamily="34" charset="-120"/>
+              </a:rPr>
+              <a:t> (Government of India, 2008, with 2022 updates) — for the 8 missions framework.</a:t>
+            </a:r>
+            <a:endParaRPr lang="en-US" sz="1200" dirty="0"/>
+          </a:p>
+        </p:txBody>
+      </p:sp>
+      <p:sp>
+        <p:nvSpPr>
+          <p:cNvPr id="5" name="Text 3"/>
+          <p:cNvSpPr/>
+          <p:nvPr/>
+        </p:nvSpPr>
+        <p:spPr>
+          <a:xfrm>
+            <a:off x="406301" y="1947565"/>
+            <a:ext cx="8498026" cy="222796"/>
+          </a:xfrm>
+          <a:prstGeom prst="rect">
+            <a:avLst/>
+          </a:prstGeom>
+          <a:noFill/>
+          <a:ln/>
+        </p:spPr>
+        <p:txBody>
+          <a:bodyPr wrap="square" lIns="0" tIns="0" rIns="0" bIns="0" rtlCol="0" anchor="t"/>
+          <a:lstStyle/>
+          <a:p>
+            <a:pPr algn="l" indent="0" marL="0">
+              <a:lnSpc>
+                <a:spcPts val="1680"/>
+              </a:lnSpc>
+              <a:spcBef>
+                <a:spcPts val="300"/>
+              </a:spcBef>
+              <a:spcAft>
+                <a:spcPts val="300"/>
+              </a:spcAft>
+              <a:buNone/>
+            </a:pPr>
+            <a:r>
+              <a:rPr lang="en-US" sz="1200" dirty="0">
+                <a:solidFill>
+                  <a:srgbClr val="1C2833"/>
+                </a:solidFill>
+                <a:latin typeface="Arial" pitchFamily="34" charset="0"/>
+                <a:ea typeface="Arial" pitchFamily="34" charset="-122"/>
+                <a:cs typeface="Arial" pitchFamily="34" charset="-120"/>
+              </a:rPr>
+              <a:t>These are all open / government sources; full references in </a:t>
+            </a:r>
+            <a:pPr algn="l" indent="0" marL="0">
+              <a:lnSpc>
+                <a:spcPts val="1680"/>
+              </a:lnSpc>
+              <a:spcBef>
+                <a:spcPts val="300"/>
+              </a:spcBef>
+              <a:spcAft>
+                <a:spcPts val="300"/>
+              </a:spcAft>
+              <a:buNone/>
+            </a:pPr>
+            <a:r>
+              <a:rPr lang="en-US" sz="1200" dirty="0">
+                <a:solidFill>
+                  <a:srgbClr val="1C2833"/>
+                </a:solidFill>
+                <a:latin typeface="Arial" pitchFamily="34" charset="0"/>
+                <a:ea typeface="Arial" pitchFamily="34" charset="-122"/>
+                <a:cs typeface="Arial" pitchFamily="34" charset="-120"/>
+              </a:rPr>
+              <a:t>sources.md</a:t>
+            </a:r>
+            <a:pPr algn="l" indent="0" marL="0">
+              <a:lnSpc>
+                <a:spcPts val="1680"/>
+              </a:lnSpc>
+              <a:spcBef>
+                <a:spcPts val="300"/>
+              </a:spcBef>
+              <a:spcAft>
+                <a:spcPts val="300"/>
+              </a:spcAft>
+              <a:buNone/>
+            </a:pPr>
+            <a:r>
+              <a:rPr lang="en-US" sz="1200" dirty="0">
+                <a:solidFill>
+                  <a:srgbClr val="1C2833"/>
+                </a:solidFill>
+                <a:latin typeface="Arial" pitchFamily="34" charset="0"/>
+                <a:ea typeface="Arial" pitchFamily="34" charset="-122"/>
+                <a:cs typeface="Arial" pitchFamily="34" charset="-120"/>
+              </a:rPr>
+              <a:t>.</a:t>
+            </a:r>
+            <a:endParaRPr lang="en-US" sz="1200" dirty="0"/>
+          </a:p>
+        </p:txBody>
+      </p:sp>
+      <p:sp>
+        <p:nvSpPr>
+          <p:cNvPr id="6" name="Text 4"/>
           <p:cNvSpPr/>
           <p:nvPr/>
         </p:nvSpPr>
@@ -3207,7 +8579,7 @@
                 <a:ea typeface="Georgia" pitchFamily="34" charset="-122"/>
                 <a:cs typeface="Georgia" pitchFamily="34" charset="-120"/>
               </a:rPr>
-              <a:t>Vocabulary</a:t>
+              <a:t>Materials</a:t>
             </a:r>
             <a:endParaRPr lang="en-US" sz="1800" dirty="0"/>
           </a:p>
@@ -3222,7 +8594,7 @@
         <p:spPr>
           <a:xfrm>
             <a:off x="634901" y="883593"/>
-            <a:ext cx="8102798" cy="1744563"/>
+            <a:ext cx="8102798" cy="1424583"/>
           </a:xfrm>
           <a:prstGeom prst="rect">
             <a:avLst/>
@@ -3245,26 +8617,6 @@
               <a:buChar char="•"/>
             </a:pPr>
             <a:r>
-              <a:rPr lang="en-US" sz="1200" i="1" dirty="0">
-                <a:solidFill>
-                  <a:srgbClr val="1C2833"/>
-                </a:solidFill>
-                <a:latin typeface="Arial" pitchFamily="34" charset="0"/>
-                <a:ea typeface="Arial" pitchFamily="34" charset="-122"/>
-                <a:cs typeface="Arial" pitchFamily="34" charset="-120"/>
-              </a:rPr>
-              <a:t>climate</a:t>
-            </a:r>
-            <a:pPr algn="l" indent="0" marL="0">
-              <a:lnSpc>
-                <a:spcPts val="1620"/>
-              </a:lnSpc>
-              <a:spcAft>
-                <a:spcPts val="300"/>
-              </a:spcAft>
-              <a:buNone/>
-            </a:pPr>
-            <a:r>
               <a:rPr lang="en-US" sz="1200" dirty="0">
                 <a:solidFill>
                   <a:srgbClr val="1C2833"/>
@@ -3273,7 +8625,7 @@
                 <a:ea typeface="Arial" pitchFamily="34" charset="-122"/>
                 <a:cs typeface="Arial" pitchFamily="34" charset="-120"/>
               </a:rPr>
-              <a:t> — the long-term average of weather in a region; measured over decades.</a:t>
+              <a:t>Whiteboard</a:t>
             </a:r>
             <a:endParaRPr lang="en-US" sz="1200" dirty="0"/>
           </a:p>
@@ -3289,26 +8641,6 @@
               <a:buChar char="•"/>
             </a:pPr>
             <a:r>
-              <a:rPr lang="en-US" sz="1200" i="1" dirty="0">
-                <a:solidFill>
-                  <a:srgbClr val="1C2833"/>
-                </a:solidFill>
-                <a:latin typeface="Arial" pitchFamily="34" charset="0"/>
-                <a:ea typeface="Arial" pitchFamily="34" charset="-122"/>
-                <a:cs typeface="Arial" pitchFamily="34" charset="-120"/>
-              </a:rPr>
-              <a:t>weather</a:t>
-            </a:r>
-            <a:pPr algn="l" indent="0" marL="0">
-              <a:lnSpc>
-                <a:spcPts val="1620"/>
-              </a:lnSpc>
-              <a:spcAft>
-                <a:spcPts val="300"/>
-              </a:spcAft>
-              <a:buNone/>
-            </a:pPr>
-            <a:r>
               <a:rPr lang="en-US" sz="1200" dirty="0">
                 <a:solidFill>
                   <a:srgbClr val="1C2833"/>
@@ -3317,7 +8649,7 @@
                 <a:ea typeface="Arial" pitchFamily="34" charset="-122"/>
                 <a:cs typeface="Arial" pitchFamily="34" charset="-120"/>
               </a:rPr>
-              <a:t> — what's happening on a particular day or week.</a:t>
+              <a:t>A simple graph (printed or projected): global average temperature since 1850 (the "hockey stick"). Source: IPCC AR6 Working Group I.</a:t>
             </a:r>
             <a:endParaRPr lang="en-US" sz="1200" dirty="0"/>
           </a:p>
@@ -3333,26 +8665,6 @@
               <a:buChar char="•"/>
             </a:pPr>
             <a:r>
-              <a:rPr lang="en-US" sz="1200" i="1" dirty="0">
-                <a:solidFill>
-                  <a:srgbClr val="1C2833"/>
-                </a:solidFill>
-                <a:latin typeface="Arial" pitchFamily="34" charset="0"/>
-                <a:ea typeface="Arial" pitchFamily="34" charset="-122"/>
-                <a:cs typeface="Arial" pitchFamily="34" charset="-120"/>
-              </a:rPr>
-              <a:t>greenhouse gas (GHG)</a:t>
-            </a:r>
-            <a:pPr algn="l" indent="0" marL="0">
-              <a:lnSpc>
-                <a:spcPts val="1620"/>
-              </a:lnSpc>
-              <a:spcAft>
-                <a:spcPts val="300"/>
-              </a:spcAft>
-              <a:buNone/>
-            </a:pPr>
-            <a:r>
               <a:rPr lang="en-US" sz="1200" dirty="0">
                 <a:solidFill>
                   <a:srgbClr val="1C2833"/>
@@ -3361,7 +8673,7 @@
                 <a:ea typeface="Arial" pitchFamily="34" charset="-122"/>
                 <a:cs typeface="Arial" pitchFamily="34" charset="-120"/>
               </a:rPr>
-              <a:t> — gases (CO₂, methane, N₂O, water vapour) that trap heat in the atmosphere.</a:t>
+              <a:t>Optional: a 2-minute video clip from the IPCC's outreach material or a reliable news source on a recent extreme-weather event</a:t>
             </a:r>
             <a:endParaRPr lang="en-US" sz="1200" dirty="0"/>
           </a:p>
@@ -3377,26 +8689,6 @@
               <a:buChar char="•"/>
             </a:pPr>
             <a:r>
-              <a:rPr lang="en-US" sz="1200" i="1" dirty="0">
-                <a:solidFill>
-                  <a:srgbClr val="1C2833"/>
-                </a:solidFill>
-                <a:latin typeface="Arial" pitchFamily="34" charset="0"/>
-                <a:ea typeface="Arial" pitchFamily="34" charset="-122"/>
-                <a:cs typeface="Arial" pitchFamily="34" charset="-120"/>
-              </a:rPr>
-              <a:t>carbon dioxide (CO₂)</a:t>
-            </a:r>
-            <a:pPr algn="l" indent="0" marL="0">
-              <a:lnSpc>
-                <a:spcPts val="1620"/>
-              </a:lnSpc>
-              <a:spcAft>
-                <a:spcPts val="300"/>
-              </a:spcAft>
-              <a:buNone/>
-            </a:pPr>
-            <a:r>
               <a:rPr lang="en-US" sz="1200" dirty="0">
                 <a:solidFill>
                   <a:srgbClr val="1C2833"/>
@@ -3405,139 +8697,7 @@
                 <a:ea typeface="Arial" pitchFamily="34" charset="-122"/>
                 <a:cs typeface="Arial" pitchFamily="34" charset="-120"/>
               </a:rPr>
-              <a:t> — the main long-lived greenhouse gas humans emit.</a:t>
-            </a:r>
-            <a:endParaRPr lang="en-US" sz="1200" dirty="0"/>
-          </a:p>
-          <a:p>
-            <a:pPr algn="l" marL="342900" indent="-342900">
-              <a:lnSpc>
-                <a:spcPts val="1620"/>
-              </a:lnSpc>
-              <a:spcAft>
-                <a:spcPts val="300"/>
-              </a:spcAft>
-              <a:buSzPct val="100000"/>
-              <a:buChar char="•"/>
-            </a:pPr>
-            <a:r>
-              <a:rPr lang="en-US" sz="1200" i="1" dirty="0">
-                <a:solidFill>
-                  <a:srgbClr val="1C2833"/>
-                </a:solidFill>
-                <a:latin typeface="Arial" pitchFamily="34" charset="0"/>
-                <a:ea typeface="Arial" pitchFamily="34" charset="-122"/>
-                <a:cs typeface="Arial" pitchFamily="34" charset="-120"/>
-              </a:rPr>
-              <a:t>anthropogenic</a:t>
-            </a:r>
-            <a:pPr algn="l" indent="0" marL="0">
-              <a:lnSpc>
-                <a:spcPts val="1620"/>
-              </a:lnSpc>
-              <a:spcAft>
-                <a:spcPts val="300"/>
-              </a:spcAft>
-              <a:buNone/>
-            </a:pPr>
-            <a:r>
-              <a:rPr lang="en-US" sz="1200" dirty="0">
-                <a:solidFill>
-                  <a:srgbClr val="1C2833"/>
-                </a:solidFill>
-                <a:latin typeface="Arial" pitchFamily="34" charset="0"/>
-                <a:ea typeface="Arial" pitchFamily="34" charset="-122"/>
-                <a:cs typeface="Arial" pitchFamily="34" charset="-120"/>
-              </a:rPr>
-              <a:t> — caused by human activity.</a:t>
-            </a:r>
-            <a:endParaRPr lang="en-US" sz="1200" dirty="0"/>
-          </a:p>
-          <a:p>
-            <a:pPr algn="l" marL="342900" indent="-342900">
-              <a:lnSpc>
-                <a:spcPts val="1620"/>
-              </a:lnSpc>
-              <a:spcAft>
-                <a:spcPts val="300"/>
-              </a:spcAft>
-              <a:buSzPct val="100000"/>
-              <a:buChar char="•"/>
-            </a:pPr>
-            <a:r>
-              <a:rPr lang="en-US" sz="1200" i="1" dirty="0">
-                <a:solidFill>
-                  <a:srgbClr val="1C2833"/>
-                </a:solidFill>
-                <a:latin typeface="Arial" pitchFamily="34" charset="0"/>
-                <a:ea typeface="Arial" pitchFamily="34" charset="-122"/>
-                <a:cs typeface="Arial" pitchFamily="34" charset="-120"/>
-              </a:rPr>
-              <a:t>IPCC</a:t>
-            </a:r>
-            <a:pPr algn="l" indent="0" marL="0">
-              <a:lnSpc>
-                <a:spcPts val="1620"/>
-              </a:lnSpc>
-              <a:spcAft>
-                <a:spcPts val="300"/>
-              </a:spcAft>
-              <a:buNone/>
-            </a:pPr>
-            <a:r>
-              <a:rPr lang="en-US" sz="1200" dirty="0">
-                <a:solidFill>
-                  <a:srgbClr val="1C2833"/>
-                </a:solidFill>
-                <a:latin typeface="Arial" pitchFamily="34" charset="0"/>
-                <a:ea typeface="Arial" pitchFamily="34" charset="-122"/>
-                <a:cs typeface="Arial" pitchFamily="34" charset="-120"/>
-              </a:rPr>
-              <a:t> — Intergovernmental Panel on Climate Change; the UN body that compiles climate science.</a:t>
-            </a:r>
-            <a:endParaRPr lang="en-US" sz="1200" dirty="0"/>
-          </a:p>
-          <a:p>
-            <a:pPr algn="l" marL="342900" indent="-342900">
-              <a:lnSpc>
-                <a:spcPts val="1620"/>
-              </a:lnSpc>
-              <a:spcAft>
-                <a:spcPts val="300"/>
-              </a:spcAft>
-              <a:buSzPct val="100000"/>
-              <a:buChar char="•"/>
-            </a:pPr>
-            <a:r>
-              <a:rPr lang="en-US" sz="1200" i="1" dirty="0">
-                <a:solidFill>
-                  <a:srgbClr val="1C2833"/>
-                </a:solidFill>
-                <a:latin typeface="Arial" pitchFamily="34" charset="0"/>
-                <a:ea typeface="Arial" pitchFamily="34" charset="-122"/>
-                <a:cs typeface="Arial" pitchFamily="34" charset="-120"/>
-              </a:rPr>
-              <a:t>SDG</a:t>
-            </a:r>
-            <a:pPr algn="l" indent="0" marL="0">
-              <a:lnSpc>
-                <a:spcPts val="1620"/>
-              </a:lnSpc>
-              <a:spcAft>
-                <a:spcPts val="300"/>
-              </a:spcAft>
-              <a:buNone/>
-            </a:pPr>
-            <a:r>
-              <a:rPr lang="en-US" sz="1200" dirty="0">
-                <a:solidFill>
-                  <a:srgbClr val="1C2833"/>
-                </a:solidFill>
-                <a:latin typeface="Arial" pitchFamily="34" charset="0"/>
-                <a:ea typeface="Arial" pitchFamily="34" charset="-122"/>
-                <a:cs typeface="Arial" pitchFamily="34" charset="-120"/>
-              </a:rPr>
-              <a:t> — Sustainable Development Goals (UN, 2015). 17 goals; SDG 13 is "Climate Action."</a:t>
+              <a:t>Notebook</a:t>
             </a:r>
             <a:endParaRPr lang="en-US" sz="1200" dirty="0"/>
           </a:p>
@@ -3695,7 +8855,7 @@
                 <a:ea typeface="Georgia" pitchFamily="34" charset="-122"/>
                 <a:cs typeface="Georgia" pitchFamily="34" charset="-120"/>
               </a:rPr>
-              <a:t>Lesson flow</a:t>
+              <a:t>Vocabulary</a:t>
             </a:r>
             <a:endParaRPr lang="en-US" sz="1800" dirty="0"/>
           </a:p>
@@ -3704,6 +8864,336 @@
       <p:sp>
         <p:nvSpPr>
           <p:cNvPr id="4" name="Text 2"/>
+          <p:cNvSpPr/>
+          <p:nvPr/>
+        </p:nvSpPr>
+        <p:spPr>
+          <a:xfrm>
+            <a:off x="634901" y="883593"/>
+            <a:ext cx="8102798" cy="1744563"/>
+          </a:xfrm>
+          <a:prstGeom prst="rect">
+            <a:avLst/>
+          </a:prstGeom>
+          <a:noFill/>
+          <a:ln/>
+        </p:spPr>
+        <p:txBody>
+          <a:bodyPr wrap="square" lIns="0" tIns="0" rIns="0" bIns="0" rtlCol="0" anchor="t"/>
+          <a:lstStyle/>
+          <a:p>
+            <a:pPr algn="l" marL="342900" indent="-342900">
+              <a:lnSpc>
+                <a:spcPts val="1620"/>
+              </a:lnSpc>
+              <a:spcAft>
+                <a:spcPts val="300"/>
+              </a:spcAft>
+              <a:buSzPct val="100000"/>
+              <a:buChar char="•"/>
+            </a:pPr>
+            <a:r>
+              <a:rPr lang="en-US" sz="1200" i="1" dirty="0">
+                <a:solidFill>
+                  <a:srgbClr val="1C2833"/>
+                </a:solidFill>
+                <a:latin typeface="Arial" pitchFamily="34" charset="0"/>
+                <a:ea typeface="Arial" pitchFamily="34" charset="-122"/>
+                <a:cs typeface="Arial" pitchFamily="34" charset="-120"/>
+              </a:rPr>
+              <a:t>climate</a:t>
+            </a:r>
+            <a:pPr algn="l" indent="0" marL="0">
+              <a:lnSpc>
+                <a:spcPts val="1620"/>
+              </a:lnSpc>
+              <a:spcAft>
+                <a:spcPts val="300"/>
+              </a:spcAft>
+              <a:buNone/>
+            </a:pPr>
+            <a:r>
+              <a:rPr lang="en-US" sz="1200" dirty="0">
+                <a:solidFill>
+                  <a:srgbClr val="1C2833"/>
+                </a:solidFill>
+                <a:latin typeface="Arial" pitchFamily="34" charset="0"/>
+                <a:ea typeface="Arial" pitchFamily="34" charset="-122"/>
+                <a:cs typeface="Arial" pitchFamily="34" charset="-120"/>
+              </a:rPr>
+              <a:t> — the long-term average of weather in a region; measured over decades.</a:t>
+            </a:r>
+            <a:endParaRPr lang="en-US" sz="1200" dirty="0"/>
+          </a:p>
+          <a:p>
+            <a:pPr algn="l" marL="342900" indent="-342900">
+              <a:lnSpc>
+                <a:spcPts val="1620"/>
+              </a:lnSpc>
+              <a:spcAft>
+                <a:spcPts val="300"/>
+              </a:spcAft>
+              <a:buSzPct val="100000"/>
+              <a:buChar char="•"/>
+            </a:pPr>
+            <a:r>
+              <a:rPr lang="en-US" sz="1200" i="1" dirty="0">
+                <a:solidFill>
+                  <a:srgbClr val="1C2833"/>
+                </a:solidFill>
+                <a:latin typeface="Arial" pitchFamily="34" charset="0"/>
+                <a:ea typeface="Arial" pitchFamily="34" charset="-122"/>
+                <a:cs typeface="Arial" pitchFamily="34" charset="-120"/>
+              </a:rPr>
+              <a:t>weather</a:t>
+            </a:r>
+            <a:pPr algn="l" indent="0" marL="0">
+              <a:lnSpc>
+                <a:spcPts val="1620"/>
+              </a:lnSpc>
+              <a:spcAft>
+                <a:spcPts val="300"/>
+              </a:spcAft>
+              <a:buNone/>
+            </a:pPr>
+            <a:r>
+              <a:rPr lang="en-US" sz="1200" dirty="0">
+                <a:solidFill>
+                  <a:srgbClr val="1C2833"/>
+                </a:solidFill>
+                <a:latin typeface="Arial" pitchFamily="34" charset="0"/>
+                <a:ea typeface="Arial" pitchFamily="34" charset="-122"/>
+                <a:cs typeface="Arial" pitchFamily="34" charset="-120"/>
+              </a:rPr>
+              <a:t> — what's happening on a particular day or week.</a:t>
+            </a:r>
+            <a:endParaRPr lang="en-US" sz="1200" dirty="0"/>
+          </a:p>
+          <a:p>
+            <a:pPr algn="l" marL="342900" indent="-342900">
+              <a:lnSpc>
+                <a:spcPts val="1620"/>
+              </a:lnSpc>
+              <a:spcAft>
+                <a:spcPts val="300"/>
+              </a:spcAft>
+              <a:buSzPct val="100000"/>
+              <a:buChar char="•"/>
+            </a:pPr>
+            <a:r>
+              <a:rPr lang="en-US" sz="1200" i="1" dirty="0">
+                <a:solidFill>
+                  <a:srgbClr val="1C2833"/>
+                </a:solidFill>
+                <a:latin typeface="Arial" pitchFamily="34" charset="0"/>
+                <a:ea typeface="Arial" pitchFamily="34" charset="-122"/>
+                <a:cs typeface="Arial" pitchFamily="34" charset="-120"/>
+              </a:rPr>
+              <a:t>greenhouse gas (GHG)</a:t>
+            </a:r>
+            <a:pPr algn="l" indent="0" marL="0">
+              <a:lnSpc>
+                <a:spcPts val="1620"/>
+              </a:lnSpc>
+              <a:spcAft>
+                <a:spcPts val="300"/>
+              </a:spcAft>
+              <a:buNone/>
+            </a:pPr>
+            <a:r>
+              <a:rPr lang="en-US" sz="1200" dirty="0">
+                <a:solidFill>
+                  <a:srgbClr val="1C2833"/>
+                </a:solidFill>
+                <a:latin typeface="Arial" pitchFamily="34" charset="0"/>
+                <a:ea typeface="Arial" pitchFamily="34" charset="-122"/>
+                <a:cs typeface="Arial" pitchFamily="34" charset="-120"/>
+              </a:rPr>
+              <a:t> — gases (CO₂, methane, N₂O, water vapour) that trap heat in the atmosphere.</a:t>
+            </a:r>
+            <a:endParaRPr lang="en-US" sz="1200" dirty="0"/>
+          </a:p>
+          <a:p>
+            <a:pPr algn="l" marL="342900" indent="-342900">
+              <a:lnSpc>
+                <a:spcPts val="1620"/>
+              </a:lnSpc>
+              <a:spcAft>
+                <a:spcPts val="300"/>
+              </a:spcAft>
+              <a:buSzPct val="100000"/>
+              <a:buChar char="•"/>
+            </a:pPr>
+            <a:r>
+              <a:rPr lang="en-US" sz="1200" i="1" dirty="0">
+                <a:solidFill>
+                  <a:srgbClr val="1C2833"/>
+                </a:solidFill>
+                <a:latin typeface="Arial" pitchFamily="34" charset="0"/>
+                <a:ea typeface="Arial" pitchFamily="34" charset="-122"/>
+                <a:cs typeface="Arial" pitchFamily="34" charset="-120"/>
+              </a:rPr>
+              <a:t>carbon dioxide (CO₂)</a:t>
+            </a:r>
+            <a:pPr algn="l" indent="0" marL="0">
+              <a:lnSpc>
+                <a:spcPts val="1620"/>
+              </a:lnSpc>
+              <a:spcAft>
+                <a:spcPts val="300"/>
+              </a:spcAft>
+              <a:buNone/>
+            </a:pPr>
+            <a:r>
+              <a:rPr lang="en-US" sz="1200" dirty="0">
+                <a:solidFill>
+                  <a:srgbClr val="1C2833"/>
+                </a:solidFill>
+                <a:latin typeface="Arial" pitchFamily="34" charset="0"/>
+                <a:ea typeface="Arial" pitchFamily="34" charset="-122"/>
+                <a:cs typeface="Arial" pitchFamily="34" charset="-120"/>
+              </a:rPr>
+              <a:t> — the main long-lived greenhouse gas humans emit.</a:t>
+            </a:r>
+            <a:endParaRPr lang="en-US" sz="1200" dirty="0"/>
+          </a:p>
+          <a:p>
+            <a:pPr algn="l" marL="342900" indent="-342900">
+              <a:lnSpc>
+                <a:spcPts val="1620"/>
+              </a:lnSpc>
+              <a:spcAft>
+                <a:spcPts val="300"/>
+              </a:spcAft>
+              <a:buSzPct val="100000"/>
+              <a:buChar char="•"/>
+            </a:pPr>
+            <a:r>
+              <a:rPr lang="en-US" sz="1200" i="1" dirty="0">
+                <a:solidFill>
+                  <a:srgbClr val="1C2833"/>
+                </a:solidFill>
+                <a:latin typeface="Arial" pitchFamily="34" charset="0"/>
+                <a:ea typeface="Arial" pitchFamily="34" charset="-122"/>
+                <a:cs typeface="Arial" pitchFamily="34" charset="-120"/>
+              </a:rPr>
+              <a:t>anthropogenic</a:t>
+            </a:r>
+            <a:pPr algn="l" indent="0" marL="0">
+              <a:lnSpc>
+                <a:spcPts val="1620"/>
+              </a:lnSpc>
+              <a:spcAft>
+                <a:spcPts val="300"/>
+              </a:spcAft>
+              <a:buNone/>
+            </a:pPr>
+            <a:r>
+              <a:rPr lang="en-US" sz="1200" dirty="0">
+                <a:solidFill>
+                  <a:srgbClr val="1C2833"/>
+                </a:solidFill>
+                <a:latin typeface="Arial" pitchFamily="34" charset="0"/>
+                <a:ea typeface="Arial" pitchFamily="34" charset="-122"/>
+                <a:cs typeface="Arial" pitchFamily="34" charset="-120"/>
+              </a:rPr>
+              <a:t> — caused by human activity.</a:t>
+            </a:r>
+            <a:endParaRPr lang="en-US" sz="1200" dirty="0"/>
+          </a:p>
+          <a:p>
+            <a:pPr algn="l" marL="342900" indent="-342900">
+              <a:lnSpc>
+                <a:spcPts val="1620"/>
+              </a:lnSpc>
+              <a:spcAft>
+                <a:spcPts val="300"/>
+              </a:spcAft>
+              <a:buSzPct val="100000"/>
+              <a:buChar char="•"/>
+            </a:pPr>
+            <a:r>
+              <a:rPr lang="en-US" sz="1200" i="1" dirty="0">
+                <a:solidFill>
+                  <a:srgbClr val="1C2833"/>
+                </a:solidFill>
+                <a:latin typeface="Arial" pitchFamily="34" charset="0"/>
+                <a:ea typeface="Arial" pitchFamily="34" charset="-122"/>
+                <a:cs typeface="Arial" pitchFamily="34" charset="-120"/>
+              </a:rPr>
+              <a:t>IPCC</a:t>
+            </a:r>
+            <a:pPr algn="l" indent="0" marL="0">
+              <a:lnSpc>
+                <a:spcPts val="1620"/>
+              </a:lnSpc>
+              <a:spcAft>
+                <a:spcPts val="300"/>
+              </a:spcAft>
+              <a:buNone/>
+            </a:pPr>
+            <a:r>
+              <a:rPr lang="en-US" sz="1200" dirty="0">
+                <a:solidFill>
+                  <a:srgbClr val="1C2833"/>
+                </a:solidFill>
+                <a:latin typeface="Arial" pitchFamily="34" charset="0"/>
+                <a:ea typeface="Arial" pitchFamily="34" charset="-122"/>
+                <a:cs typeface="Arial" pitchFamily="34" charset="-120"/>
+              </a:rPr>
+              <a:t> — Intergovernmental Panel on Climate Change; the UN body that compiles climate science.</a:t>
+            </a:r>
+            <a:endParaRPr lang="en-US" sz="1200" dirty="0"/>
+          </a:p>
+          <a:p>
+            <a:pPr algn="l" marL="342900" indent="-342900">
+              <a:lnSpc>
+                <a:spcPts val="1620"/>
+              </a:lnSpc>
+              <a:spcAft>
+                <a:spcPts val="300"/>
+              </a:spcAft>
+              <a:buSzPct val="100000"/>
+              <a:buChar char="•"/>
+            </a:pPr>
+            <a:r>
+              <a:rPr lang="en-US" sz="1200" i="1" dirty="0">
+                <a:solidFill>
+                  <a:srgbClr val="1C2833"/>
+                </a:solidFill>
+                <a:latin typeface="Arial" pitchFamily="34" charset="0"/>
+                <a:ea typeface="Arial" pitchFamily="34" charset="-122"/>
+                <a:cs typeface="Arial" pitchFamily="34" charset="-120"/>
+              </a:rPr>
+              <a:t>SDG</a:t>
+            </a:r>
+            <a:pPr algn="l" indent="0" marL="0">
+              <a:lnSpc>
+                <a:spcPts val="1620"/>
+              </a:lnSpc>
+              <a:spcAft>
+                <a:spcPts val="300"/>
+              </a:spcAft>
+              <a:buNone/>
+            </a:pPr>
+            <a:r>
+              <a:rPr lang="en-US" sz="1200" dirty="0">
+                <a:solidFill>
+                  <a:srgbClr val="1C2833"/>
+                </a:solidFill>
+                <a:latin typeface="Arial" pitchFamily="34" charset="0"/>
+                <a:ea typeface="Arial" pitchFamily="34" charset="-122"/>
+                <a:cs typeface="Arial" pitchFamily="34" charset="-120"/>
+              </a:rPr>
+              <a:t> — Sustainable Development Goals (UN, 2015). 17 goals; SDG 13 is "Climate Action."</a:t>
+            </a:r>
+            <a:endParaRPr lang="en-US" sz="1200" dirty="0"/>
+          </a:p>
+        </p:txBody>
+      </p:sp>
+      <p:sp>
+        <p:nvSpPr>
+          <p:cNvPr id="5" name="Text 3"/>
           <p:cNvSpPr/>
           <p:nvPr/>
         </p:nvSpPr>
@@ -3853,7 +9343,7 @@
                 <a:ea typeface="Georgia" pitchFamily="34" charset="-122"/>
                 <a:cs typeface="Georgia" pitchFamily="34" charset="-120"/>
               </a:rPr>
-              <a:t>Warm-up (5 min)</a:t>
+              <a:t>Lesson flow</a:t>
             </a:r>
             <a:endParaRPr lang="en-US" sz="1800" dirty="0"/>
           </a:p>
@@ -3862,100 +9352,6 @@
       <p:sp>
         <p:nvSpPr>
           <p:cNvPr id="4" name="Text 2"/>
-          <p:cNvSpPr/>
-          <p:nvPr/>
-        </p:nvSpPr>
-        <p:spPr>
-          <a:xfrm>
-            <a:off x="406301" y="870942"/>
-            <a:ext cx="8498026" cy="426541"/>
-          </a:xfrm>
-          <a:prstGeom prst="rect">
-            <a:avLst/>
-          </a:prstGeom>
-          <a:noFill/>
-          <a:ln/>
-        </p:spPr>
-        <p:txBody>
-          <a:bodyPr wrap="square" lIns="0" tIns="0" rIns="0" bIns="0" rtlCol="0" anchor="t"/>
-          <a:lstStyle/>
-          <a:p>
-            <a:pPr algn="l" indent="0" marL="0">
-              <a:lnSpc>
-                <a:spcPts val="1680"/>
-              </a:lnSpc>
-              <a:spcBef>
-                <a:spcPts val="300"/>
-              </a:spcBef>
-              <a:spcAft>
-                <a:spcPts val="300"/>
-              </a:spcAft>
-              <a:buNone/>
-            </a:pPr>
-            <a:r>
-              <a:rPr lang="en-US" sz="1200" dirty="0">
-                <a:solidFill>
-                  <a:srgbClr val="1C2833"/>
-                </a:solidFill>
-                <a:latin typeface="Arial" pitchFamily="34" charset="0"/>
-                <a:ea typeface="Arial" pitchFamily="34" charset="-122"/>
-                <a:cs typeface="Arial" pitchFamily="34" charset="-120"/>
-              </a:rPr>
-              <a:t>– Quick poll, hands up: </a:t>
-            </a:r>
-            <a:pPr algn="l" indent="0" marL="0">
-              <a:lnSpc>
-                <a:spcPts val="1680"/>
-              </a:lnSpc>
-              <a:spcBef>
-                <a:spcPts val="300"/>
-              </a:spcBef>
-              <a:spcAft>
-                <a:spcPts val="300"/>
-              </a:spcAft>
-              <a:buNone/>
-            </a:pPr>
-            <a:r>
-              <a:rPr lang="en-US" sz="1200" i="1" dirty="0">
-                <a:solidFill>
-                  <a:srgbClr val="1C2833"/>
-                </a:solidFill>
-                <a:latin typeface="Arial" pitchFamily="34" charset="0"/>
-                <a:ea typeface="Arial" pitchFamily="34" charset="-122"/>
-                <a:cs typeface="Arial" pitchFamily="34" charset="-120"/>
-              </a:rPr>
-              <a:t>"Who has heard the phrase 'climate change'? Who knows what it means in one sentence?"</a:t>
-            </a:r>
-            <a:pPr algn="l" indent="0" marL="0">
-              <a:lnSpc>
-                <a:spcPts val="1680"/>
-              </a:lnSpc>
-              <a:spcBef>
-                <a:spcPts val="300"/>
-              </a:spcBef>
-              <a:spcAft>
-                <a:spcPts val="300"/>
-              </a:spcAft>
-              <a:buNone/>
-            </a:pPr>
-            <a:r>
-              <a:rPr lang="en-US" sz="1200" dirty="0">
-                <a:solidFill>
-                  <a:srgbClr val="1C2833"/>
-                </a:solidFill>
-                <a:latin typeface="Arial" pitchFamily="34" charset="0"/>
-                <a:ea typeface="Arial" pitchFamily="34" charset="-122"/>
-                <a:cs typeface="Arial" pitchFamily="34" charset="-120"/>
-              </a:rPr>
-              <a:t> – Take 3 student definitions on the board, without correcting yet.</a:t>
-            </a:r>
-            <a:endParaRPr lang="en-US" sz="1200" dirty="0"/>
-          </a:p>
-        </p:txBody>
-      </p:sp>
-      <p:sp>
-        <p:nvSpPr>
-          <p:cNvPr id="5" name="Text 3"/>
           <p:cNvSpPr/>
           <p:nvPr/>
         </p:nvSpPr>
@@ -4105,7 +9501,7 @@
                 <a:ea typeface="Georgia" pitchFamily="34" charset="-122"/>
                 <a:cs typeface="Georgia" pitchFamily="34" charset="-120"/>
               </a:rPr>
-              <a:t>Activity (10 min) — Pair brainstorm: pitch the principle</a:t>
+              <a:t>Warm-up (5 min)</a:t>
             </a:r>
             <a:endParaRPr lang="en-US" sz="1800" dirty="0"/>
           </a:p>
@@ -4119,8 +9515,8 @@
         </p:nvSpPr>
         <p:spPr>
           <a:xfrm>
-            <a:off x="406301" y="870942"/>
-            <a:ext cx="8498026" cy="426541"/>
+            <a:off x="634901" y="883593"/>
+            <a:ext cx="8102798" cy="525661"/>
           </a:xfrm>
           <a:prstGeom prst="rect">
             <a:avLst/>
@@ -4132,17 +9528,15 @@
           <a:bodyPr wrap="square" lIns="0" tIns="0" rIns="0" bIns="0" rtlCol="0" anchor="t"/>
           <a:lstStyle/>
           <a:p>
-            <a:pPr algn="l" indent="0" marL="0">
-              <a:lnSpc>
-                <a:spcPts val="1680"/>
-              </a:lnSpc>
-              <a:spcBef>
-                <a:spcPts val="300"/>
-              </a:spcBef>
-              <a:spcAft>
-                <a:spcPts val="300"/>
-              </a:spcAft>
-              <a:buNone/>
+            <a:pPr algn="l" marL="342900" indent="-342900">
+              <a:lnSpc>
+                <a:spcPts val="1620"/>
+              </a:lnSpc>
+              <a:spcAft>
+                <a:spcPts val="300"/>
+              </a:spcAft>
+              <a:buSzPct val="100000"/>
+              <a:buChar char="•"/>
             </a:pPr>
             <a:r>
               <a:rPr lang="en-US" sz="1200" dirty="0">
@@ -4153,15 +9547,12 @@
                 <a:ea typeface="Arial" pitchFamily="34" charset="-122"/>
                 <a:cs typeface="Arial" pitchFamily="34" charset="-120"/>
               </a:rPr>
-              <a:t>– Each pair picks ONE of the four Indic ideas they've studied: 1. </a:t>
-            </a:r>
-            <a:pPr algn="l" indent="0" marL="0">
-              <a:lnSpc>
-                <a:spcPts val="1680"/>
-              </a:lnSpc>
-              <a:spcBef>
-                <a:spcPts val="300"/>
-              </a:spcBef>
+              <a:t>Quick poll, hands up: </a:t>
+            </a:r>
+            <a:pPr algn="l" indent="0" marL="0">
+              <a:lnSpc>
+                <a:spcPts val="1620"/>
+              </a:lnSpc>
               <a:spcAft>
                 <a:spcPts val="300"/>
               </a:spcAft>
@@ -4176,19 +9567,20 @@
                 <a:ea typeface="Arial" pitchFamily="34" charset="-122"/>
                 <a:cs typeface="Arial" pitchFamily="34" charset="-120"/>
               </a:rPr>
-              <a:t>vasudhaiva kuṭumbakam</a:t>
-            </a:r>
-            <a:pPr algn="l" indent="0" marL="0">
-              <a:lnSpc>
-                <a:spcPts val="1680"/>
-              </a:lnSpc>
-              <a:spcBef>
-                <a:spcPts val="300"/>
-              </a:spcBef>
-              <a:spcAft>
-                <a:spcPts val="300"/>
-              </a:spcAft>
-              <a:buNone/>
+              <a:t>"Who has heard the phrase 'climate change'? Who knows what it means in one sentence?"</a:t>
+            </a:r>
+            <a:endParaRPr lang="en-US" sz="1200" dirty="0"/>
+          </a:p>
+          <a:p>
+            <a:pPr algn="l" marL="342900" indent="-342900">
+              <a:lnSpc>
+                <a:spcPts val="1620"/>
+              </a:lnSpc>
+              <a:spcAft>
+                <a:spcPts val="300"/>
+              </a:spcAft>
+              <a:buSzPct val="100000"/>
+              <a:buChar char="•"/>
             </a:pPr>
             <a:r>
               <a:rPr lang="en-US" sz="1200" dirty="0">
@@ -4199,145 +9591,7 @@
                 <a:ea typeface="Arial" pitchFamily="34" charset="-122"/>
                 <a:cs typeface="Arial" pitchFamily="34" charset="-120"/>
               </a:rPr>
-              <a:t> (one family) 2. </a:t>
-            </a:r>
-            <a:pPr algn="l" indent="0" marL="0">
-              <a:lnSpc>
-                <a:spcPts val="1680"/>
-              </a:lnSpc>
-              <a:spcBef>
-                <a:spcPts val="300"/>
-              </a:spcBef>
-              <a:spcAft>
-                <a:spcPts val="300"/>
-              </a:spcAft>
-              <a:buNone/>
-            </a:pPr>
-            <a:r>
-              <a:rPr lang="en-US" sz="1200" i="1" dirty="0">
-                <a:solidFill>
-                  <a:srgbClr val="1C2833"/>
-                </a:solidFill>
-                <a:latin typeface="Arial" pitchFamily="34" charset="0"/>
-                <a:ea typeface="Arial" pitchFamily="34" charset="-122"/>
-                <a:cs typeface="Arial" pitchFamily="34" charset="-120"/>
-              </a:rPr>
-              <a:t>yajña</a:t>
-            </a:r>
-            <a:pPr algn="l" indent="0" marL="0">
-              <a:lnSpc>
-                <a:spcPts val="1680"/>
-              </a:lnSpc>
-              <a:spcBef>
-                <a:spcPts val="300"/>
-              </a:spcBef>
-              <a:spcAft>
-                <a:spcPts val="300"/>
-              </a:spcAft>
-              <a:buNone/>
-            </a:pPr>
-            <a:r>
-              <a:rPr lang="en-US" sz="1200" dirty="0">
-                <a:solidFill>
-                  <a:srgbClr val="1C2833"/>
-                </a:solidFill>
-                <a:latin typeface="Arial" pitchFamily="34" charset="0"/>
-                <a:ea typeface="Arial" pitchFamily="34" charset="-122"/>
-                <a:cs typeface="Arial" pitchFamily="34" charset="-120"/>
-              </a:rPr>
-              <a:t> cycle (give back) 3. </a:t>
-            </a:r>
-            <a:pPr algn="l" indent="0" marL="0">
-              <a:lnSpc>
-                <a:spcPts val="1680"/>
-              </a:lnSpc>
-              <a:spcBef>
-                <a:spcPts val="300"/>
-              </a:spcBef>
-              <a:spcAft>
-                <a:spcPts val="300"/>
-              </a:spcAft>
-              <a:buNone/>
-            </a:pPr>
-            <a:r>
-              <a:rPr lang="en-US" sz="1200" i="1" dirty="0">
-                <a:solidFill>
-                  <a:srgbClr val="1C2833"/>
-                </a:solidFill>
-                <a:latin typeface="Arial" pitchFamily="34" charset="0"/>
-                <a:ea typeface="Arial" pitchFamily="34" charset="-122"/>
-                <a:cs typeface="Arial" pitchFamily="34" charset="-120"/>
-              </a:rPr>
-              <a:t>Pṛthivī sūkta</a:t>
-            </a:r>
-            <a:pPr algn="l" indent="0" marL="0">
-              <a:lnSpc>
-                <a:spcPts val="1680"/>
-              </a:lnSpc>
-              <a:spcBef>
-                <a:spcPts val="300"/>
-              </a:spcBef>
-              <a:spcAft>
-                <a:spcPts val="300"/>
-              </a:spcAft>
-              <a:buNone/>
-            </a:pPr>
-            <a:r>
-              <a:rPr lang="en-US" sz="1200" dirty="0">
-                <a:solidFill>
-                  <a:srgbClr val="1C2833"/>
-                </a:solidFill>
-                <a:latin typeface="Arial" pitchFamily="34" charset="0"/>
-                <a:ea typeface="Arial" pitchFamily="34" charset="-122"/>
-                <a:cs typeface="Arial" pitchFamily="34" charset="-120"/>
-              </a:rPr>
-              <a:t> (Earth as mother) 4. </a:t>
-            </a:r>
-            <a:pPr algn="l" indent="0" marL="0">
-              <a:lnSpc>
-                <a:spcPts val="1680"/>
-              </a:lnSpc>
-              <a:spcBef>
-                <a:spcPts val="300"/>
-              </a:spcBef>
-              <a:spcAft>
-                <a:spcPts val="300"/>
-              </a:spcAft>
-              <a:buNone/>
-            </a:pPr>
-            <a:r>
-              <a:rPr lang="en-US" sz="1200" i="1" dirty="0">
-                <a:solidFill>
-                  <a:srgbClr val="1C2833"/>
-                </a:solidFill>
-                <a:latin typeface="Arial" pitchFamily="34" charset="0"/>
-                <a:ea typeface="Arial" pitchFamily="34" charset="-122"/>
-                <a:cs typeface="Arial" pitchFamily="34" charset="-120"/>
-              </a:rPr>
-              <a:t>Iṣopaniṣad</a:t>
-            </a:r>
-            <a:pPr algn="l" indent="0" marL="0">
-              <a:lnSpc>
-                <a:spcPts val="1680"/>
-              </a:lnSpc>
-              <a:spcBef>
-                <a:spcPts val="300"/>
-              </a:spcBef>
-              <a:spcAft>
-                <a:spcPts val="300"/>
-              </a:spcAft>
-              <a:buNone/>
-            </a:pPr>
-            <a:r>
-              <a:rPr lang="en-US" sz="1200" dirty="0">
-                <a:solidFill>
-                  <a:srgbClr val="1C2833"/>
-                </a:solidFill>
-                <a:latin typeface="Arial" pitchFamily="34" charset="0"/>
-                <a:ea typeface="Arial" pitchFamily="34" charset="-122"/>
-                <a:cs typeface="Arial" pitchFamily="34" charset="-120"/>
-              </a:rPr>
-              <a:t> mantra (use, don't grab)</a:t>
+              <a:t>Take 3 student definitions on the board, without correcting yet.</a:t>
             </a:r>
             <a:endParaRPr lang="en-US" sz="1200" dirty="0"/>
           </a:p>
@@ -4346,125 +9600,6 @@
       <p:sp>
         <p:nvSpPr>
           <p:cNvPr id="5" name="Text 3"/>
-          <p:cNvSpPr/>
-          <p:nvPr/>
-        </p:nvSpPr>
-        <p:spPr>
-          <a:xfrm>
-            <a:off x="406301" y="1373684"/>
-            <a:ext cx="8498026" cy="213271"/>
-          </a:xfrm>
-          <a:prstGeom prst="rect">
-            <a:avLst/>
-          </a:prstGeom>
-          <a:noFill/>
-          <a:ln/>
-        </p:spPr>
-        <p:txBody>
-          <a:bodyPr wrap="square" lIns="0" tIns="0" rIns="0" bIns="0" rtlCol="0" anchor="t"/>
-          <a:lstStyle/>
-          <a:p>
-            <a:pPr algn="l" indent="0" marL="0">
-              <a:lnSpc>
-                <a:spcPts val="1680"/>
-              </a:lnSpc>
-              <a:spcBef>
-                <a:spcPts val="300"/>
-              </a:spcBef>
-              <a:spcAft>
-                <a:spcPts val="300"/>
-              </a:spcAft>
-              <a:buNone/>
-            </a:pPr>
-            <a:r>
-              <a:rPr lang="en-US" sz="1200" dirty="0">
-                <a:solidFill>
-                  <a:srgbClr val="1C2833"/>
-                </a:solidFill>
-                <a:latin typeface="Arial" pitchFamily="34" charset="0"/>
-                <a:ea typeface="Arial" pitchFamily="34" charset="-122"/>
-                <a:cs typeface="Arial" pitchFamily="34" charset="-120"/>
-              </a:rPr>
-              <a:t>– They write 3 sentences: </a:t>
-            </a:r>
-            <a:pPr algn="l" indent="0" marL="0">
-              <a:lnSpc>
-                <a:spcPts val="1680"/>
-              </a:lnSpc>
-              <a:spcBef>
-                <a:spcPts val="300"/>
-              </a:spcBef>
-              <a:spcAft>
-                <a:spcPts val="300"/>
-              </a:spcAft>
-              <a:buNone/>
-            </a:pPr>
-            <a:r>
-              <a:rPr lang="en-US" sz="1200" i="1" dirty="0">
-                <a:solidFill>
-                  <a:srgbClr val="1C2833"/>
-                </a:solidFill>
-                <a:latin typeface="Arial" pitchFamily="34" charset="0"/>
-                <a:ea typeface="Arial" pitchFamily="34" charset="-122"/>
-                <a:cs typeface="Arial" pitchFamily="34" charset="-120"/>
-              </a:rPr>
-              <a:t>"How does this idea help us think about climate change? What does it NOT solve?"</a:t>
-            </a:r>
-            <a:endParaRPr lang="en-US" sz="1200" dirty="0"/>
-          </a:p>
-        </p:txBody>
-      </p:sp>
-      <p:sp>
-        <p:nvSpPr>
-          <p:cNvPr id="6" name="Text 4"/>
-          <p:cNvSpPr/>
-          <p:nvPr/>
-        </p:nvSpPr>
-        <p:spPr>
-          <a:xfrm>
-            <a:off x="406301" y="1663154"/>
-            <a:ext cx="8498026" cy="426541"/>
-          </a:xfrm>
-          <a:prstGeom prst="rect">
-            <a:avLst/>
-          </a:prstGeom>
-          <a:noFill/>
-          <a:ln/>
-        </p:spPr>
-        <p:txBody>
-          <a:bodyPr wrap="square" lIns="0" tIns="0" rIns="0" bIns="0" rtlCol="0" anchor="t"/>
-          <a:lstStyle/>
-          <a:p>
-            <a:pPr algn="l" indent="0" marL="0">
-              <a:lnSpc>
-                <a:spcPts val="1680"/>
-              </a:lnSpc>
-              <a:spcBef>
-                <a:spcPts val="300"/>
-              </a:spcBef>
-              <a:spcAft>
-                <a:spcPts val="300"/>
-              </a:spcAft>
-              <a:buNone/>
-            </a:pPr>
-            <a:r>
-              <a:rPr lang="en-US" sz="1200" dirty="0">
-                <a:solidFill>
-                  <a:srgbClr val="1C2833"/>
-                </a:solidFill>
-                <a:latin typeface="Arial" pitchFamily="34" charset="0"/>
-                <a:ea typeface="Arial" pitchFamily="34" charset="-122"/>
-                <a:cs typeface="Arial" pitchFamily="34" charset="-120"/>
-              </a:rPr>
-              <a:t>– This is the precursor to the project pitch on Day 10. Pairs should pick whichever principle they want to anchor their project around.</a:t>
-            </a:r>
-            <a:endParaRPr lang="en-US" sz="1200" dirty="0"/>
-          </a:p>
-        </p:txBody>
-      </p:sp>
-      <p:sp>
-        <p:nvSpPr>
-          <p:cNvPr id="7" name="Text 5"/>
           <p:cNvSpPr/>
           <p:nvPr/>
         </p:nvSpPr>
@@ -4614,7 +9749,7 @@
                 <a:ea typeface="Georgia" pitchFamily="34" charset="-122"/>
                 <a:cs typeface="Georgia" pitchFamily="34" charset="-120"/>
               </a:rPr>
-              <a:t>Wrap-up (5 min)</a:t>
+              <a:t>Core (25 min)</a:t>
             </a:r>
             <a:endParaRPr lang="en-US" sz="1800" dirty="0"/>
           </a:p>
@@ -4660,27 +9795,7 @@
                 <a:ea typeface="Arial" pitchFamily="34" charset="-122"/>
                 <a:cs typeface="Arial" pitchFamily="34" charset="-120"/>
               </a:rPr>
-              <a:t>Project plan due tomorrow (Day 9 morning).</a:t>
-            </a:r>
-            <a:pPr algn="l" indent="0" marL="0">
-              <a:lnSpc>
-                <a:spcPts val="1620"/>
-              </a:lnSpc>
-              <a:spcAft>
-                <a:spcPts val="300"/>
-              </a:spcAft>
-              <a:buNone/>
-            </a:pPr>
-            <a:r>
-              <a:rPr lang="en-US" sz="1200" dirty="0">
-                <a:solidFill>
-                  <a:srgbClr val="1C2833"/>
-                </a:solidFill>
-                <a:latin typeface="Arial" pitchFamily="34" charset="0"/>
-                <a:ea typeface="Arial" pitchFamily="34" charset="-122"/>
-                <a:cs typeface="Arial" pitchFamily="34" charset="-120"/>
-              </a:rPr>
-              <a:t> Each pair must submit a paragraph stating:</a:t>
+              <a:t>Climate vs. weather — the distinction.</a:t>
             </a:r>
             <a:endParaRPr lang="en-US" sz="1200" dirty="0"/>
           </a:p>
@@ -4694,8 +9809,8 @@
         </p:nvSpPr>
         <p:spPr>
           <a:xfrm>
-            <a:off x="406301" y="1254323"/>
-            <a:ext cx="8498026" cy="426541"/>
+            <a:off x="634901" y="1266974"/>
+            <a:ext cx="8102798" cy="525661"/>
           </a:xfrm>
           <a:prstGeom prst="rect">
             <a:avLst/>
@@ -4707,13 +9822,31 @@
           <a:bodyPr wrap="square" lIns="0" tIns="0" rIns="0" bIns="0" rtlCol="0" anchor="t"/>
           <a:lstStyle/>
           <a:p>
-            <a:pPr algn="l" indent="0" marL="0">
-              <a:lnSpc>
-                <a:spcPts val="1680"/>
-              </a:lnSpc>
-              <a:spcBef>
-                <a:spcPts val="300"/>
-              </a:spcBef>
+            <a:pPr algn="l" marL="342900" indent="-342900">
+              <a:lnSpc>
+                <a:spcPts val="1620"/>
+              </a:lnSpc>
+              <a:spcAft>
+                <a:spcPts val="300"/>
+              </a:spcAft>
+              <a:buSzPct val="100000"/>
+              <a:buChar char="•"/>
+            </a:pPr>
+            <a:r>
+              <a:rPr lang="en-US" sz="1200" b="1" dirty="0">
+                <a:solidFill>
+                  <a:srgbClr val="1C2833"/>
+                </a:solidFill>
+                <a:latin typeface="Arial" pitchFamily="34" charset="0"/>
+                <a:ea typeface="Arial" pitchFamily="34" charset="-122"/>
+                <a:cs typeface="Arial" pitchFamily="34" charset="-120"/>
+              </a:rPr>
+              <a:t>Weather:</a:t>
+            </a:r>
+            <a:pPr algn="l" indent="0" marL="0">
+              <a:lnSpc>
+                <a:spcPts val="1620"/>
+              </a:lnSpc>
               <a:spcAft>
                 <a:spcPts val="300"/>
               </a:spcAft>
@@ -4728,7 +9861,91 @@
                 <a:ea typeface="Arial" pitchFamily="34" charset="-122"/>
                 <a:cs typeface="Arial" pitchFamily="34" charset="-120"/>
               </a:rPr>
-              <a:t>1. Which Indic principle they will anchor on.   2. What local observation they will make on Day 9's walk.   3. What format (poster / audio / action plan) their pitch will take.</a:t>
+              <a:t> </a:t>
+            </a:r>
+            <a:pPr algn="l" indent="0" marL="0">
+              <a:lnSpc>
+                <a:spcPts val="1620"/>
+              </a:lnSpc>
+              <a:spcAft>
+                <a:spcPts val="300"/>
+              </a:spcAft>
+              <a:buNone/>
+            </a:pPr>
+            <a:r>
+              <a:rPr lang="en-US" sz="1200" i="1" dirty="0">
+                <a:solidFill>
+                  <a:srgbClr val="1C2833"/>
+                </a:solidFill>
+                <a:latin typeface="Arial" pitchFamily="34" charset="0"/>
+                <a:ea typeface="Arial" pitchFamily="34" charset="-122"/>
+                <a:cs typeface="Arial" pitchFamily="34" charset="-120"/>
+              </a:rPr>
+              <a:t>"It rained yesterday."</a:t>
+            </a:r>
+            <a:endParaRPr lang="en-US" sz="1200" dirty="0"/>
+          </a:p>
+          <a:p>
+            <a:pPr algn="l" marL="342900" indent="-342900">
+              <a:lnSpc>
+                <a:spcPts val="1620"/>
+              </a:lnSpc>
+              <a:spcAft>
+                <a:spcPts val="300"/>
+              </a:spcAft>
+              <a:buSzPct val="100000"/>
+              <a:buChar char="•"/>
+            </a:pPr>
+            <a:r>
+              <a:rPr lang="en-US" sz="1200" b="1" dirty="0">
+                <a:solidFill>
+                  <a:srgbClr val="1C2833"/>
+                </a:solidFill>
+                <a:latin typeface="Arial" pitchFamily="34" charset="0"/>
+                <a:ea typeface="Arial" pitchFamily="34" charset="-122"/>
+                <a:cs typeface="Arial" pitchFamily="34" charset="-120"/>
+              </a:rPr>
+              <a:t>Climate:</a:t>
+            </a:r>
+            <a:pPr algn="l" indent="0" marL="0">
+              <a:lnSpc>
+                <a:spcPts val="1620"/>
+              </a:lnSpc>
+              <a:spcAft>
+                <a:spcPts val="300"/>
+              </a:spcAft>
+              <a:buNone/>
+            </a:pPr>
+            <a:r>
+              <a:rPr lang="en-US" sz="1200" dirty="0">
+                <a:solidFill>
+                  <a:srgbClr val="1C2833"/>
+                </a:solidFill>
+                <a:latin typeface="Arial" pitchFamily="34" charset="0"/>
+                <a:ea typeface="Arial" pitchFamily="34" charset="-122"/>
+                <a:cs typeface="Arial" pitchFamily="34" charset="-120"/>
+              </a:rPr>
+              <a:t> </a:t>
+            </a:r>
+            <a:pPr algn="l" indent="0" marL="0">
+              <a:lnSpc>
+                <a:spcPts val="1620"/>
+              </a:lnSpc>
+              <a:spcAft>
+                <a:spcPts val="300"/>
+              </a:spcAft>
+              <a:buNone/>
+            </a:pPr>
+            <a:r>
+              <a:rPr lang="en-US" sz="1200" i="1" dirty="0">
+                <a:solidFill>
+                  <a:srgbClr val="1C2833"/>
+                </a:solidFill>
+                <a:latin typeface="Arial" pitchFamily="34" charset="0"/>
+                <a:ea typeface="Arial" pitchFamily="34" charset="-122"/>
+                <a:cs typeface="Arial" pitchFamily="34" charset="-120"/>
+              </a:rPr>
+              <a:t>"The June monsoon now arrives 7 days later than it did 50 years ago."</a:t>
             </a:r>
             <a:endParaRPr lang="en-US" sz="1200" dirty="0"/>
           </a:p>
@@ -4742,8 +9959,8 @@
         </p:nvSpPr>
         <p:spPr>
           <a:xfrm>
-            <a:off x="406301" y="1757065"/>
-            <a:ext cx="8498026" cy="426541"/>
+            <a:off x="406301" y="1881485"/>
+            <a:ext cx="8498026" cy="213271"/>
           </a:xfrm>
           <a:prstGeom prst="rect">
             <a:avLst/>
@@ -4776,7 +9993,7 @@
                 <a:ea typeface="Arial" pitchFamily="34" charset="-122"/>
                 <a:cs typeface="Arial" pitchFamily="34" charset="-120"/>
               </a:rPr>
-              <a:t>– One-sentence exit ticket: </a:t>
+              <a:t>Weather is local + short. Climate is large + long. Climate change means the </a:t>
             </a:r>
             <a:pPr algn="l" indent="0" marL="0">
               <a:lnSpc>
@@ -4799,7 +10016,7 @@
                 <a:ea typeface="Arial" pitchFamily="34" charset="-122"/>
                 <a:cs typeface="Arial" pitchFamily="34" charset="-120"/>
               </a:rPr>
-              <a:t>"The hardest thing about taking climate change seriously is _______."</a:t>
+              <a:t>long average</a:t>
             </a:r>
             <a:pPr algn="l" indent="0" marL="0">
               <a:lnSpc>
@@ -4822,7 +10039,7 @@
                 <a:ea typeface="Arial" pitchFamily="34" charset="-122"/>
                 <a:cs typeface="Arial" pitchFamily="34" charset="-120"/>
               </a:rPr>
-              <a:t> (Honest answers welcome.)</a:t>
+              <a:t> is shifting.</a:t>
             </a:r>
             <a:endParaRPr lang="en-US" sz="1200" dirty="0"/>
           </a:p>
@@ -4980,7 +10197,7 @@
                 <a:ea typeface="Georgia" pitchFamily="34" charset="-122"/>
                 <a:cs typeface="Georgia" pitchFamily="34" charset="-120"/>
               </a:rPr>
-              <a:t>Homework</a:t>
+              <a:t>Core (25 min) (cont.)</a:t>
             </a:r>
             <a:endParaRPr lang="en-US" sz="1800" dirty="0"/>
           </a:p>
@@ -4995,7 +10212,7 @@
         <p:spPr>
           <a:xfrm>
             <a:off x="634901" y="883593"/>
-            <a:ext cx="8102798" cy="300930"/>
+            <a:ext cx="8102798" cy="281880"/>
           </a:xfrm>
           <a:prstGeom prst="rect">
             <a:avLst/>
@@ -5026,7 +10243,7 @@
                 <a:ea typeface="Arial" pitchFamily="34" charset="-122"/>
                 <a:cs typeface="Arial" pitchFamily="34" charset="-120"/>
               </a:rPr>
-              <a:t>Project plan paragraph due tomorrow morning.</a:t>
+              <a:t>What's happening (the numbers, simply).</a:t>
             </a:r>
             <a:pPr algn="l" indent="0" marL="0">
               <a:lnSpc>
@@ -5046,47 +10263,7 @@
                 <a:ea typeface="Arial" pitchFamily="34" charset="-122"/>
                 <a:cs typeface="Arial" pitchFamily="34" charset="-120"/>
               </a:rPr>
-              <a:t> See </a:t>
-            </a:r>
-            <a:pPr algn="l" indent="0" marL="0">
-              <a:lnSpc>
-                <a:spcPts val="1620"/>
-              </a:lnSpc>
-              <a:spcAft>
-                <a:spcPts val="300"/>
-              </a:spcAft>
-              <a:buNone/>
-            </a:pPr>
-            <a:r>
-              <a:rPr lang="en-US" sz="1200" dirty="0">
-                <a:solidFill>
-                  <a:srgbClr val="1C2833"/>
-                </a:solidFill>
-                <a:latin typeface="Arial" pitchFamily="34" charset="0"/>
-                <a:ea typeface="Arial" pitchFamily="34" charset="-122"/>
-                <a:cs typeface="Arial" pitchFamily="34" charset="-120"/>
-              </a:rPr>
-              <a:t>assessments/project-brief.md</a:t>
-            </a:r>
-            <a:pPr algn="l" indent="0" marL="0">
-              <a:lnSpc>
-                <a:spcPts val="1620"/>
-              </a:lnSpc>
-              <a:spcAft>
-                <a:spcPts val="300"/>
-              </a:spcAft>
-              <a:buNone/>
-            </a:pPr>
-            <a:r>
-              <a:rPr lang="en-US" sz="1200" dirty="0">
-                <a:solidFill>
-                  <a:srgbClr val="1C2833"/>
-                </a:solidFill>
-                <a:latin typeface="Arial" pitchFamily="34" charset="0"/>
-                <a:ea typeface="Arial" pitchFamily="34" charset="-122"/>
-                <a:cs typeface="Arial" pitchFamily="34" charset="-120"/>
-              </a:rPr>
-              <a:t>.</a:t>
+              <a:t> Show the IPCC AR6 graph.</a:t>
             </a:r>
             <a:endParaRPr lang="en-US" sz="1200" dirty="0"/>
           </a:p>
@@ -5100,8 +10277,8 @@
         </p:nvSpPr>
         <p:spPr>
           <a:xfrm>
-            <a:off x="406301" y="1273373"/>
-            <a:ext cx="8498026" cy="426541"/>
+            <a:off x="634901" y="1266974"/>
+            <a:ext cx="8102798" cy="769441"/>
           </a:xfrm>
           <a:prstGeom prst="rect">
             <a:avLst/>
@@ -5113,17 +10290,15 @@
           <a:bodyPr wrap="square" lIns="0" tIns="0" rIns="0" bIns="0" rtlCol="0" anchor="t"/>
           <a:lstStyle/>
           <a:p>
-            <a:pPr algn="l" indent="0" marL="0">
-              <a:lnSpc>
-                <a:spcPts val="1680"/>
-              </a:lnSpc>
-              <a:spcBef>
-                <a:spcPts val="300"/>
-              </a:spcBef>
-              <a:spcAft>
-                <a:spcPts val="300"/>
-              </a:spcAft>
-              <a:buNone/>
+            <a:pPr algn="l" marL="342900" indent="-342900">
+              <a:lnSpc>
+                <a:spcPts val="1620"/>
+              </a:lnSpc>
+              <a:spcAft>
+                <a:spcPts val="300"/>
+              </a:spcAft>
+              <a:buSzPct val="100000"/>
+              <a:buChar char="•"/>
             </a:pPr>
             <a:r>
               <a:rPr lang="en-US" sz="1200" dirty="0">
@@ -5134,7 +10309,55 @@
                 <a:ea typeface="Arial" pitchFamily="34" charset="-122"/>
                 <a:cs typeface="Arial" pitchFamily="34" charset="-120"/>
               </a:rPr>
-              <a:t>– Also: pick one news headline from the last week that mentions climate change, weather extremes, or pollution. Bring a one-sentence summary.</a:t>
+              <a:t>Global average temperature has risen ~1.1°C above the 1850–1900 baseline. (IPCC AR6, 2023.)</a:t>
+            </a:r>
+            <a:endParaRPr lang="en-US" sz="1200" dirty="0"/>
+          </a:p>
+          <a:p>
+            <a:pPr algn="l" marL="342900" indent="-342900">
+              <a:lnSpc>
+                <a:spcPts val="1620"/>
+              </a:lnSpc>
+              <a:spcAft>
+                <a:spcPts val="300"/>
+              </a:spcAft>
+              <a:buSzPct val="100000"/>
+              <a:buChar char="•"/>
+            </a:pPr>
+            <a:r>
+              <a:rPr lang="en-US" sz="1200" dirty="0">
+                <a:solidFill>
+                  <a:srgbClr val="1C2833"/>
+                </a:solidFill>
+                <a:latin typeface="Arial" pitchFamily="34" charset="0"/>
+                <a:ea typeface="Arial" pitchFamily="34" charset="-122"/>
+                <a:cs typeface="Arial" pitchFamily="34" charset="-120"/>
+              </a:rPr>
+              <a:t>2023 and 2024 were the two hottest years on record by a clear margin.</a:t>
+            </a:r>
+            <a:endParaRPr lang="en-US" sz="1200" dirty="0"/>
+          </a:p>
+          <a:p>
+            <a:pPr algn="l" marL="342900" indent="-342900">
+              <a:lnSpc>
+                <a:spcPts val="1620"/>
+              </a:lnSpc>
+              <a:spcAft>
+                <a:spcPts val="300"/>
+              </a:spcAft>
+              <a:buSzPct val="100000"/>
+              <a:buChar char="•"/>
+            </a:pPr>
+            <a:r>
+              <a:rPr lang="en-US" sz="1200" dirty="0">
+                <a:solidFill>
+                  <a:srgbClr val="1C2833"/>
+                </a:solidFill>
+                <a:latin typeface="Arial" pitchFamily="34" charset="0"/>
+                <a:ea typeface="Arial" pitchFamily="34" charset="-122"/>
+                <a:cs typeface="Arial" pitchFamily="34" charset="-120"/>
+              </a:rPr>
+              <a:t>The IPCC's "Paris-agreement" target is to keep warming below 1.5°C; we are very close to that line.</a:t>
             </a:r>
             <a:endParaRPr lang="en-US" sz="1200" dirty="0"/>
           </a:p>
@@ -5292,7 +10515,7 @@
                 <a:ea typeface="Georgia" pitchFamily="34" charset="-122"/>
                 <a:cs typeface="Georgia" pitchFamily="34" charset="-120"/>
               </a:rPr>
-              <a:t>Differentiation</a:t>
+              <a:t>Core (25 min) (cont.)</a:t>
             </a:r>
             <a:endParaRPr lang="en-US" sz="1800" dirty="0"/>
           </a:p>
@@ -5307,7 +10530,7 @@
         <p:spPr>
           <a:xfrm>
             <a:off x="634901" y="883593"/>
-            <a:ext cx="8102798" cy="937022"/>
+            <a:ext cx="8102798" cy="281880"/>
           </a:xfrm>
           <a:prstGeom prst="rect">
             <a:avLst/>
@@ -5338,7 +10561,7 @@
                 <a:ea typeface="Arial" pitchFamily="34" charset="-122"/>
                 <a:cs typeface="Arial" pitchFamily="34" charset="-120"/>
               </a:rPr>
-              <a:t>One tier up:</a:t>
+              <a:t>Why it's happening.</a:t>
             </a:r>
             <a:pPr algn="l" indent="0" marL="0">
               <a:lnSpc>
@@ -5358,10 +10581,32 @@
                 <a:ea typeface="Arial" pitchFamily="34" charset="-122"/>
                 <a:cs typeface="Arial" pitchFamily="34" charset="-120"/>
               </a:rPr>
-              <a:t> Read the IPCC AR6 Synthesis Report's "Summary for Policymakers" — first 5 pages only (it's accessible online). Bring one fact tomorrow.</a:t>
+              <a:t> Briefly:</a:t>
             </a:r>
             <a:endParaRPr lang="en-US" sz="1200" dirty="0"/>
           </a:p>
+        </p:txBody>
+      </p:sp>
+      <p:sp>
+        <p:nvSpPr>
+          <p:cNvPr id="5" name="Text 3"/>
+          <p:cNvSpPr/>
+          <p:nvPr/>
+        </p:nvSpPr>
+        <p:spPr>
+          <a:xfrm>
+            <a:off x="634901" y="1266974"/>
+            <a:ext cx="8102798" cy="975122"/>
+          </a:xfrm>
+          <a:prstGeom prst="rect">
+            <a:avLst/>
+          </a:prstGeom>
+          <a:noFill/>
+          <a:ln/>
+        </p:spPr>
+        <p:txBody>
+          <a:bodyPr wrap="square" lIns="0" tIns="0" rIns="0" bIns="0" rtlCol="0" anchor="t"/>
+          <a:lstStyle/>
           <a:p>
             <a:pPr algn="l" marL="342900" indent="-342900">
               <a:lnSpc>
@@ -5374,26 +10619,6 @@
               <a:buChar char="•"/>
             </a:pPr>
             <a:r>
-              <a:rPr lang="en-US" sz="1200" b="1" dirty="0">
-                <a:solidFill>
-                  <a:srgbClr val="1C2833"/>
-                </a:solidFill>
-                <a:latin typeface="Arial" pitchFamily="34" charset="0"/>
-                <a:ea typeface="Arial" pitchFamily="34" charset="-122"/>
-                <a:cs typeface="Arial" pitchFamily="34" charset="-120"/>
-              </a:rPr>
-              <a:t>One tier down:</a:t>
-            </a:r>
-            <a:pPr algn="l" indent="0" marL="0">
-              <a:lnSpc>
-                <a:spcPts val="1620"/>
-              </a:lnSpc>
-              <a:spcAft>
-                <a:spcPts val="300"/>
-              </a:spcAft>
-              <a:buNone/>
-            </a:pPr>
-            <a:r>
               <a:rPr lang="en-US" sz="1200" dirty="0">
                 <a:solidFill>
                   <a:srgbClr val="1C2833"/>
@@ -5402,15 +10627,63 @@
                 <a:ea typeface="Arial" pitchFamily="34" charset="-122"/>
                 <a:cs typeface="Arial" pitchFamily="34" charset="-120"/>
               </a:rPr>
-              <a:t> Focus on one observable effect — the one most visible in your region (heatwaves, floods, monsoon shift). One effect, well understood, is enough.</a:t>
+              <a:t>CO₂ in the atmosphere has risen from ~280 parts per million (ppm) in the 1800s to ~420 ppm today.</a:t>
             </a:r>
             <a:endParaRPr lang="en-US" sz="1200" dirty="0"/>
           </a:p>
-        </p:txBody>
-      </p:sp>
-      <p:sp>
-        <p:nvSpPr>
-          <p:cNvPr id="5" name="Text 3"/>
+          <a:p>
+            <a:pPr algn="l" marL="342900" indent="-342900">
+              <a:lnSpc>
+                <a:spcPts val="1620"/>
+              </a:lnSpc>
+              <a:spcAft>
+                <a:spcPts val="300"/>
+              </a:spcAft>
+              <a:buSzPct val="100000"/>
+              <a:buChar char="•"/>
+            </a:pPr>
+            <a:r>
+              <a:rPr lang="en-US" sz="1200" dirty="0">
+                <a:solidFill>
+                  <a:srgbClr val="1C2833"/>
+                </a:solidFill>
+                <a:latin typeface="Arial" pitchFamily="34" charset="0"/>
+                <a:ea typeface="Arial" pitchFamily="34" charset="-122"/>
+                <a:cs typeface="Arial" pitchFamily="34" charset="-120"/>
+              </a:rPr>
+              <a:t>That CO₂ comes mainly from burning fossil fuels (coal, oil, gas) for energy and transport, from deforestation, and from cement production.</a:t>
+            </a:r>
+            <a:endParaRPr lang="en-US" sz="1200" dirty="0"/>
+          </a:p>
+          <a:p>
+            <a:pPr algn="l" marL="342900" indent="-342900">
+              <a:lnSpc>
+                <a:spcPts val="1620"/>
+              </a:lnSpc>
+              <a:spcAft>
+                <a:spcPts val="300"/>
+              </a:spcAft>
+              <a:buSzPct val="100000"/>
+              <a:buChar char="•"/>
+            </a:pPr>
+            <a:r>
+              <a:rPr lang="en-US" sz="1200" dirty="0">
+                <a:solidFill>
+                  <a:srgbClr val="1C2833"/>
+                </a:solidFill>
+                <a:latin typeface="Arial" pitchFamily="34" charset="0"/>
+                <a:ea typeface="Arial" pitchFamily="34" charset="-122"/>
+                <a:cs typeface="Arial" pitchFamily="34" charset="-120"/>
+              </a:rPr>
+              <a:t>More CO₂ → atmosphere traps more heat → average temperature rises.</a:t>
+            </a:r>
+            <a:endParaRPr lang="en-US" sz="1200" dirty="0"/>
+          </a:p>
+        </p:txBody>
+      </p:sp>
+      <p:sp>
+        <p:nvSpPr>
+          <p:cNvPr id="6" name="Text 4"/>
           <p:cNvSpPr/>
           <p:nvPr/>
         </p:nvSpPr>
